--- a/Stage1-C++-Beginner/2791-Branching 1/2791-Branching 1.pptx
+++ b/Stage1-C++-Beginner/2791-Branching 1/2791-Branching 1.pptx
@@ -11,11 +11,13 @@
     <p:sldId id="356" r:id="rId5"/>
     <p:sldId id="332" r:id="rId6"/>
     <p:sldId id="346" r:id="rId7"/>
-    <p:sldId id="334" r:id="rId8"/>
-    <p:sldId id="357" r:id="rId9"/>
-    <p:sldId id="358" r:id="rId10"/>
-    <p:sldId id="349" r:id="rId11"/>
-    <p:sldId id="261" r:id="rId12"/>
+    <p:sldId id="359" r:id="rId8"/>
+    <p:sldId id="360" r:id="rId9"/>
+    <p:sldId id="334" r:id="rId10"/>
+    <p:sldId id="357" r:id="rId11"/>
+    <p:sldId id="358" r:id="rId12"/>
+    <p:sldId id="349" r:id="rId13"/>
+    <p:sldId id="261" r:id="rId14"/>
   </p:sldIdLst>
   <p:sldSz cx="12192000" cy="6858000"/>
   <p:notesSz cx="6858000" cy="9144000"/>
@@ -122,12 +124,142 @@
 </p:presentation>
 </file>
 
-<file path=ppt/revisionInfo.xml><?xml version="1.0" encoding="utf-8"?>
-<p1510:revInfo xmlns:a="http://schemas.openxmlformats.org/drawingml/2006/main" xmlns:r="http://schemas.openxmlformats.org/officeDocument/2006/relationships" xmlns:p1510="http://schemas.microsoft.com/office/powerpoint/2015/10/main">
-  <p1510:revLst>
-    <p1510:client id="{423913E9-0CA2-B543-A545-ACBDE60398A4}" v="2" dt="2026-08-08T13:19:53.639"/>
-  </p1510:revLst>
-</p1510:revInfo>
+<file path=ppt/changesInfos/changesInfo1.xml><?xml version="1.0" encoding="utf-8"?>
+<pc:chgInfo xmlns:a="http://schemas.openxmlformats.org/drawingml/2006/main" xmlns:r="http://schemas.openxmlformats.org/officeDocument/2006/relationships" xmlns:ac="http://schemas.microsoft.com/office/drawing/2013/main/command" xmlns:pc="http://schemas.microsoft.com/office/powerpoint/2013/main/command">
+  <pc:docChgLst>
+    <pc:chgData name="Bryan Sun" userId="851caa7714272873" providerId="LiveId" clId="{9CD94D5E-0A18-4CEF-A655-0E4C15651F93}"/>
+    <pc:docChg chg="modSld">
+      <pc:chgData name="Bryan Sun" userId="851caa7714272873" providerId="LiveId" clId="{9CD94D5E-0A18-4CEF-A655-0E4C15651F93}" dt="2026-08-22T03:39:39.138" v="10" actId="20577"/>
+      <pc:docMkLst>
+        <pc:docMk/>
+      </pc:docMkLst>
+      <pc:sldChg chg="modSp mod">
+        <pc:chgData name="Bryan Sun" userId="851caa7714272873" providerId="LiveId" clId="{9CD94D5E-0A18-4CEF-A655-0E4C15651F93}" dt="2026-08-22T03:39:39.138" v="10" actId="20577"/>
+        <pc:sldMkLst>
+          <pc:docMk/>
+          <pc:sldMk cId="3602779307" sldId="359"/>
+        </pc:sldMkLst>
+        <pc:spChg chg="mod">
+          <ac:chgData name="Bryan Sun" userId="851caa7714272873" providerId="LiveId" clId="{9CD94D5E-0A18-4CEF-A655-0E4C15651F93}" dt="2026-08-22T03:39:39.138" v="10" actId="20577"/>
+          <ac:spMkLst>
+            <pc:docMk/>
+            <pc:sldMk cId="3602779307" sldId="359"/>
+            <ac:spMk id="2" creationId="{10EA9AA3-C7FA-7AA3-64C5-AB1CB65570DB}"/>
+          </ac:spMkLst>
+        </pc:spChg>
+      </pc:sldChg>
+    </pc:docChg>
+  </pc:docChgLst>
+  <pc:docChgLst>
+    <pc:chgData name="Bryan Sun" userId="851caa7714272873" providerId="LiveId" clId="{1DF0C224-3A3E-55A6-A8D1-F8F2208D385B}"/>
+    <pc:docChg chg="undo custSel addSld modSld">
+      <pc:chgData name="Bryan Sun" userId="851caa7714272873" providerId="LiveId" clId="{1DF0C224-3A3E-55A6-A8D1-F8F2208D385B}" dt="2026-08-23T04:32:19.562" v="732" actId="20577"/>
+      <pc:docMkLst>
+        <pc:docMk/>
+      </pc:docMkLst>
+      <pc:sldChg chg="modSp mod">
+        <pc:chgData name="Bryan Sun" userId="851caa7714272873" providerId="LiveId" clId="{1DF0C224-3A3E-55A6-A8D1-F8F2208D385B}" dt="2026-08-16T04:43:15.369" v="2" actId="20577"/>
+        <pc:sldMkLst>
+          <pc:docMk/>
+          <pc:sldMk cId="570729498" sldId="356"/>
+        </pc:sldMkLst>
+        <pc:graphicFrameChg chg="modGraphic">
+          <ac:chgData name="Bryan Sun" userId="851caa7714272873" providerId="LiveId" clId="{1DF0C224-3A3E-55A6-A8D1-F8F2208D385B}" dt="2026-08-16T04:43:15.369" v="2" actId="20577"/>
+          <ac:graphicFrameMkLst>
+            <pc:docMk/>
+            <pc:sldMk cId="570729498" sldId="356"/>
+            <ac:graphicFrameMk id="2" creationId="{00000000-0000-0000-0000-000000000000}"/>
+          </ac:graphicFrameMkLst>
+        </pc:graphicFrameChg>
+      </pc:sldChg>
+      <pc:sldChg chg="addSp delSp modSp mod modAnim">
+        <pc:chgData name="Bryan Sun" userId="851caa7714272873" providerId="LiveId" clId="{1DF0C224-3A3E-55A6-A8D1-F8F2208D385B}" dt="2026-08-23T04:32:19.562" v="732" actId="20577"/>
+        <pc:sldMkLst>
+          <pc:docMk/>
+          <pc:sldMk cId="3967702150" sldId="357"/>
+        </pc:sldMkLst>
+        <pc:spChg chg="add mod">
+          <ac:chgData name="Bryan Sun" userId="851caa7714272873" providerId="LiveId" clId="{1DF0C224-3A3E-55A6-A8D1-F8F2208D385B}" dt="2026-08-23T04:20:42.522" v="386" actId="1038"/>
+          <ac:spMkLst>
+            <pc:docMk/>
+            <pc:sldMk cId="3967702150" sldId="357"/>
+            <ac:spMk id="20" creationId="{22E2FADE-A6A3-659A-673A-793836050CFC}"/>
+          </ac:spMkLst>
+        </pc:spChg>
+        <pc:spChg chg="add mod">
+          <ac:chgData name="Bryan Sun" userId="851caa7714272873" providerId="LiveId" clId="{1DF0C224-3A3E-55A6-A8D1-F8F2208D385B}" dt="2026-08-23T04:21:41.925" v="430" actId="20577"/>
+          <ac:spMkLst>
+            <pc:docMk/>
+            <pc:sldMk cId="3967702150" sldId="357"/>
+            <ac:spMk id="21" creationId="{337C0F69-A02A-EB59-520B-83AB705D60DF}"/>
+          </ac:spMkLst>
+        </pc:spChg>
+        <pc:spChg chg="add del mod">
+          <ac:chgData name="Bryan Sun" userId="851caa7714272873" providerId="LiveId" clId="{1DF0C224-3A3E-55A6-A8D1-F8F2208D385B}" dt="2026-08-23T04:22:21.361" v="517" actId="20577"/>
+          <ac:spMkLst>
+            <pc:docMk/>
+            <pc:sldMk cId="3967702150" sldId="357"/>
+            <ac:spMk id="22" creationId="{73B2C187-B0F2-B43C-D3AE-3AEB4802C3D0}"/>
+          </ac:spMkLst>
+        </pc:spChg>
+        <pc:spChg chg="add del mod">
+          <ac:chgData name="Bryan Sun" userId="851caa7714272873" providerId="LiveId" clId="{1DF0C224-3A3E-55A6-A8D1-F8F2208D385B}" dt="2026-08-23T04:23:01.547" v="614"/>
+          <ac:spMkLst>
+            <pc:docMk/>
+            <pc:sldMk cId="3967702150" sldId="357"/>
+            <ac:spMk id="23" creationId="{38D5CA22-6239-DF9B-D28F-A2CACEAF2725}"/>
+          </ac:spMkLst>
+        </pc:spChg>
+        <pc:spChg chg="add mod">
+          <ac:chgData name="Bryan Sun" userId="851caa7714272873" providerId="LiveId" clId="{1DF0C224-3A3E-55A6-A8D1-F8F2208D385B}" dt="2026-08-23T04:32:19.562" v="732" actId="20577"/>
+          <ac:spMkLst>
+            <pc:docMk/>
+            <pc:sldMk cId="3967702150" sldId="357"/>
+            <ac:spMk id="24" creationId="{5121281F-1A14-C4D9-43DB-2232083CE0E6}"/>
+          </ac:spMkLst>
+        </pc:spChg>
+        <pc:picChg chg="mod">
+          <ac:chgData name="Bryan Sun" userId="851caa7714272873" providerId="LiveId" clId="{1DF0C224-3A3E-55A6-A8D1-F8F2208D385B}" dt="2026-08-23T04:27:56.965" v="693" actId="1076"/>
+          <ac:picMkLst>
+            <pc:docMk/>
+            <pc:sldMk cId="3967702150" sldId="357"/>
+            <ac:picMk id="6" creationId="{A7F00C8F-78C8-4250-88D5-5D97351F16EB}"/>
+          </ac:picMkLst>
+        </pc:picChg>
+      </pc:sldChg>
+      <pc:sldChg chg="modSp new mod">
+        <pc:chgData name="Bryan Sun" userId="851caa7714272873" providerId="LiveId" clId="{1DF0C224-3A3E-55A6-A8D1-F8F2208D385B}" dt="2026-08-16T05:24:59.510" v="180" actId="20577"/>
+        <pc:sldMkLst>
+          <pc:docMk/>
+          <pc:sldMk cId="3602779307" sldId="359"/>
+        </pc:sldMkLst>
+        <pc:spChg chg="mod">
+          <ac:chgData name="Bryan Sun" userId="851caa7714272873" providerId="LiveId" clId="{1DF0C224-3A3E-55A6-A8D1-F8F2208D385B}" dt="2026-08-16T05:24:59.510" v="180" actId="20577"/>
+          <ac:spMkLst>
+            <pc:docMk/>
+            <pc:sldMk cId="3602779307" sldId="359"/>
+            <ac:spMk id="3" creationId="{4209089D-919D-AD70-6588-5E106FE94478}"/>
+          </ac:spMkLst>
+        </pc:spChg>
+      </pc:sldChg>
+      <pc:sldChg chg="modSp new mod">
+        <pc:chgData name="Bryan Sun" userId="851caa7714272873" providerId="LiveId" clId="{1DF0C224-3A3E-55A6-A8D1-F8F2208D385B}" dt="2026-08-23T04:00:45.753" v="345" actId="20577"/>
+        <pc:sldMkLst>
+          <pc:docMk/>
+          <pc:sldMk cId="2477124522" sldId="360"/>
+        </pc:sldMkLst>
+        <pc:spChg chg="mod">
+          <ac:chgData name="Bryan Sun" userId="851caa7714272873" providerId="LiveId" clId="{1DF0C224-3A3E-55A6-A8D1-F8F2208D385B}" dt="2026-08-23T04:00:45.753" v="345" actId="20577"/>
+          <ac:spMkLst>
+            <pc:docMk/>
+            <pc:sldMk cId="2477124522" sldId="360"/>
+            <ac:spMk id="3" creationId="{EAEE1E1F-5A98-606B-FA52-98D07434C00E}"/>
+          </ac:spMkLst>
+        </pc:spChg>
+      </pc:sldChg>
+    </pc:docChg>
+  </pc:docChgLst>
+</pc:chgInfo>
 </file>
 
 <file path=ppt/slideLayouts/slideLayout1.xml><?xml version="1.0" encoding="utf-8"?>
@@ -4130,7 +4262,7 @@
           <a:p>
             <a:fld id="{48A87A34-81AB-432B-8DAE-1953F412C126}" type="datetimeFigureOut">
               <a:rPr lang="en-US" dirty="0"/>
-              <a:t>8/8/26</a:t>
+              <a:t>8/23/26</a:t>
             </a:fld>
             <a:endParaRPr lang="en-US" dirty="0"/>
           </a:p>
@@ -4406,7 +4538,7 @@
           <a:p>
             <a:fld id="{48A87A34-81AB-432B-8DAE-1953F412C126}" type="datetimeFigureOut">
               <a:rPr lang="en-US" dirty="0"/>
-              <a:t>8/8/26</a:t>
+              <a:t>8/23/26</a:t>
             </a:fld>
             <a:endParaRPr lang="en-US" dirty="0"/>
           </a:p>
@@ -4621,7 +4753,7 @@
           <a:p>
             <a:fld id="{48A87A34-81AB-432B-8DAE-1953F412C126}" type="datetimeFigureOut">
               <a:rPr lang="en-US" dirty="0"/>
-              <a:t>8/8/26</a:t>
+              <a:t>8/23/26</a:t>
             </a:fld>
             <a:endParaRPr lang="en-US" dirty="0"/>
           </a:p>
@@ -4903,7 +5035,7 @@
           <a:p>
             <a:fld id="{48A87A34-81AB-432B-8DAE-1953F412C126}" type="datetimeFigureOut">
               <a:rPr lang="en-US" dirty="0"/>
-              <a:t>8/8/26</a:t>
+              <a:t>8/23/26</a:t>
             </a:fld>
             <a:endParaRPr lang="en-US" dirty="0"/>
           </a:p>
@@ -5356,7 +5488,7 @@
           <a:p>
             <a:fld id="{48A87A34-81AB-432B-8DAE-1953F412C126}" type="datetimeFigureOut">
               <a:rPr lang="en-US" dirty="0"/>
-              <a:t>8/8/26</a:t>
+              <a:t>8/23/26</a:t>
             </a:fld>
             <a:endParaRPr lang="en-US" dirty="0"/>
           </a:p>
@@ -5921,7 +6053,7 @@
           <a:p>
             <a:fld id="{48A87A34-81AB-432B-8DAE-1953F412C126}" type="datetimeFigureOut">
               <a:rPr lang="en-US" dirty="0"/>
-              <a:t>8/8/26</a:t>
+              <a:t>8/23/26</a:t>
             </a:fld>
             <a:endParaRPr lang="en-US" dirty="0"/>
           </a:p>
@@ -6660,7 +6792,7 @@
           <a:p>
             <a:fld id="{48A87A34-81AB-432B-8DAE-1953F412C126}" type="datetimeFigureOut">
               <a:rPr lang="en-US" dirty="0"/>
-              <a:t>8/8/26</a:t>
+              <a:t>8/23/26</a:t>
             </a:fld>
             <a:endParaRPr lang="en-US" dirty="0"/>
           </a:p>
@@ -6849,7 +6981,7 @@
           <a:p>
             <a:fld id="{48A87A34-81AB-432B-8DAE-1953F412C126}" type="datetimeFigureOut">
               <a:rPr lang="en-US" dirty="0"/>
-              <a:t>8/8/26</a:t>
+              <a:t>8/23/26</a:t>
             </a:fld>
             <a:endParaRPr lang="en-US" dirty="0"/>
           </a:p>
@@ -7048,7 +7180,7 @@
           <a:p>
             <a:fld id="{48A87A34-81AB-432B-8DAE-1953F412C126}" type="datetimeFigureOut">
               <a:rPr lang="en-US" dirty="0"/>
-              <a:t>8/8/26</a:t>
+              <a:t>8/23/26</a:t>
             </a:fld>
             <a:endParaRPr lang="en-US" dirty="0"/>
           </a:p>
@@ -7237,7 +7369,7 @@
           <a:p>
             <a:fld id="{48A87A34-81AB-432B-8DAE-1953F412C126}" type="datetimeFigureOut">
               <a:rPr lang="en-US" dirty="0"/>
-              <a:t>8/8/26</a:t>
+              <a:t>8/23/26</a:t>
             </a:fld>
             <a:endParaRPr lang="en-US" dirty="0"/>
           </a:p>
@@ -7506,7 +7638,7 @@
           <a:p>
             <a:fld id="{48A87A34-81AB-432B-8DAE-1953F412C126}" type="datetimeFigureOut">
               <a:rPr lang="en-US" dirty="0"/>
-              <a:t>8/8/26</a:t>
+              <a:t>8/23/26</a:t>
             </a:fld>
             <a:endParaRPr lang="en-US" dirty="0"/>
           </a:p>
@@ -7757,7 +7889,7 @@
           <a:p>
             <a:fld id="{48A87A34-81AB-432B-8DAE-1953F412C126}" type="datetimeFigureOut">
               <a:rPr lang="en-US" dirty="0"/>
-              <a:t>8/8/26</a:t>
+              <a:t>8/23/26</a:t>
             </a:fld>
             <a:endParaRPr lang="en-US" dirty="0"/>
           </a:p>
@@ -8157,7 +8289,7 @@
           <a:p>
             <a:fld id="{48A87A34-81AB-432B-8DAE-1953F412C126}" type="datetimeFigureOut">
               <a:rPr lang="en-US" dirty="0"/>
-              <a:t>8/8/26</a:t>
+              <a:t>8/23/26</a:t>
             </a:fld>
             <a:endParaRPr lang="en-US" dirty="0"/>
           </a:p>
@@ -8294,7 +8426,7 @@
           <a:p>
             <a:fld id="{48A87A34-81AB-432B-8DAE-1953F412C126}" type="datetimeFigureOut">
               <a:rPr lang="en-US" dirty="0"/>
-              <a:t>8/8/26</a:t>
+              <a:t>8/23/26</a:t>
             </a:fld>
             <a:endParaRPr lang="en-US" dirty="0"/>
           </a:p>
@@ -8408,7 +8540,7 @@
           <a:p>
             <a:fld id="{48A87A34-81AB-432B-8DAE-1953F412C126}" type="datetimeFigureOut">
               <a:rPr lang="en-US" dirty="0"/>
-              <a:t>8/8/26</a:t>
+              <a:t>8/23/26</a:t>
             </a:fld>
             <a:endParaRPr lang="en-US" dirty="0"/>
           </a:p>
@@ -8676,7 +8808,7 @@
           <a:p>
             <a:fld id="{48A87A34-81AB-432B-8DAE-1953F412C126}" type="datetimeFigureOut">
               <a:rPr lang="en-US" dirty="0"/>
-              <a:t>8/8/26</a:t>
+              <a:t>8/23/26</a:t>
             </a:fld>
             <a:endParaRPr lang="en-US" dirty="0"/>
           </a:p>
@@ -8975,7 +9107,7 @@
           <a:p>
             <a:fld id="{48A87A34-81AB-432B-8DAE-1953F412C126}" type="datetimeFigureOut">
               <a:rPr lang="en-US" dirty="0"/>
-              <a:t>8/8/26</a:t>
+              <a:t>8/23/26</a:t>
             </a:fld>
             <a:endParaRPr lang="en-US" dirty="0"/>
           </a:p>
@@ -9723,6 +9855,2807 @@
           <a:chExt cx="0" cy="0"/>
         </a:xfrm>
       </p:grpSpPr>
+      <p:pic>
+        <p:nvPicPr>
+          <p:cNvPr id="2" name="图片 1">
+            <a:extLst>
+              <a:ext uri="{FF2B5EF4-FFF2-40B4-BE49-F238E27FC236}">
+                <a16:creationId xmlns:a16="http://schemas.microsoft.com/office/drawing/2014/main" id="{DD8E51D1-FB0B-457F-AA4D-B571F34EDD6A}"/>
+              </a:ext>
+            </a:extLst>
+          </p:cNvPr>
+          <p:cNvPicPr>
+            <a:picLocks noChangeAspect="1"/>
+          </p:cNvPicPr>
+          <p:nvPr/>
+        </p:nvPicPr>
+        <p:blipFill>
+          <a:blip r:embed="rId2"/>
+          <a:stretch>
+            <a:fillRect/>
+          </a:stretch>
+        </p:blipFill>
+        <p:spPr>
+          <a:xfrm>
+            <a:off x="678609" y="1412078"/>
+            <a:ext cx="3088356" cy="1486985"/>
+          </a:xfrm>
+          <a:prstGeom prst="rect">
+            <a:avLst/>
+          </a:prstGeom>
+        </p:spPr>
+      </p:pic>
+      <p:pic>
+        <p:nvPicPr>
+          <p:cNvPr id="3" name="图片 2">
+            <a:extLst>
+              <a:ext uri="{FF2B5EF4-FFF2-40B4-BE49-F238E27FC236}">
+                <a16:creationId xmlns:a16="http://schemas.microsoft.com/office/drawing/2014/main" id="{279E12BF-51D5-4FC8-9F2F-22A3207B5C51}"/>
+              </a:ext>
+            </a:extLst>
+          </p:cNvPr>
+          <p:cNvPicPr>
+            <a:picLocks noChangeAspect="1"/>
+          </p:cNvPicPr>
+          <p:nvPr/>
+        </p:nvPicPr>
+        <p:blipFill>
+          <a:blip r:embed="rId3"/>
+          <a:stretch>
+            <a:fillRect/>
+          </a:stretch>
+        </p:blipFill>
+        <p:spPr>
+          <a:xfrm>
+            <a:off x="8221039" y="1412077"/>
+            <a:ext cx="3141516" cy="1486985"/>
+          </a:xfrm>
+          <a:prstGeom prst="rect">
+            <a:avLst/>
+          </a:prstGeom>
+        </p:spPr>
+      </p:pic>
+      <p:pic>
+        <p:nvPicPr>
+          <p:cNvPr id="4" name="图片 3">
+            <a:extLst>
+              <a:ext uri="{FF2B5EF4-FFF2-40B4-BE49-F238E27FC236}">
+                <a16:creationId xmlns:a16="http://schemas.microsoft.com/office/drawing/2014/main" id="{6913D9A4-A535-44A0-99C0-1DC4A8154664}"/>
+              </a:ext>
+            </a:extLst>
+          </p:cNvPr>
+          <p:cNvPicPr>
+            <a:picLocks noChangeAspect="1"/>
+          </p:cNvPicPr>
+          <p:nvPr/>
+        </p:nvPicPr>
+        <p:blipFill>
+          <a:blip r:embed="rId4"/>
+          <a:stretch>
+            <a:fillRect/>
+          </a:stretch>
+        </p:blipFill>
+        <p:spPr>
+          <a:xfrm>
+            <a:off x="4119339" y="1412077"/>
+            <a:ext cx="3728084" cy="1486985"/>
+          </a:xfrm>
+          <a:prstGeom prst="rect">
+            <a:avLst/>
+          </a:prstGeom>
+        </p:spPr>
+      </p:pic>
+      <p:pic>
+        <p:nvPicPr>
+          <p:cNvPr id="5" name="图片 4">
+            <a:extLst>
+              <a:ext uri="{FF2B5EF4-FFF2-40B4-BE49-F238E27FC236}">
+                <a16:creationId xmlns:a16="http://schemas.microsoft.com/office/drawing/2014/main" id="{74B82FB4-97D4-4721-A508-769C2A7E2FCE}"/>
+              </a:ext>
+            </a:extLst>
+          </p:cNvPr>
+          <p:cNvPicPr>
+            <a:picLocks noChangeAspect="1"/>
+          </p:cNvPicPr>
+          <p:nvPr/>
+        </p:nvPicPr>
+        <p:blipFill>
+          <a:blip r:embed="rId5"/>
+          <a:stretch>
+            <a:fillRect/>
+          </a:stretch>
+        </p:blipFill>
+        <p:spPr>
+          <a:xfrm>
+            <a:off x="650240" y="3266629"/>
+            <a:ext cx="4116701" cy="1425011"/>
+          </a:xfrm>
+          <a:prstGeom prst="rect">
+            <a:avLst/>
+          </a:prstGeom>
+        </p:spPr>
+      </p:pic>
+      <p:pic>
+        <p:nvPicPr>
+          <p:cNvPr id="6" name="图片 5">
+            <a:extLst>
+              <a:ext uri="{FF2B5EF4-FFF2-40B4-BE49-F238E27FC236}">
+                <a16:creationId xmlns:a16="http://schemas.microsoft.com/office/drawing/2014/main" id="{A7F00C8F-78C8-4250-88D5-5D97351F16EB}"/>
+              </a:ext>
+            </a:extLst>
+          </p:cNvPr>
+          <p:cNvPicPr>
+            <a:picLocks noChangeAspect="1"/>
+          </p:cNvPicPr>
+          <p:nvPr/>
+        </p:nvPicPr>
+        <p:blipFill>
+          <a:blip r:embed="rId6"/>
+          <a:stretch>
+            <a:fillRect/>
+          </a:stretch>
+        </p:blipFill>
+        <p:spPr>
+          <a:xfrm>
+            <a:off x="5376498" y="3172376"/>
+            <a:ext cx="5900599" cy="1425010"/>
+          </a:xfrm>
+          <a:prstGeom prst="rect">
+            <a:avLst/>
+          </a:prstGeom>
+        </p:spPr>
+      </p:pic>
+      <p:pic>
+        <p:nvPicPr>
+          <p:cNvPr id="7" name="图片 6">
+            <a:extLst>
+              <a:ext uri="{FF2B5EF4-FFF2-40B4-BE49-F238E27FC236}">
+                <a16:creationId xmlns:a16="http://schemas.microsoft.com/office/drawing/2014/main" id="{251E28F5-5166-4504-AF2D-6095D4E08D94}"/>
+              </a:ext>
+            </a:extLst>
+          </p:cNvPr>
+          <p:cNvPicPr>
+            <a:picLocks noChangeAspect="1"/>
+          </p:cNvPicPr>
+          <p:nvPr/>
+        </p:nvPicPr>
+        <p:blipFill>
+          <a:blip r:embed="rId7"/>
+          <a:stretch>
+            <a:fillRect/>
+          </a:stretch>
+        </p:blipFill>
+        <p:spPr>
+          <a:xfrm>
+            <a:off x="650240" y="5062472"/>
+            <a:ext cx="3441136" cy="1425010"/>
+          </a:xfrm>
+          <a:prstGeom prst="rect">
+            <a:avLst/>
+          </a:prstGeom>
+        </p:spPr>
+      </p:pic>
+      <p:sp>
+        <p:nvSpPr>
+          <p:cNvPr id="9" name="文本框 8">
+            <a:extLst>
+              <a:ext uri="{FF2B5EF4-FFF2-40B4-BE49-F238E27FC236}">
+                <a16:creationId xmlns:a16="http://schemas.microsoft.com/office/drawing/2014/main" id="{8F79F9D7-B619-4E66-B6E5-9174630E3410}"/>
+              </a:ext>
+            </a:extLst>
+          </p:cNvPr>
+          <p:cNvSpPr txBox="1"/>
+          <p:nvPr/>
+        </p:nvSpPr>
+        <p:spPr>
+          <a:xfrm>
+            <a:off x="678609" y="301567"/>
+            <a:ext cx="10634659" cy="707886"/>
+          </a:xfrm>
+          <a:prstGeom prst="rect">
+            <a:avLst/>
+          </a:prstGeom>
+          <a:noFill/>
+        </p:spPr>
+        <p:txBody>
+          <a:bodyPr wrap="square" rtlCol="0">
+            <a:spAutoFit/>
+          </a:bodyPr>
+          <a:lstStyle/>
+          <a:p>
+            <a:r>
+              <a:rPr lang="en" altLang="en-US" sz="4000" dirty="0">
+                <a:solidFill>
+                  <a:schemeClr val="bg1"/>
+                </a:solidFill>
+                <a:latin typeface="Aptos Display" panose="020B0004020202020204" pitchFamily="34" charset="0"/>
+                <a:ea typeface="微软雅黑" panose="020B0503020204020204" pitchFamily="34" charset="-122"/>
+                <a:cs typeface="Consolas" panose="020B0609020204030204" pitchFamily="49" charset="0"/>
+              </a:rPr>
+              <a:t>Cloze test</a:t>
+            </a:r>
+          </a:p>
+        </p:txBody>
+      </p:sp>
+      <p:pic>
+        <p:nvPicPr>
+          <p:cNvPr id="12" name="图片 11">
+            <a:extLst>
+              <a:ext uri="{FF2B5EF4-FFF2-40B4-BE49-F238E27FC236}">
+                <a16:creationId xmlns:a16="http://schemas.microsoft.com/office/drawing/2014/main" id="{BD1067E5-148F-F29F-6A48-A2D8F5BF1158}"/>
+              </a:ext>
+            </a:extLst>
+          </p:cNvPr>
+          <p:cNvPicPr>
+            <a:picLocks noChangeAspect="1"/>
+          </p:cNvPicPr>
+          <p:nvPr/>
+        </p:nvPicPr>
+        <p:blipFill>
+          <a:blip r:embed="rId8"/>
+          <a:stretch>
+            <a:fillRect/>
+          </a:stretch>
+        </p:blipFill>
+        <p:spPr>
+          <a:xfrm>
+            <a:off x="5090381" y="5061985"/>
+            <a:ext cx="4880940" cy="1425010"/>
+          </a:xfrm>
+          <a:prstGeom prst="rect">
+            <a:avLst/>
+          </a:prstGeom>
+        </p:spPr>
+      </p:pic>
+      <p:sp>
+        <p:nvSpPr>
+          <p:cNvPr id="8" name="TextBox 7">
+            <a:extLst>
+              <a:ext uri="{FF2B5EF4-FFF2-40B4-BE49-F238E27FC236}">
+                <a16:creationId xmlns:a16="http://schemas.microsoft.com/office/drawing/2014/main" id="{6A298620-4E2E-8218-A298-10581EB62954}"/>
+              </a:ext>
+            </a:extLst>
+          </p:cNvPr>
+          <p:cNvSpPr txBox="1"/>
+          <p:nvPr/>
+        </p:nvSpPr>
+        <p:spPr>
+          <a:xfrm>
+            <a:off x="2137558" y="1412077"/>
+            <a:ext cx="1629407" cy="369332"/>
+          </a:xfrm>
+          <a:prstGeom prst="rect">
+            <a:avLst/>
+          </a:prstGeom>
+          <a:solidFill>
+            <a:schemeClr val="tx1"/>
+          </a:solidFill>
+        </p:spPr>
+        <p:txBody>
+          <a:bodyPr wrap="square" rtlCol="0">
+            <a:spAutoFit/>
+          </a:bodyPr>
+          <a:lstStyle/>
+          <a:p>
+            <a:endParaRPr lang="en-AU" dirty="0"/>
+          </a:p>
+        </p:txBody>
+      </p:sp>
+      <p:sp>
+        <p:nvSpPr>
+          <p:cNvPr id="10" name="TextBox 9">
+            <a:extLst>
+              <a:ext uri="{FF2B5EF4-FFF2-40B4-BE49-F238E27FC236}">
+                <a16:creationId xmlns:a16="http://schemas.microsoft.com/office/drawing/2014/main" id="{B066445C-FA5C-C733-BC91-1A66B4C8AF75}"/>
+              </a:ext>
+            </a:extLst>
+          </p:cNvPr>
+          <p:cNvSpPr txBox="1"/>
+          <p:nvPr/>
+        </p:nvSpPr>
+        <p:spPr>
+          <a:xfrm>
+            <a:off x="2204058" y="2293382"/>
+            <a:ext cx="821775" cy="307777"/>
+          </a:xfrm>
+          <a:prstGeom prst="rect">
+            <a:avLst/>
+          </a:prstGeom>
+          <a:solidFill>
+            <a:schemeClr val="tx1"/>
+          </a:solidFill>
+        </p:spPr>
+        <p:txBody>
+          <a:bodyPr wrap="square" lIns="0" tIns="0" rIns="0" bIns="0" rtlCol="0">
+            <a:spAutoFit/>
+          </a:bodyPr>
+          <a:lstStyle/>
+          <a:p>
+            <a:r>
+              <a:rPr lang="en-US" altLang="zh-CN" sz="2000" dirty="0">
+                <a:solidFill>
+                  <a:schemeClr val="bg1"/>
+                </a:solidFill>
+                <a:latin typeface="Consolas" panose="020B0609020204030204" pitchFamily="49" charset="0"/>
+                <a:cs typeface="Consolas" panose="020B0609020204030204" pitchFamily="49" charset="0"/>
+              </a:rPr>
+              <a:t>pass</a:t>
+            </a:r>
+            <a:endParaRPr lang="en-AU" sz="2000" dirty="0">
+              <a:solidFill>
+                <a:schemeClr val="bg1"/>
+              </a:solidFill>
+              <a:latin typeface="Consolas" panose="020B0609020204030204" pitchFamily="49" charset="0"/>
+              <a:cs typeface="Consolas" panose="020B0609020204030204" pitchFamily="49" charset="0"/>
+            </a:endParaRPr>
+          </a:p>
+        </p:txBody>
+      </p:sp>
+      <p:sp>
+        <p:nvSpPr>
+          <p:cNvPr id="11" name="TextBox 10">
+            <a:extLst>
+              <a:ext uri="{FF2B5EF4-FFF2-40B4-BE49-F238E27FC236}">
+                <a16:creationId xmlns:a16="http://schemas.microsoft.com/office/drawing/2014/main" id="{4EA2476C-D772-81B0-8EB3-59758EAF332B}"/>
+              </a:ext>
+            </a:extLst>
+          </p:cNvPr>
+          <p:cNvSpPr txBox="1"/>
+          <p:nvPr/>
+        </p:nvSpPr>
+        <p:spPr>
+          <a:xfrm>
+            <a:off x="2187433" y="4096052"/>
+            <a:ext cx="2351316" cy="307777"/>
+          </a:xfrm>
+          <a:prstGeom prst="rect">
+            <a:avLst/>
+          </a:prstGeom>
+          <a:solidFill>
+            <a:schemeClr val="tx1"/>
+          </a:solidFill>
+        </p:spPr>
+        <p:txBody>
+          <a:bodyPr wrap="square" lIns="0" tIns="0" rIns="0" bIns="0" rtlCol="0">
+            <a:spAutoFit/>
+          </a:bodyPr>
+          <a:lstStyle/>
+          <a:p>
+            <a:r>
+              <a:rPr lang="en-US" altLang="zh-CN" sz="2000" dirty="0">
+                <a:solidFill>
+                  <a:schemeClr val="bg1"/>
+                </a:solidFill>
+                <a:latin typeface="Consolas" panose="020B0609020204030204" pitchFamily="49" charset="0"/>
+                <a:cs typeface="Consolas" panose="020B0609020204030204" pitchFamily="49" charset="0"/>
+              </a:rPr>
+              <a:t>n</a:t>
+            </a:r>
+            <a:r>
+              <a:rPr lang="zh-CN" altLang="en-US" sz="2000" dirty="0">
+                <a:solidFill>
+                  <a:schemeClr val="bg1"/>
+                </a:solidFill>
+                <a:latin typeface="Consolas" panose="020B0609020204030204" pitchFamily="49" charset="0"/>
+                <a:cs typeface="Consolas" panose="020B0609020204030204" pitchFamily="49" charset="0"/>
+              </a:rPr>
+              <a:t> </a:t>
+            </a:r>
+            <a:r>
+              <a:rPr lang="en-US" altLang="zh-CN" sz="2000" dirty="0">
+                <a:solidFill>
+                  <a:schemeClr val="bg1"/>
+                </a:solidFill>
+                <a:latin typeface="Consolas" panose="020B0609020204030204" pitchFamily="49" charset="0"/>
+                <a:cs typeface="Consolas" panose="020B0609020204030204" pitchFamily="49" charset="0"/>
+              </a:rPr>
+              <a:t>div.</a:t>
+            </a:r>
+            <a:r>
+              <a:rPr lang="zh-CN" altLang="en-US" sz="2000" dirty="0">
+                <a:solidFill>
+                  <a:schemeClr val="bg1"/>
+                </a:solidFill>
+                <a:latin typeface="Consolas" panose="020B0609020204030204" pitchFamily="49" charset="0"/>
+                <a:cs typeface="Consolas" panose="020B0609020204030204" pitchFamily="49" charset="0"/>
+              </a:rPr>
+              <a:t> </a:t>
+            </a:r>
+            <a:r>
+              <a:rPr lang="en-US" altLang="zh-CN" sz="2000" dirty="0">
+                <a:solidFill>
+                  <a:schemeClr val="bg1"/>
+                </a:solidFill>
+                <a:latin typeface="Consolas" panose="020B0609020204030204" pitchFamily="49" charset="0"/>
+                <a:cs typeface="Consolas" panose="020B0609020204030204" pitchFamily="49" charset="0"/>
+              </a:rPr>
+              <a:t>by</a:t>
+            </a:r>
+            <a:r>
+              <a:rPr lang="zh-CN" altLang="en-US" sz="2000" dirty="0">
+                <a:solidFill>
+                  <a:schemeClr val="bg1"/>
+                </a:solidFill>
+                <a:latin typeface="Consolas" panose="020B0609020204030204" pitchFamily="49" charset="0"/>
+                <a:cs typeface="Consolas" panose="020B0609020204030204" pitchFamily="49" charset="0"/>
+              </a:rPr>
+              <a:t> </a:t>
+            </a:r>
+            <a:r>
+              <a:rPr lang="en-US" altLang="zh-CN" sz="2000" dirty="0">
+                <a:solidFill>
+                  <a:schemeClr val="bg1"/>
+                </a:solidFill>
+                <a:latin typeface="Consolas" panose="020B0609020204030204" pitchFamily="49" charset="0"/>
+                <a:cs typeface="Consolas" panose="020B0609020204030204" pitchFamily="49" charset="0"/>
+              </a:rPr>
+              <a:t>3</a:t>
+            </a:r>
+            <a:r>
+              <a:rPr lang="zh-CN" altLang="en-US" sz="2000" dirty="0">
+                <a:solidFill>
+                  <a:schemeClr val="bg1"/>
+                </a:solidFill>
+                <a:latin typeface="Consolas" panose="020B0609020204030204" pitchFamily="49" charset="0"/>
+                <a:cs typeface="Consolas" panose="020B0609020204030204" pitchFamily="49" charset="0"/>
+              </a:rPr>
+              <a:t> </a:t>
+            </a:r>
+            <a:r>
+              <a:rPr lang="en-US" altLang="zh-CN" sz="2000" dirty="0">
+                <a:solidFill>
+                  <a:schemeClr val="bg1"/>
+                </a:solidFill>
+                <a:latin typeface="Consolas" panose="020B0609020204030204" pitchFamily="49" charset="0"/>
+                <a:cs typeface="Consolas" panose="020B0609020204030204" pitchFamily="49" charset="0"/>
+              </a:rPr>
+              <a:t>&amp;</a:t>
+            </a:r>
+            <a:r>
+              <a:rPr lang="zh-CN" altLang="en-US" sz="2000" dirty="0">
+                <a:solidFill>
+                  <a:schemeClr val="bg1"/>
+                </a:solidFill>
+                <a:latin typeface="Consolas" panose="020B0609020204030204" pitchFamily="49" charset="0"/>
+                <a:cs typeface="Consolas" panose="020B0609020204030204" pitchFamily="49" charset="0"/>
+              </a:rPr>
+              <a:t> </a:t>
+            </a:r>
+            <a:r>
+              <a:rPr lang="en-US" altLang="zh-CN" sz="2000" dirty="0">
+                <a:solidFill>
+                  <a:schemeClr val="bg1"/>
+                </a:solidFill>
+                <a:latin typeface="Consolas" panose="020B0609020204030204" pitchFamily="49" charset="0"/>
+                <a:cs typeface="Consolas" panose="020B0609020204030204" pitchFamily="49" charset="0"/>
+              </a:rPr>
+              <a:t>5</a:t>
+            </a:r>
+            <a:endParaRPr lang="en-AU" sz="2000" dirty="0">
+              <a:solidFill>
+                <a:schemeClr val="bg1"/>
+              </a:solidFill>
+              <a:latin typeface="Consolas" panose="020B0609020204030204" pitchFamily="49" charset="0"/>
+              <a:cs typeface="Consolas" panose="020B0609020204030204" pitchFamily="49" charset="0"/>
+            </a:endParaRPr>
+          </a:p>
+        </p:txBody>
+      </p:sp>
+      <p:sp>
+        <p:nvSpPr>
+          <p:cNvPr id="13" name="TextBox 12">
+            <a:extLst>
+              <a:ext uri="{FF2B5EF4-FFF2-40B4-BE49-F238E27FC236}">
+                <a16:creationId xmlns:a16="http://schemas.microsoft.com/office/drawing/2014/main" id="{5255860A-B87C-BAD1-8827-E8DBD81D1C68}"/>
+              </a:ext>
+            </a:extLst>
+          </p:cNvPr>
+          <p:cNvSpPr txBox="1"/>
+          <p:nvPr/>
+        </p:nvSpPr>
+        <p:spPr>
+          <a:xfrm>
+            <a:off x="2137557" y="4971573"/>
+            <a:ext cx="1629407" cy="369332"/>
+          </a:xfrm>
+          <a:prstGeom prst="rect">
+            <a:avLst/>
+          </a:prstGeom>
+          <a:solidFill>
+            <a:schemeClr val="tx1"/>
+          </a:solidFill>
+        </p:spPr>
+        <p:txBody>
+          <a:bodyPr wrap="square" rtlCol="0">
+            <a:spAutoFit/>
+          </a:bodyPr>
+          <a:lstStyle/>
+          <a:p>
+            <a:endParaRPr lang="en-AU" dirty="0"/>
+          </a:p>
+        </p:txBody>
+      </p:sp>
+      <p:sp>
+        <p:nvSpPr>
+          <p:cNvPr id="14" name="TextBox 13">
+            <a:extLst>
+              <a:ext uri="{FF2B5EF4-FFF2-40B4-BE49-F238E27FC236}">
+                <a16:creationId xmlns:a16="http://schemas.microsoft.com/office/drawing/2014/main" id="{34656719-9FAA-DFBF-EDF5-3061740434A4}"/>
+              </a:ext>
+            </a:extLst>
+          </p:cNvPr>
+          <p:cNvSpPr txBox="1"/>
+          <p:nvPr/>
+        </p:nvSpPr>
+        <p:spPr>
+          <a:xfrm>
+            <a:off x="2204059" y="5916485"/>
+            <a:ext cx="1629407" cy="261610"/>
+          </a:xfrm>
+          <a:prstGeom prst="rect">
+            <a:avLst/>
+          </a:prstGeom>
+          <a:solidFill>
+            <a:schemeClr val="tx1"/>
+          </a:solidFill>
+        </p:spPr>
+        <p:txBody>
+          <a:bodyPr wrap="square" lIns="0" tIns="0" rIns="0" bIns="0" rtlCol="0">
+            <a:spAutoFit/>
+          </a:bodyPr>
+          <a:lstStyle/>
+          <a:p>
+            <a:r>
+              <a:rPr lang="en-US" altLang="zh-CN" sz="1700" dirty="0">
+                <a:solidFill>
+                  <a:schemeClr val="bg1"/>
+                </a:solidFill>
+                <a:latin typeface="Consolas" panose="020B0609020204030204" pitchFamily="49" charset="0"/>
+                <a:cs typeface="Consolas" panose="020B0609020204030204" pitchFamily="49" charset="0"/>
+              </a:rPr>
+              <a:t>born</a:t>
+            </a:r>
+            <a:r>
+              <a:rPr lang="zh-CN" altLang="en-US" sz="1700" dirty="0">
+                <a:solidFill>
+                  <a:schemeClr val="bg1"/>
+                </a:solidFill>
+                <a:latin typeface="Consolas" panose="020B0609020204030204" pitchFamily="49" charset="0"/>
+                <a:cs typeface="Consolas" panose="020B0609020204030204" pitchFamily="49" charset="0"/>
+              </a:rPr>
+              <a:t> </a:t>
+            </a:r>
+            <a:r>
+              <a:rPr lang="en-US" altLang="zh-CN" sz="1700" dirty="0">
+                <a:solidFill>
+                  <a:schemeClr val="bg1"/>
+                </a:solidFill>
+                <a:latin typeface="Consolas" panose="020B0609020204030204" pitchFamily="49" charset="0"/>
+                <a:cs typeface="Consolas" panose="020B0609020204030204" pitchFamily="49" charset="0"/>
+              </a:rPr>
+              <a:t>2nd</a:t>
+            </a:r>
+            <a:r>
+              <a:rPr lang="zh-CN" altLang="en-US" sz="1700" dirty="0">
+                <a:solidFill>
+                  <a:schemeClr val="bg1"/>
+                </a:solidFill>
+                <a:latin typeface="Consolas" panose="020B0609020204030204" pitchFamily="49" charset="0"/>
+                <a:cs typeface="Consolas" panose="020B0609020204030204" pitchFamily="49" charset="0"/>
+              </a:rPr>
+              <a:t> </a:t>
+            </a:r>
+            <a:r>
+              <a:rPr lang="en-US" altLang="zh-CN" sz="1700" dirty="0">
+                <a:solidFill>
+                  <a:schemeClr val="bg1"/>
+                </a:solidFill>
+                <a:latin typeface="Consolas" panose="020B0609020204030204" pitchFamily="49" charset="0"/>
+                <a:cs typeface="Consolas" panose="020B0609020204030204" pitchFamily="49" charset="0"/>
+              </a:rPr>
+              <a:t>half</a:t>
+            </a:r>
+            <a:endParaRPr lang="en-AU" sz="1700" dirty="0">
+              <a:solidFill>
+                <a:schemeClr val="bg1"/>
+              </a:solidFill>
+              <a:latin typeface="Consolas" panose="020B0609020204030204" pitchFamily="49" charset="0"/>
+              <a:cs typeface="Consolas" panose="020B0609020204030204" pitchFamily="49" charset="0"/>
+            </a:endParaRPr>
+          </a:p>
+        </p:txBody>
+      </p:sp>
+      <p:sp>
+        <p:nvSpPr>
+          <p:cNvPr id="15" name="TextBox 14">
+            <a:extLst>
+              <a:ext uri="{FF2B5EF4-FFF2-40B4-BE49-F238E27FC236}">
+                <a16:creationId xmlns:a16="http://schemas.microsoft.com/office/drawing/2014/main" id="{A4CA3674-B42E-C9F3-FBCC-DBE9C0193F64}"/>
+              </a:ext>
+            </a:extLst>
+          </p:cNvPr>
+          <p:cNvSpPr txBox="1"/>
+          <p:nvPr/>
+        </p:nvSpPr>
+        <p:spPr>
+          <a:xfrm>
+            <a:off x="5666292" y="2293382"/>
+            <a:ext cx="1914915" cy="307777"/>
+          </a:xfrm>
+          <a:prstGeom prst="rect">
+            <a:avLst/>
+          </a:prstGeom>
+          <a:solidFill>
+            <a:schemeClr val="tx1"/>
+          </a:solidFill>
+        </p:spPr>
+        <p:txBody>
+          <a:bodyPr wrap="square" lIns="0" tIns="0" rIns="0" bIns="0" rtlCol="0">
+            <a:spAutoFit/>
+          </a:bodyPr>
+          <a:lstStyle/>
+          <a:p>
+            <a:r>
+              <a:rPr lang="en-US" altLang="zh-CN" sz="2000" dirty="0">
+                <a:solidFill>
+                  <a:schemeClr val="bg1"/>
+                </a:solidFill>
+                <a:latin typeface="Consolas" panose="020B0609020204030204" pitchFamily="49" charset="0"/>
+                <a:cs typeface="Consolas" panose="020B0609020204030204" pitchFamily="49" charset="0"/>
+              </a:rPr>
+              <a:t>cannot</a:t>
+            </a:r>
+            <a:r>
+              <a:rPr lang="zh-CN" altLang="en-US" sz="2000" dirty="0">
+                <a:solidFill>
+                  <a:schemeClr val="bg1"/>
+                </a:solidFill>
+                <a:latin typeface="Consolas" panose="020B0609020204030204" pitchFamily="49" charset="0"/>
+                <a:cs typeface="Consolas" panose="020B0609020204030204" pitchFamily="49" charset="0"/>
+              </a:rPr>
+              <a:t> </a:t>
+            </a:r>
+            <a:r>
+              <a:rPr lang="en-US" altLang="zh-CN" sz="2000" dirty="0">
+                <a:solidFill>
+                  <a:schemeClr val="bg1"/>
+                </a:solidFill>
+                <a:latin typeface="Consolas" panose="020B0609020204030204" pitchFamily="49" charset="0"/>
+                <a:cs typeface="Consolas" panose="020B0609020204030204" pitchFamily="49" charset="0"/>
+              </a:rPr>
+              <a:t>afford</a:t>
+            </a:r>
+            <a:endParaRPr lang="en-AU" sz="2000" dirty="0">
+              <a:solidFill>
+                <a:schemeClr val="bg1"/>
+              </a:solidFill>
+              <a:latin typeface="Consolas" panose="020B0609020204030204" pitchFamily="49" charset="0"/>
+              <a:cs typeface="Consolas" panose="020B0609020204030204" pitchFamily="49" charset="0"/>
+            </a:endParaRPr>
+          </a:p>
+        </p:txBody>
+      </p:sp>
+      <p:sp>
+        <p:nvSpPr>
+          <p:cNvPr id="16" name="TextBox 15">
+            <a:extLst>
+              <a:ext uri="{FF2B5EF4-FFF2-40B4-BE49-F238E27FC236}">
+                <a16:creationId xmlns:a16="http://schemas.microsoft.com/office/drawing/2014/main" id="{1A09784D-7600-96B1-F4A1-881C7F6FD7C4}"/>
+              </a:ext>
+            </a:extLst>
+          </p:cNvPr>
+          <p:cNvSpPr txBox="1"/>
+          <p:nvPr/>
+        </p:nvSpPr>
+        <p:spPr>
+          <a:xfrm>
+            <a:off x="6799755" y="3081963"/>
+            <a:ext cx="1629407" cy="369332"/>
+          </a:xfrm>
+          <a:prstGeom prst="rect">
+            <a:avLst/>
+          </a:prstGeom>
+          <a:solidFill>
+            <a:schemeClr val="tx1"/>
+          </a:solidFill>
+        </p:spPr>
+        <p:txBody>
+          <a:bodyPr wrap="square" rtlCol="0">
+            <a:spAutoFit/>
+          </a:bodyPr>
+          <a:lstStyle/>
+          <a:p>
+            <a:endParaRPr lang="en-AU" dirty="0"/>
+          </a:p>
+        </p:txBody>
+      </p:sp>
+      <p:sp>
+        <p:nvSpPr>
+          <p:cNvPr id="17" name="TextBox 16">
+            <a:extLst>
+              <a:ext uri="{FF2B5EF4-FFF2-40B4-BE49-F238E27FC236}">
+                <a16:creationId xmlns:a16="http://schemas.microsoft.com/office/drawing/2014/main" id="{4E573BAF-EE8A-3381-15BC-B0316416D25A}"/>
+              </a:ext>
+            </a:extLst>
+          </p:cNvPr>
+          <p:cNvSpPr txBox="1"/>
+          <p:nvPr/>
+        </p:nvSpPr>
+        <p:spPr>
+          <a:xfrm>
+            <a:off x="6898276" y="4018578"/>
+            <a:ext cx="4141025" cy="276999"/>
+          </a:xfrm>
+          <a:prstGeom prst="rect">
+            <a:avLst/>
+          </a:prstGeom>
+          <a:solidFill>
+            <a:schemeClr val="tx1"/>
+          </a:solidFill>
+        </p:spPr>
+        <p:txBody>
+          <a:bodyPr wrap="square" lIns="0" tIns="0" rIns="0" bIns="0" rtlCol="0">
+            <a:spAutoFit/>
+          </a:bodyPr>
+          <a:lstStyle/>
+          <a:p>
+            <a:r>
+              <a:rPr lang="en-US" altLang="zh-CN" dirty="0">
+                <a:solidFill>
+                  <a:schemeClr val="bg1"/>
+                </a:solidFill>
+                <a:latin typeface="Consolas" panose="020B0609020204030204" pitchFamily="49" charset="0"/>
+                <a:cs typeface="Consolas" panose="020B0609020204030204" pitchFamily="49" charset="0"/>
+              </a:rPr>
+              <a:t>90:</a:t>
+            </a:r>
+            <a:r>
+              <a:rPr lang="zh-CN" altLang="en-US" dirty="0">
+                <a:solidFill>
+                  <a:schemeClr val="bg1"/>
+                </a:solidFill>
+                <a:latin typeface="Consolas" panose="020B0609020204030204" pitchFamily="49" charset="0"/>
+                <a:cs typeface="Consolas" panose="020B0609020204030204" pitchFamily="49" charset="0"/>
+              </a:rPr>
+              <a:t> </a:t>
+            </a:r>
+            <a:r>
+              <a:rPr lang="en-US" altLang="zh-CN" dirty="0">
+                <a:solidFill>
+                  <a:schemeClr val="bg1"/>
+                </a:solidFill>
+                <a:latin typeface="Consolas" panose="020B0609020204030204" pitchFamily="49" charset="0"/>
+                <a:cs typeface="Consolas" panose="020B0609020204030204" pitchFamily="49" charset="0"/>
+              </a:rPr>
+              <a:t>B,</a:t>
+            </a:r>
+            <a:r>
+              <a:rPr lang="zh-CN" altLang="en-US" dirty="0">
+                <a:solidFill>
+                  <a:schemeClr val="bg1"/>
+                </a:solidFill>
+                <a:latin typeface="Consolas" panose="020B0609020204030204" pitchFamily="49" charset="0"/>
+                <a:cs typeface="Consolas" panose="020B0609020204030204" pitchFamily="49" charset="0"/>
+              </a:rPr>
+              <a:t> </a:t>
+            </a:r>
+            <a:r>
+              <a:rPr lang="en-US" altLang="zh-CN" dirty="0">
+                <a:solidFill>
+                  <a:schemeClr val="bg1"/>
+                </a:solidFill>
+                <a:latin typeface="Consolas" panose="020B0609020204030204" pitchFamily="49" charset="0"/>
+                <a:cs typeface="Consolas" panose="020B0609020204030204" pitchFamily="49" charset="0"/>
+              </a:rPr>
+              <a:t>98:</a:t>
+            </a:r>
+            <a:r>
+              <a:rPr lang="zh-CN" altLang="en-US" dirty="0">
+                <a:solidFill>
+                  <a:schemeClr val="bg1"/>
+                </a:solidFill>
+                <a:latin typeface="Consolas" panose="020B0609020204030204" pitchFamily="49" charset="0"/>
+                <a:cs typeface="Consolas" panose="020B0609020204030204" pitchFamily="49" charset="0"/>
+              </a:rPr>
+              <a:t> </a:t>
+            </a:r>
+            <a:r>
+              <a:rPr lang="en-US" altLang="zh-CN" dirty="0">
+                <a:solidFill>
+                  <a:schemeClr val="bg1"/>
+                </a:solidFill>
+                <a:latin typeface="Consolas" panose="020B0609020204030204" pitchFamily="49" charset="0"/>
+                <a:cs typeface="Consolas" panose="020B0609020204030204" pitchFamily="49" charset="0"/>
+              </a:rPr>
+              <a:t>A.</a:t>
+            </a:r>
+            <a:r>
+              <a:rPr lang="zh-CN" altLang="en-US" dirty="0">
+                <a:solidFill>
+                  <a:schemeClr val="bg1"/>
+                </a:solidFill>
+                <a:latin typeface="Consolas" panose="020B0609020204030204" pitchFamily="49" charset="0"/>
+                <a:cs typeface="Consolas" panose="020B0609020204030204" pitchFamily="49" charset="0"/>
+              </a:rPr>
+              <a:t> </a:t>
+            </a:r>
+            <a:r>
+              <a:rPr lang="en-US" altLang="zh-CN" dirty="0">
+                <a:solidFill>
+                  <a:schemeClr val="bg1"/>
+                </a:solidFill>
+                <a:latin typeface="Consolas" panose="020B0609020204030204" pitchFamily="49" charset="0"/>
+                <a:cs typeface="Consolas" panose="020B0609020204030204" pitchFamily="49" charset="0"/>
+              </a:rPr>
+              <a:t>You</a:t>
+            </a:r>
+            <a:r>
+              <a:rPr lang="zh-CN" altLang="en-US" dirty="0">
+                <a:solidFill>
+                  <a:schemeClr val="bg1"/>
+                </a:solidFill>
+                <a:latin typeface="Consolas" panose="020B0609020204030204" pitchFamily="49" charset="0"/>
+                <a:cs typeface="Consolas" panose="020B0609020204030204" pitchFamily="49" charset="0"/>
+              </a:rPr>
+              <a:t> </a:t>
+            </a:r>
+            <a:r>
+              <a:rPr lang="en-US" altLang="zh-CN" dirty="0">
+                <a:solidFill>
+                  <a:schemeClr val="bg1"/>
+                </a:solidFill>
+                <a:latin typeface="Consolas" panose="020B0609020204030204" pitchFamily="49" charset="0"/>
+                <a:cs typeface="Consolas" panose="020B0609020204030204" pitchFamily="49" charset="0"/>
+              </a:rPr>
+              <a:t>only</a:t>
+            </a:r>
+            <a:r>
+              <a:rPr lang="zh-CN" altLang="en-US" dirty="0">
+                <a:solidFill>
+                  <a:schemeClr val="bg1"/>
+                </a:solidFill>
+                <a:latin typeface="Consolas" panose="020B0609020204030204" pitchFamily="49" charset="0"/>
+                <a:cs typeface="Consolas" panose="020B0609020204030204" pitchFamily="49" charset="0"/>
+              </a:rPr>
+              <a:t> </a:t>
+            </a:r>
+            <a:r>
+              <a:rPr lang="en-US" altLang="zh-CN" dirty="0">
+                <a:solidFill>
+                  <a:schemeClr val="bg1"/>
+                </a:solidFill>
+                <a:latin typeface="Consolas" panose="020B0609020204030204" pitchFamily="49" charset="0"/>
+                <a:cs typeface="Consolas" panose="020B0609020204030204" pitchFamily="49" charset="0"/>
+              </a:rPr>
+              <a:t>got</a:t>
+            </a:r>
+            <a:r>
+              <a:rPr lang="zh-CN" altLang="en-US" dirty="0">
+                <a:solidFill>
+                  <a:schemeClr val="bg1"/>
+                </a:solidFill>
+                <a:latin typeface="Consolas" panose="020B0609020204030204" pitchFamily="49" charset="0"/>
+                <a:cs typeface="Consolas" panose="020B0609020204030204" pitchFamily="49" charset="0"/>
+              </a:rPr>
+              <a:t> </a:t>
+            </a:r>
+            <a:r>
+              <a:rPr lang="en-US" altLang="zh-CN" dirty="0">
+                <a:solidFill>
+                  <a:schemeClr val="bg1"/>
+                </a:solidFill>
+                <a:latin typeface="Consolas" panose="020B0609020204030204" pitchFamily="49" charset="0"/>
+                <a:cs typeface="Consolas" panose="020B0609020204030204" pitchFamily="49" charset="0"/>
+              </a:rPr>
+              <a:t>B.</a:t>
+            </a:r>
+            <a:endParaRPr lang="en-AU" dirty="0">
+              <a:solidFill>
+                <a:schemeClr val="bg1"/>
+              </a:solidFill>
+              <a:latin typeface="Consolas" panose="020B0609020204030204" pitchFamily="49" charset="0"/>
+              <a:cs typeface="Consolas" panose="020B0609020204030204" pitchFamily="49" charset="0"/>
+            </a:endParaRPr>
+          </a:p>
+        </p:txBody>
+      </p:sp>
+      <p:sp>
+        <p:nvSpPr>
+          <p:cNvPr id="18" name="TextBox 17">
+            <a:extLst>
+              <a:ext uri="{FF2B5EF4-FFF2-40B4-BE49-F238E27FC236}">
+                <a16:creationId xmlns:a16="http://schemas.microsoft.com/office/drawing/2014/main" id="{84B30268-5DC5-499A-CA73-2ADD1C8A22E7}"/>
+              </a:ext>
+            </a:extLst>
+          </p:cNvPr>
+          <p:cNvSpPr txBox="1"/>
+          <p:nvPr/>
+        </p:nvSpPr>
+        <p:spPr>
+          <a:xfrm>
+            <a:off x="9731476" y="2287610"/>
+            <a:ext cx="1386000" cy="261610"/>
+          </a:xfrm>
+          <a:prstGeom prst="rect">
+            <a:avLst/>
+          </a:prstGeom>
+          <a:solidFill>
+            <a:schemeClr val="tx1"/>
+          </a:solidFill>
+        </p:spPr>
+        <p:txBody>
+          <a:bodyPr wrap="square" lIns="0" tIns="0" rIns="0" bIns="0" rtlCol="0">
+            <a:spAutoFit/>
+          </a:bodyPr>
+          <a:lstStyle/>
+          <a:p>
+            <a:r>
+              <a:rPr lang="en-US" altLang="zh-CN" sz="1700" dirty="0">
+                <a:solidFill>
+                  <a:schemeClr val="bg1"/>
+                </a:solidFill>
+                <a:latin typeface="Consolas" panose="020B0609020204030204" pitchFamily="49" charset="0"/>
+                <a:cs typeface="Consolas" panose="020B0609020204030204" pitchFamily="49" charset="0"/>
+              </a:rPr>
+              <a:t>n</a:t>
+            </a:r>
+            <a:r>
+              <a:rPr lang="zh-CN" altLang="en-US" sz="1700" dirty="0">
+                <a:solidFill>
+                  <a:schemeClr val="bg1"/>
+                </a:solidFill>
+                <a:latin typeface="Consolas" panose="020B0609020204030204" pitchFamily="49" charset="0"/>
+                <a:cs typeface="Consolas" panose="020B0609020204030204" pitchFamily="49" charset="0"/>
+              </a:rPr>
+              <a:t> </a:t>
+            </a:r>
+            <a:r>
+              <a:rPr lang="en-US" altLang="zh-CN" sz="1700" dirty="0">
+                <a:solidFill>
+                  <a:schemeClr val="bg1"/>
+                </a:solidFill>
+                <a:latin typeface="Consolas" panose="020B0609020204030204" pitchFamily="49" charset="0"/>
+                <a:cs typeface="Consolas" panose="020B0609020204030204" pitchFamily="49" charset="0"/>
+              </a:rPr>
+              <a:t>div.</a:t>
+            </a:r>
+            <a:r>
+              <a:rPr lang="zh-CN" altLang="en-US" sz="1700" dirty="0">
+                <a:solidFill>
+                  <a:schemeClr val="bg1"/>
+                </a:solidFill>
+                <a:latin typeface="Consolas" panose="020B0609020204030204" pitchFamily="49" charset="0"/>
+                <a:cs typeface="Consolas" panose="020B0609020204030204" pitchFamily="49" charset="0"/>
+              </a:rPr>
+              <a:t> </a:t>
+            </a:r>
+            <a:r>
+              <a:rPr lang="en-US" altLang="zh-CN" sz="1700" dirty="0">
+                <a:solidFill>
+                  <a:schemeClr val="bg1"/>
+                </a:solidFill>
+                <a:latin typeface="Consolas" panose="020B0609020204030204" pitchFamily="49" charset="0"/>
+                <a:cs typeface="Consolas" panose="020B0609020204030204" pitchFamily="49" charset="0"/>
+              </a:rPr>
+              <a:t>by</a:t>
+            </a:r>
+            <a:r>
+              <a:rPr lang="zh-CN" altLang="en-US" sz="1700" dirty="0">
+                <a:solidFill>
+                  <a:schemeClr val="bg1"/>
+                </a:solidFill>
+                <a:latin typeface="Consolas" panose="020B0609020204030204" pitchFamily="49" charset="0"/>
+                <a:cs typeface="Consolas" panose="020B0609020204030204" pitchFamily="49" charset="0"/>
+              </a:rPr>
+              <a:t> </a:t>
+            </a:r>
+            <a:r>
+              <a:rPr lang="en-US" altLang="zh-CN" sz="1700" dirty="0">
+                <a:solidFill>
+                  <a:schemeClr val="bg1"/>
+                </a:solidFill>
+                <a:latin typeface="Consolas" panose="020B0609020204030204" pitchFamily="49" charset="0"/>
+                <a:cs typeface="Consolas" panose="020B0609020204030204" pitchFamily="49" charset="0"/>
+              </a:rPr>
+              <a:t>3</a:t>
+            </a:r>
+            <a:endParaRPr lang="en-AU" sz="1700" dirty="0">
+              <a:solidFill>
+                <a:schemeClr val="bg1"/>
+              </a:solidFill>
+              <a:latin typeface="Consolas" panose="020B0609020204030204" pitchFamily="49" charset="0"/>
+              <a:cs typeface="Consolas" panose="020B0609020204030204" pitchFamily="49" charset="0"/>
+            </a:endParaRPr>
+          </a:p>
+        </p:txBody>
+      </p:sp>
+      <p:sp>
+        <p:nvSpPr>
+          <p:cNvPr id="19" name="TextBox 18">
+            <a:extLst>
+              <a:ext uri="{FF2B5EF4-FFF2-40B4-BE49-F238E27FC236}">
+                <a16:creationId xmlns:a16="http://schemas.microsoft.com/office/drawing/2014/main" id="{D9411841-FCE8-F794-4D29-BC05185EB288}"/>
+              </a:ext>
+            </a:extLst>
+          </p:cNvPr>
+          <p:cNvSpPr txBox="1"/>
+          <p:nvPr/>
+        </p:nvSpPr>
+        <p:spPr>
+          <a:xfrm>
+            <a:off x="6573874" y="5916486"/>
+            <a:ext cx="3150000" cy="246221"/>
+          </a:xfrm>
+          <a:prstGeom prst="rect">
+            <a:avLst/>
+          </a:prstGeom>
+          <a:solidFill>
+            <a:schemeClr val="tx1"/>
+          </a:solidFill>
+        </p:spPr>
+        <p:txBody>
+          <a:bodyPr wrap="square" lIns="0" tIns="0" rIns="0" bIns="0" rtlCol="0">
+            <a:spAutoFit/>
+          </a:bodyPr>
+          <a:lstStyle/>
+          <a:p>
+            <a:r>
+              <a:rPr lang="en-US" altLang="zh-CN" sz="1600" dirty="0">
+                <a:solidFill>
+                  <a:schemeClr val="bg1"/>
+                </a:solidFill>
+                <a:latin typeface="Consolas" panose="020B0609020204030204" pitchFamily="49" charset="0"/>
+                <a:cs typeface="Consolas" panose="020B0609020204030204" pitchFamily="49" charset="0"/>
+              </a:rPr>
+              <a:t>n</a:t>
+            </a:r>
+            <a:r>
+              <a:rPr lang="zh-CN" altLang="en-US" sz="1600" dirty="0">
+                <a:solidFill>
+                  <a:schemeClr val="bg1"/>
+                </a:solidFill>
+                <a:latin typeface="Consolas" panose="020B0609020204030204" pitchFamily="49" charset="0"/>
+                <a:cs typeface="Consolas" panose="020B0609020204030204" pitchFamily="49" charset="0"/>
+              </a:rPr>
+              <a:t> </a:t>
+            </a:r>
+            <a:r>
+              <a:rPr lang="en-US" altLang="zh-CN" sz="1600" dirty="0">
+                <a:solidFill>
+                  <a:schemeClr val="bg1"/>
+                </a:solidFill>
+                <a:latin typeface="Consolas" panose="020B0609020204030204" pitchFamily="49" charset="0"/>
+                <a:cs typeface="Consolas" panose="020B0609020204030204" pitchFamily="49" charset="0"/>
+              </a:rPr>
+              <a:t>div.</a:t>
+            </a:r>
+            <a:r>
+              <a:rPr lang="zh-CN" altLang="en-US" sz="1600" dirty="0">
+                <a:solidFill>
+                  <a:schemeClr val="bg1"/>
+                </a:solidFill>
+                <a:latin typeface="Consolas" panose="020B0609020204030204" pitchFamily="49" charset="0"/>
+                <a:cs typeface="Consolas" panose="020B0609020204030204" pitchFamily="49" charset="0"/>
+              </a:rPr>
+              <a:t> </a:t>
+            </a:r>
+            <a:r>
+              <a:rPr lang="en-US" altLang="zh-CN" sz="1600" dirty="0">
+                <a:solidFill>
+                  <a:schemeClr val="bg1"/>
+                </a:solidFill>
+                <a:latin typeface="Consolas" panose="020B0609020204030204" pitchFamily="49" charset="0"/>
+                <a:cs typeface="Consolas" panose="020B0609020204030204" pitchFamily="49" charset="0"/>
+              </a:rPr>
+              <a:t>only</a:t>
+            </a:r>
+            <a:r>
+              <a:rPr lang="zh-CN" altLang="en-US" sz="1600" dirty="0">
+                <a:solidFill>
+                  <a:schemeClr val="bg1"/>
+                </a:solidFill>
+                <a:latin typeface="Consolas" panose="020B0609020204030204" pitchFamily="49" charset="0"/>
+                <a:cs typeface="Consolas" panose="020B0609020204030204" pitchFamily="49" charset="0"/>
+              </a:rPr>
+              <a:t> </a:t>
+            </a:r>
+            <a:r>
+              <a:rPr lang="en-US" altLang="zh-CN" sz="1600" dirty="0">
+                <a:solidFill>
+                  <a:schemeClr val="bg1"/>
+                </a:solidFill>
+                <a:latin typeface="Consolas" panose="020B0609020204030204" pitchFamily="49" charset="0"/>
+                <a:cs typeface="Consolas" panose="020B0609020204030204" pitchFamily="49" charset="0"/>
+              </a:rPr>
+              <a:t>by</a:t>
+            </a:r>
+            <a:r>
+              <a:rPr lang="zh-CN" altLang="en-US" sz="1600" dirty="0">
+                <a:solidFill>
+                  <a:schemeClr val="bg1"/>
+                </a:solidFill>
+                <a:latin typeface="Consolas" panose="020B0609020204030204" pitchFamily="49" charset="0"/>
+                <a:cs typeface="Consolas" panose="020B0609020204030204" pitchFamily="49" charset="0"/>
+              </a:rPr>
+              <a:t> </a:t>
+            </a:r>
+            <a:r>
+              <a:rPr lang="en-US" altLang="zh-CN" sz="1600" dirty="0">
+                <a:solidFill>
+                  <a:schemeClr val="bg1"/>
+                </a:solidFill>
+                <a:latin typeface="Consolas" panose="020B0609020204030204" pitchFamily="49" charset="0"/>
+                <a:cs typeface="Consolas" panose="020B0609020204030204" pitchFamily="49" charset="0"/>
+              </a:rPr>
+              <a:t>one</a:t>
+            </a:r>
+            <a:r>
+              <a:rPr lang="zh-CN" altLang="en-US" sz="1600" dirty="0">
+                <a:solidFill>
+                  <a:schemeClr val="bg1"/>
+                </a:solidFill>
+                <a:latin typeface="Consolas" panose="020B0609020204030204" pitchFamily="49" charset="0"/>
+                <a:cs typeface="Consolas" panose="020B0609020204030204" pitchFamily="49" charset="0"/>
+              </a:rPr>
+              <a:t> </a:t>
+            </a:r>
+            <a:r>
+              <a:rPr lang="en-US" altLang="zh-CN" sz="1600" dirty="0">
+                <a:solidFill>
+                  <a:schemeClr val="bg1"/>
+                </a:solidFill>
+                <a:latin typeface="Consolas" panose="020B0609020204030204" pitchFamily="49" charset="0"/>
+                <a:cs typeface="Consolas" panose="020B0609020204030204" pitchFamily="49" charset="0"/>
+              </a:rPr>
+              <a:t>of</a:t>
+            </a:r>
+            <a:r>
+              <a:rPr lang="zh-CN" altLang="en-US" sz="1600" dirty="0">
+                <a:solidFill>
+                  <a:schemeClr val="bg1"/>
+                </a:solidFill>
+                <a:latin typeface="Consolas" panose="020B0609020204030204" pitchFamily="49" charset="0"/>
+                <a:cs typeface="Consolas" panose="020B0609020204030204" pitchFamily="49" charset="0"/>
+              </a:rPr>
+              <a:t> </a:t>
+            </a:r>
+            <a:r>
+              <a:rPr lang="en-US" altLang="zh-CN" sz="1600" dirty="0">
+                <a:solidFill>
+                  <a:schemeClr val="bg1"/>
+                </a:solidFill>
+                <a:latin typeface="Consolas" panose="020B0609020204030204" pitchFamily="49" charset="0"/>
+                <a:cs typeface="Consolas" panose="020B0609020204030204" pitchFamily="49" charset="0"/>
+              </a:rPr>
+              <a:t>3</a:t>
+            </a:r>
+            <a:r>
+              <a:rPr lang="zh-CN" altLang="en-US" sz="1600" dirty="0">
+                <a:solidFill>
+                  <a:schemeClr val="bg1"/>
+                </a:solidFill>
+                <a:latin typeface="Consolas" panose="020B0609020204030204" pitchFamily="49" charset="0"/>
+                <a:cs typeface="Consolas" panose="020B0609020204030204" pitchFamily="49" charset="0"/>
+              </a:rPr>
+              <a:t> </a:t>
+            </a:r>
+            <a:r>
+              <a:rPr lang="en-US" altLang="zh-CN" sz="1600" dirty="0">
+                <a:solidFill>
+                  <a:schemeClr val="bg1"/>
+                </a:solidFill>
+                <a:latin typeface="Consolas" panose="020B0609020204030204" pitchFamily="49" charset="0"/>
+                <a:cs typeface="Consolas" panose="020B0609020204030204" pitchFamily="49" charset="0"/>
+              </a:rPr>
+              <a:t>or</a:t>
+            </a:r>
+            <a:r>
+              <a:rPr lang="zh-CN" altLang="en-US" sz="1600" dirty="0">
+                <a:solidFill>
+                  <a:schemeClr val="bg1"/>
+                </a:solidFill>
+                <a:latin typeface="Consolas" panose="020B0609020204030204" pitchFamily="49" charset="0"/>
+                <a:cs typeface="Consolas" panose="020B0609020204030204" pitchFamily="49" charset="0"/>
+              </a:rPr>
+              <a:t> </a:t>
+            </a:r>
+            <a:r>
+              <a:rPr lang="en-US" altLang="zh-CN" sz="1600" dirty="0">
+                <a:solidFill>
+                  <a:schemeClr val="bg1"/>
+                </a:solidFill>
+                <a:latin typeface="Consolas" panose="020B0609020204030204" pitchFamily="49" charset="0"/>
+                <a:cs typeface="Consolas" panose="020B0609020204030204" pitchFamily="49" charset="0"/>
+              </a:rPr>
+              <a:t>5</a:t>
+            </a:r>
+            <a:endParaRPr lang="en-AU" sz="1600" dirty="0">
+              <a:solidFill>
+                <a:schemeClr val="bg1"/>
+              </a:solidFill>
+              <a:latin typeface="Consolas" panose="020B0609020204030204" pitchFamily="49" charset="0"/>
+              <a:cs typeface="Consolas" panose="020B0609020204030204" pitchFamily="49" charset="0"/>
+            </a:endParaRPr>
+          </a:p>
+        </p:txBody>
+      </p:sp>
+      <p:sp>
+        <p:nvSpPr>
+          <p:cNvPr id="20" name="TextBox 19">
+            <a:extLst>
+              <a:ext uri="{FF2B5EF4-FFF2-40B4-BE49-F238E27FC236}">
+                <a16:creationId xmlns:a16="http://schemas.microsoft.com/office/drawing/2014/main" id="{22E2FADE-A6A3-659A-673A-793836050CFC}"/>
+              </a:ext>
+            </a:extLst>
+          </p:cNvPr>
+          <p:cNvSpPr txBox="1"/>
+          <p:nvPr/>
+        </p:nvSpPr>
+        <p:spPr>
+          <a:xfrm>
+            <a:off x="1172817" y="3776869"/>
+            <a:ext cx="2206487" cy="307777"/>
+          </a:xfrm>
+          <a:prstGeom prst="rect">
+            <a:avLst/>
+          </a:prstGeom>
+          <a:noFill/>
+        </p:spPr>
+        <p:txBody>
+          <a:bodyPr wrap="square" rtlCol="0">
+            <a:spAutoFit/>
+          </a:bodyPr>
+          <a:lstStyle/>
+          <a:p>
+            <a:r>
+              <a:rPr lang="en-AU" sz="1400" dirty="0">
+                <a:solidFill>
+                  <a:schemeClr val="bg1"/>
+                </a:solidFill>
+              </a:rPr>
+              <a:t>n%3 == 0 &amp;&amp; n%5 == 0</a:t>
+            </a:r>
+          </a:p>
+        </p:txBody>
+      </p:sp>
+      <p:sp>
+        <p:nvSpPr>
+          <p:cNvPr id="21" name="TextBox 20">
+            <a:extLst>
+              <a:ext uri="{FF2B5EF4-FFF2-40B4-BE49-F238E27FC236}">
+                <a16:creationId xmlns:a16="http://schemas.microsoft.com/office/drawing/2014/main" id="{337C0F69-A02A-EB59-520B-83AB705D60DF}"/>
+              </a:ext>
+            </a:extLst>
+          </p:cNvPr>
+          <p:cNvSpPr txBox="1"/>
+          <p:nvPr/>
+        </p:nvSpPr>
+        <p:spPr>
+          <a:xfrm>
+            <a:off x="1146313" y="5618923"/>
+            <a:ext cx="2206487" cy="307777"/>
+          </a:xfrm>
+          <a:prstGeom prst="rect">
+            <a:avLst/>
+          </a:prstGeom>
+          <a:noFill/>
+        </p:spPr>
+        <p:txBody>
+          <a:bodyPr wrap="square" rtlCol="0">
+            <a:spAutoFit/>
+          </a:bodyPr>
+          <a:lstStyle/>
+          <a:p>
+            <a:r>
+              <a:rPr lang="en-AU" sz="1400" dirty="0">
+                <a:solidFill>
+                  <a:schemeClr val="bg1"/>
+                </a:solidFill>
+              </a:rPr>
+              <a:t>n &gt; 6</a:t>
+            </a:r>
+          </a:p>
+        </p:txBody>
+      </p:sp>
+      <p:sp>
+        <p:nvSpPr>
+          <p:cNvPr id="22" name="TextBox 21">
+            <a:extLst>
+              <a:ext uri="{FF2B5EF4-FFF2-40B4-BE49-F238E27FC236}">
+                <a16:creationId xmlns:a16="http://schemas.microsoft.com/office/drawing/2014/main" id="{73B2C187-B0F2-B43C-D3AE-3AEB4802C3D0}"/>
+              </a:ext>
+            </a:extLst>
+          </p:cNvPr>
+          <p:cNvSpPr txBox="1"/>
+          <p:nvPr/>
+        </p:nvSpPr>
+        <p:spPr>
+          <a:xfrm>
+            <a:off x="4585253" y="2001078"/>
+            <a:ext cx="2206487" cy="307777"/>
+          </a:xfrm>
+          <a:prstGeom prst="rect">
+            <a:avLst/>
+          </a:prstGeom>
+          <a:noFill/>
+        </p:spPr>
+        <p:txBody>
+          <a:bodyPr wrap="square" rtlCol="0">
+            <a:spAutoFit/>
+          </a:bodyPr>
+          <a:lstStyle/>
+          <a:p>
+            <a:r>
+              <a:rPr lang="en-AU" sz="1400" dirty="0">
+                <a:solidFill>
+                  <a:schemeClr val="bg1"/>
+                </a:solidFill>
+              </a:rPr>
+              <a:t>money &lt; price</a:t>
+            </a:r>
+          </a:p>
+        </p:txBody>
+      </p:sp>
+      <p:sp>
+        <p:nvSpPr>
+          <p:cNvPr id="24" name="TextBox 23">
+            <a:extLst>
+              <a:ext uri="{FF2B5EF4-FFF2-40B4-BE49-F238E27FC236}">
+                <a16:creationId xmlns:a16="http://schemas.microsoft.com/office/drawing/2014/main" id="{5121281F-1A14-C4D9-43DB-2232083CE0E6}"/>
+              </a:ext>
+            </a:extLst>
+          </p:cNvPr>
+          <p:cNvSpPr txBox="1"/>
+          <p:nvPr/>
+        </p:nvSpPr>
+        <p:spPr>
+          <a:xfrm>
+            <a:off x="4603012" y="4284266"/>
+            <a:ext cx="6611644" cy="584775"/>
+          </a:xfrm>
+          <a:prstGeom prst="rect">
+            <a:avLst/>
+          </a:prstGeom>
+          <a:noFill/>
+        </p:spPr>
+        <p:txBody>
+          <a:bodyPr wrap="square" rtlCol="0">
+            <a:spAutoFit/>
+          </a:bodyPr>
+          <a:lstStyle/>
+          <a:p>
+            <a:r>
+              <a:rPr lang="en-AU" sz="3200" dirty="0">
+                <a:solidFill>
+                  <a:srgbClr val="FF0000"/>
+                </a:solidFill>
+              </a:rPr>
+              <a:t>(n%3 == 0 or n%5 == 0</a:t>
+            </a:r>
+            <a:r>
+              <a:rPr lang="en-AU" sz="3200">
+                <a:solidFill>
+                  <a:srgbClr val="FF0000"/>
+                </a:solidFill>
+              </a:rPr>
+              <a:t>) and n%15</a:t>
+            </a:r>
+            <a:endParaRPr lang="en-AU" sz="3200" dirty="0">
+              <a:solidFill>
+                <a:srgbClr val="FF0000"/>
+              </a:solidFill>
+            </a:endParaRPr>
+          </a:p>
+        </p:txBody>
+      </p:sp>
+    </p:spTree>
+    <p:extLst>
+      <p:ext uri="{BB962C8B-B14F-4D97-AF65-F5344CB8AC3E}">
+        <p14:creationId xmlns:p14="http://schemas.microsoft.com/office/powerpoint/2010/main" val="3967702150"/>
+      </p:ext>
+    </p:extLst>
+  </p:cSld>
+  <p:clrMapOvr>
+    <a:masterClrMapping/>
+  </p:clrMapOvr>
+</p:sld>
+</file>
+
+<file path=ppt/slides/slide11.xml><?xml version="1.0" encoding="utf-8"?>
+<p:sld xmlns:a="http://schemas.openxmlformats.org/drawingml/2006/main" xmlns:r="http://schemas.openxmlformats.org/officeDocument/2006/relationships" xmlns:p="http://schemas.openxmlformats.org/presentationml/2006/main">
+  <p:cSld>
+    <p:spTree>
+      <p:nvGrpSpPr>
+        <p:cNvPr id="1" name=""/>
+        <p:cNvGrpSpPr/>
+        <p:nvPr/>
+      </p:nvGrpSpPr>
+      <p:grpSpPr>
+        <a:xfrm>
+          <a:off x="0" y="0"/>
+          <a:ext cx="0" cy="0"/>
+          <a:chOff x="0" y="0"/>
+          <a:chExt cx="0" cy="0"/>
+        </a:xfrm>
+      </p:grpSpPr>
+      <p:sp>
+        <p:nvSpPr>
+          <p:cNvPr id="9" name="文本框 8">
+            <a:extLst>
+              <a:ext uri="{FF2B5EF4-FFF2-40B4-BE49-F238E27FC236}">
+                <a16:creationId xmlns:a16="http://schemas.microsoft.com/office/drawing/2014/main" id="{8F79F9D7-B619-4E66-B6E5-9174630E3410}"/>
+              </a:ext>
+            </a:extLst>
+          </p:cNvPr>
+          <p:cNvSpPr txBox="1"/>
+          <p:nvPr/>
+        </p:nvSpPr>
+        <p:spPr>
+          <a:xfrm>
+            <a:off x="678609" y="301567"/>
+            <a:ext cx="10634659" cy="707886"/>
+          </a:xfrm>
+          <a:prstGeom prst="rect">
+            <a:avLst/>
+          </a:prstGeom>
+          <a:noFill/>
+        </p:spPr>
+        <p:txBody>
+          <a:bodyPr wrap="square" rtlCol="0">
+            <a:spAutoFit/>
+          </a:bodyPr>
+          <a:lstStyle/>
+          <a:p>
+            <a:r>
+              <a:rPr lang="en" altLang="en-US" sz="4000" dirty="0">
+                <a:solidFill>
+                  <a:schemeClr val="bg1"/>
+                </a:solidFill>
+                <a:latin typeface="Aptos Display" panose="020B0004020202020204" pitchFamily="34" charset="0"/>
+                <a:ea typeface="微软雅黑" panose="020B0503020204020204" pitchFamily="34" charset="-122"/>
+                <a:cs typeface="Consolas" panose="020B0609020204030204" pitchFamily="49" charset="0"/>
+              </a:rPr>
+              <a:t>Cloze test answers</a:t>
+            </a:r>
+          </a:p>
+        </p:txBody>
+      </p:sp>
+      <p:pic>
+        <p:nvPicPr>
+          <p:cNvPr id="12" name="图片 11">
+            <a:extLst>
+              <a:ext uri="{FF2B5EF4-FFF2-40B4-BE49-F238E27FC236}">
+                <a16:creationId xmlns:a16="http://schemas.microsoft.com/office/drawing/2014/main" id="{6E92E840-BE91-4BA9-A814-CDF5829DD7C7}"/>
+              </a:ext>
+            </a:extLst>
+          </p:cNvPr>
+          <p:cNvPicPr>
+            <a:picLocks noChangeAspect="1"/>
+          </p:cNvPicPr>
+          <p:nvPr/>
+        </p:nvPicPr>
+        <p:blipFill>
+          <a:blip r:embed="rId2"/>
+          <a:stretch>
+            <a:fillRect/>
+          </a:stretch>
+        </p:blipFill>
+        <p:spPr>
+          <a:xfrm>
+            <a:off x="678609" y="1412077"/>
+            <a:ext cx="3068179" cy="1438871"/>
+          </a:xfrm>
+          <a:prstGeom prst="rect">
+            <a:avLst/>
+          </a:prstGeom>
+        </p:spPr>
+      </p:pic>
+      <p:pic>
+        <p:nvPicPr>
+          <p:cNvPr id="15" name="图片 14">
+            <a:extLst>
+              <a:ext uri="{FF2B5EF4-FFF2-40B4-BE49-F238E27FC236}">
+                <a16:creationId xmlns:a16="http://schemas.microsoft.com/office/drawing/2014/main" id="{ECF5ED95-3966-4B2C-97FB-2EE59ED227BF}"/>
+              </a:ext>
+            </a:extLst>
+          </p:cNvPr>
+          <p:cNvPicPr>
+            <a:picLocks noChangeAspect="1"/>
+          </p:cNvPicPr>
+          <p:nvPr/>
+        </p:nvPicPr>
+        <p:blipFill>
+          <a:blip r:embed="rId3"/>
+          <a:stretch>
+            <a:fillRect/>
+          </a:stretch>
+        </p:blipFill>
+        <p:spPr>
+          <a:xfrm>
+            <a:off x="4024882" y="1406990"/>
+            <a:ext cx="4022898" cy="1497158"/>
+          </a:xfrm>
+          <a:prstGeom prst="rect">
+            <a:avLst/>
+          </a:prstGeom>
+        </p:spPr>
+      </p:pic>
+      <p:pic>
+        <p:nvPicPr>
+          <p:cNvPr id="18" name="图片 17">
+            <a:extLst>
+              <a:ext uri="{FF2B5EF4-FFF2-40B4-BE49-F238E27FC236}">
+                <a16:creationId xmlns:a16="http://schemas.microsoft.com/office/drawing/2014/main" id="{7CEB77ED-8BB2-4EB0-B904-9A78F27F0E46}"/>
+              </a:ext>
+            </a:extLst>
+          </p:cNvPr>
+          <p:cNvPicPr>
+            <a:picLocks noChangeAspect="1"/>
+          </p:cNvPicPr>
+          <p:nvPr/>
+        </p:nvPicPr>
+        <p:blipFill>
+          <a:blip r:embed="rId4"/>
+          <a:stretch>
+            <a:fillRect/>
+          </a:stretch>
+        </p:blipFill>
+        <p:spPr>
+          <a:xfrm>
+            <a:off x="8325875" y="1412077"/>
+            <a:ext cx="3351262" cy="1486984"/>
+          </a:xfrm>
+          <a:prstGeom prst="rect">
+            <a:avLst/>
+          </a:prstGeom>
+        </p:spPr>
+      </p:pic>
+      <p:pic>
+        <p:nvPicPr>
+          <p:cNvPr id="20" name="图片 19">
+            <a:extLst>
+              <a:ext uri="{FF2B5EF4-FFF2-40B4-BE49-F238E27FC236}">
+                <a16:creationId xmlns:a16="http://schemas.microsoft.com/office/drawing/2014/main" id="{3FF3D262-1497-4108-A85B-A773F8133663}"/>
+              </a:ext>
+            </a:extLst>
+          </p:cNvPr>
+          <p:cNvPicPr>
+            <a:picLocks noChangeAspect="1"/>
+          </p:cNvPicPr>
+          <p:nvPr/>
+        </p:nvPicPr>
+        <p:blipFill>
+          <a:blip r:embed="rId5"/>
+          <a:stretch>
+            <a:fillRect/>
+          </a:stretch>
+        </p:blipFill>
+        <p:spPr>
+          <a:xfrm>
+            <a:off x="650240" y="3266628"/>
+            <a:ext cx="4543026" cy="1296635"/>
+          </a:xfrm>
+          <a:prstGeom prst="rect">
+            <a:avLst/>
+          </a:prstGeom>
+        </p:spPr>
+      </p:pic>
+      <p:pic>
+        <p:nvPicPr>
+          <p:cNvPr id="22" name="图片 21">
+            <a:extLst>
+              <a:ext uri="{FF2B5EF4-FFF2-40B4-BE49-F238E27FC236}">
+                <a16:creationId xmlns:a16="http://schemas.microsoft.com/office/drawing/2014/main" id="{935FE407-CFD8-448D-BA4B-578D45B2FF7E}"/>
+              </a:ext>
+            </a:extLst>
+          </p:cNvPr>
+          <p:cNvPicPr>
+            <a:picLocks noChangeAspect="1"/>
+          </p:cNvPicPr>
+          <p:nvPr/>
+        </p:nvPicPr>
+        <p:blipFill>
+          <a:blip r:embed="rId6"/>
+          <a:stretch>
+            <a:fillRect/>
+          </a:stretch>
+        </p:blipFill>
+        <p:spPr>
+          <a:xfrm>
+            <a:off x="5376498" y="3177463"/>
+            <a:ext cx="5686577" cy="1381027"/>
+          </a:xfrm>
+          <a:prstGeom prst="rect">
+            <a:avLst/>
+          </a:prstGeom>
+        </p:spPr>
+      </p:pic>
+      <p:pic>
+        <p:nvPicPr>
+          <p:cNvPr id="25" name="图片 24">
+            <a:extLst>
+              <a:ext uri="{FF2B5EF4-FFF2-40B4-BE49-F238E27FC236}">
+                <a16:creationId xmlns:a16="http://schemas.microsoft.com/office/drawing/2014/main" id="{E06DB031-D327-477B-82EE-F5951B9D47EF}"/>
+              </a:ext>
+            </a:extLst>
+          </p:cNvPr>
+          <p:cNvPicPr>
+            <a:picLocks noChangeAspect="1"/>
+          </p:cNvPicPr>
+          <p:nvPr/>
+        </p:nvPicPr>
+        <p:blipFill>
+          <a:blip r:embed="rId7"/>
+          <a:stretch>
+            <a:fillRect/>
+          </a:stretch>
+        </p:blipFill>
+        <p:spPr>
+          <a:xfrm>
+            <a:off x="655349" y="4831996"/>
+            <a:ext cx="3446184" cy="1422736"/>
+          </a:xfrm>
+          <a:prstGeom prst="rect">
+            <a:avLst/>
+          </a:prstGeom>
+        </p:spPr>
+      </p:pic>
+      <p:pic>
+        <p:nvPicPr>
+          <p:cNvPr id="16" name="图片 15">
+            <a:extLst>
+              <a:ext uri="{FF2B5EF4-FFF2-40B4-BE49-F238E27FC236}">
+                <a16:creationId xmlns:a16="http://schemas.microsoft.com/office/drawing/2014/main" id="{01B78BE7-DA5B-823C-B5E9-6C5D08A33E03}"/>
+              </a:ext>
+            </a:extLst>
+          </p:cNvPr>
+          <p:cNvPicPr>
+            <a:picLocks noChangeAspect="1"/>
+          </p:cNvPicPr>
+          <p:nvPr/>
+        </p:nvPicPr>
+        <p:blipFill>
+          <a:blip r:embed="rId8"/>
+          <a:stretch>
+            <a:fillRect/>
+          </a:stretch>
+        </p:blipFill>
+        <p:spPr>
+          <a:xfrm>
+            <a:off x="5067292" y="4822450"/>
+            <a:ext cx="5199541" cy="1432282"/>
+          </a:xfrm>
+          <a:prstGeom prst="rect">
+            <a:avLst/>
+          </a:prstGeom>
+        </p:spPr>
+      </p:pic>
+      <p:sp>
+        <p:nvSpPr>
+          <p:cNvPr id="2" name="TextBox 1">
+            <a:extLst>
+              <a:ext uri="{FF2B5EF4-FFF2-40B4-BE49-F238E27FC236}">
+                <a16:creationId xmlns:a16="http://schemas.microsoft.com/office/drawing/2014/main" id="{0FA3A31C-4959-2448-4014-CE5760236548}"/>
+              </a:ext>
+            </a:extLst>
+          </p:cNvPr>
+          <p:cNvSpPr txBox="1"/>
+          <p:nvPr/>
+        </p:nvSpPr>
+        <p:spPr>
+          <a:xfrm>
+            <a:off x="2137558" y="1412077"/>
+            <a:ext cx="1629407" cy="369332"/>
+          </a:xfrm>
+          <a:prstGeom prst="rect">
+            <a:avLst/>
+          </a:prstGeom>
+          <a:solidFill>
+            <a:schemeClr val="tx1"/>
+          </a:solidFill>
+        </p:spPr>
+        <p:txBody>
+          <a:bodyPr wrap="square" rtlCol="0">
+            <a:spAutoFit/>
+          </a:bodyPr>
+          <a:lstStyle/>
+          <a:p>
+            <a:endParaRPr lang="en-AU" dirty="0"/>
+          </a:p>
+        </p:txBody>
+      </p:sp>
+      <p:sp>
+        <p:nvSpPr>
+          <p:cNvPr id="3" name="TextBox 2">
+            <a:extLst>
+              <a:ext uri="{FF2B5EF4-FFF2-40B4-BE49-F238E27FC236}">
+                <a16:creationId xmlns:a16="http://schemas.microsoft.com/office/drawing/2014/main" id="{02004F16-1A6B-7243-8465-1140F6E0B208}"/>
+              </a:ext>
+            </a:extLst>
+          </p:cNvPr>
+          <p:cNvSpPr txBox="1"/>
+          <p:nvPr/>
+        </p:nvSpPr>
+        <p:spPr>
+          <a:xfrm>
+            <a:off x="2137558" y="1412077"/>
+            <a:ext cx="1629407" cy="369332"/>
+          </a:xfrm>
+          <a:prstGeom prst="rect">
+            <a:avLst/>
+          </a:prstGeom>
+          <a:solidFill>
+            <a:schemeClr val="tx1"/>
+          </a:solidFill>
+        </p:spPr>
+        <p:txBody>
+          <a:bodyPr wrap="square" rtlCol="0">
+            <a:spAutoFit/>
+          </a:bodyPr>
+          <a:lstStyle/>
+          <a:p>
+            <a:endParaRPr lang="en-AU" dirty="0"/>
+          </a:p>
+        </p:txBody>
+      </p:sp>
+      <p:sp>
+        <p:nvSpPr>
+          <p:cNvPr id="4" name="TextBox 3">
+            <a:extLst>
+              <a:ext uri="{FF2B5EF4-FFF2-40B4-BE49-F238E27FC236}">
+                <a16:creationId xmlns:a16="http://schemas.microsoft.com/office/drawing/2014/main" id="{0E3ECB60-CBBC-C32F-C763-EEA899050628}"/>
+              </a:ext>
+            </a:extLst>
+          </p:cNvPr>
+          <p:cNvSpPr txBox="1"/>
+          <p:nvPr/>
+        </p:nvSpPr>
+        <p:spPr>
+          <a:xfrm>
+            <a:off x="2204058" y="2260132"/>
+            <a:ext cx="821775" cy="307777"/>
+          </a:xfrm>
+          <a:prstGeom prst="rect">
+            <a:avLst/>
+          </a:prstGeom>
+          <a:solidFill>
+            <a:schemeClr val="tx1"/>
+          </a:solidFill>
+        </p:spPr>
+        <p:txBody>
+          <a:bodyPr wrap="square" lIns="0" tIns="0" rIns="0" bIns="0" rtlCol="0">
+            <a:spAutoFit/>
+          </a:bodyPr>
+          <a:lstStyle/>
+          <a:p>
+            <a:r>
+              <a:rPr lang="en-US" altLang="zh-CN" sz="2000" dirty="0">
+                <a:solidFill>
+                  <a:schemeClr val="bg1"/>
+                </a:solidFill>
+                <a:latin typeface="Consolas" panose="020B0609020204030204" pitchFamily="49" charset="0"/>
+                <a:cs typeface="Consolas" panose="020B0609020204030204" pitchFamily="49" charset="0"/>
+              </a:rPr>
+              <a:t>pass</a:t>
+            </a:r>
+            <a:endParaRPr lang="en-AU" sz="2000" dirty="0">
+              <a:solidFill>
+                <a:schemeClr val="bg1"/>
+              </a:solidFill>
+              <a:latin typeface="Consolas" panose="020B0609020204030204" pitchFamily="49" charset="0"/>
+              <a:cs typeface="Consolas" panose="020B0609020204030204" pitchFamily="49" charset="0"/>
+            </a:endParaRPr>
+          </a:p>
+        </p:txBody>
+      </p:sp>
+      <p:sp>
+        <p:nvSpPr>
+          <p:cNvPr id="5" name="TextBox 4">
+            <a:extLst>
+              <a:ext uri="{FF2B5EF4-FFF2-40B4-BE49-F238E27FC236}">
+                <a16:creationId xmlns:a16="http://schemas.microsoft.com/office/drawing/2014/main" id="{71EBEC92-97D8-D03E-E325-9C8E8F236161}"/>
+              </a:ext>
+            </a:extLst>
+          </p:cNvPr>
+          <p:cNvSpPr txBox="1"/>
+          <p:nvPr/>
+        </p:nvSpPr>
+        <p:spPr>
+          <a:xfrm>
+            <a:off x="2037807" y="3996302"/>
+            <a:ext cx="2142000" cy="307777"/>
+          </a:xfrm>
+          <a:prstGeom prst="rect">
+            <a:avLst/>
+          </a:prstGeom>
+          <a:solidFill>
+            <a:schemeClr val="tx1"/>
+          </a:solidFill>
+        </p:spPr>
+        <p:txBody>
+          <a:bodyPr wrap="square" lIns="0" tIns="0" rIns="0" bIns="0" rtlCol="0">
+            <a:spAutoFit/>
+          </a:bodyPr>
+          <a:lstStyle/>
+          <a:p>
+            <a:r>
+              <a:rPr lang="en-US" altLang="zh-CN" sz="2000" dirty="0">
+                <a:solidFill>
+                  <a:schemeClr val="bg1"/>
+                </a:solidFill>
+                <a:latin typeface="Consolas" panose="020B0609020204030204" pitchFamily="49" charset="0"/>
+                <a:cs typeface="Consolas" panose="020B0609020204030204" pitchFamily="49" charset="0"/>
+              </a:rPr>
+              <a:t>n</a:t>
+            </a:r>
+            <a:r>
+              <a:rPr lang="zh-CN" altLang="en-US" sz="2000" dirty="0">
+                <a:solidFill>
+                  <a:schemeClr val="bg1"/>
+                </a:solidFill>
+                <a:latin typeface="Consolas" panose="020B0609020204030204" pitchFamily="49" charset="0"/>
+                <a:cs typeface="Consolas" panose="020B0609020204030204" pitchFamily="49" charset="0"/>
+              </a:rPr>
+              <a:t> </a:t>
+            </a:r>
+            <a:r>
+              <a:rPr lang="en-US" altLang="zh-CN" sz="2000" dirty="0">
+                <a:solidFill>
+                  <a:schemeClr val="bg1"/>
+                </a:solidFill>
+                <a:latin typeface="Consolas" panose="020B0609020204030204" pitchFamily="49" charset="0"/>
+                <a:cs typeface="Consolas" panose="020B0609020204030204" pitchFamily="49" charset="0"/>
+              </a:rPr>
+              <a:t>div.</a:t>
+            </a:r>
+            <a:r>
+              <a:rPr lang="zh-CN" altLang="en-US" sz="2000" dirty="0">
+                <a:solidFill>
+                  <a:schemeClr val="bg1"/>
+                </a:solidFill>
+                <a:latin typeface="Consolas" panose="020B0609020204030204" pitchFamily="49" charset="0"/>
+                <a:cs typeface="Consolas" panose="020B0609020204030204" pitchFamily="49" charset="0"/>
+              </a:rPr>
+              <a:t> </a:t>
+            </a:r>
+            <a:r>
+              <a:rPr lang="en-US" altLang="zh-CN" sz="2000" dirty="0">
+                <a:solidFill>
+                  <a:schemeClr val="bg1"/>
+                </a:solidFill>
+                <a:latin typeface="Consolas" panose="020B0609020204030204" pitchFamily="49" charset="0"/>
+                <a:cs typeface="Consolas" panose="020B0609020204030204" pitchFamily="49" charset="0"/>
+              </a:rPr>
+              <a:t>by</a:t>
+            </a:r>
+            <a:r>
+              <a:rPr lang="zh-CN" altLang="en-US" sz="2000" dirty="0">
+                <a:solidFill>
+                  <a:schemeClr val="bg1"/>
+                </a:solidFill>
+                <a:latin typeface="Consolas" panose="020B0609020204030204" pitchFamily="49" charset="0"/>
+                <a:cs typeface="Consolas" panose="020B0609020204030204" pitchFamily="49" charset="0"/>
+              </a:rPr>
+              <a:t> </a:t>
+            </a:r>
+            <a:r>
+              <a:rPr lang="en-US" altLang="zh-CN" sz="2000" dirty="0">
+                <a:solidFill>
+                  <a:schemeClr val="bg1"/>
+                </a:solidFill>
+                <a:latin typeface="Consolas" panose="020B0609020204030204" pitchFamily="49" charset="0"/>
+                <a:cs typeface="Consolas" panose="020B0609020204030204" pitchFamily="49" charset="0"/>
+              </a:rPr>
+              <a:t>3</a:t>
+            </a:r>
+            <a:r>
+              <a:rPr lang="zh-CN" altLang="en-US" sz="2000" dirty="0">
+                <a:solidFill>
+                  <a:schemeClr val="bg1"/>
+                </a:solidFill>
+                <a:latin typeface="Consolas" panose="020B0609020204030204" pitchFamily="49" charset="0"/>
+                <a:cs typeface="Consolas" panose="020B0609020204030204" pitchFamily="49" charset="0"/>
+              </a:rPr>
+              <a:t> </a:t>
+            </a:r>
+            <a:r>
+              <a:rPr lang="en-US" altLang="zh-CN" sz="2000" dirty="0">
+                <a:solidFill>
+                  <a:schemeClr val="bg1"/>
+                </a:solidFill>
+                <a:latin typeface="Consolas" panose="020B0609020204030204" pitchFamily="49" charset="0"/>
+                <a:cs typeface="Consolas" panose="020B0609020204030204" pitchFamily="49" charset="0"/>
+              </a:rPr>
+              <a:t>&amp;</a:t>
+            </a:r>
+            <a:r>
+              <a:rPr lang="zh-CN" altLang="en-US" sz="2000" dirty="0">
+                <a:solidFill>
+                  <a:schemeClr val="bg1"/>
+                </a:solidFill>
+                <a:latin typeface="Consolas" panose="020B0609020204030204" pitchFamily="49" charset="0"/>
+                <a:cs typeface="Consolas" panose="020B0609020204030204" pitchFamily="49" charset="0"/>
+              </a:rPr>
+              <a:t> </a:t>
+            </a:r>
+            <a:r>
+              <a:rPr lang="en-US" altLang="zh-CN" sz="2000" dirty="0">
+                <a:solidFill>
+                  <a:schemeClr val="bg1"/>
+                </a:solidFill>
+                <a:latin typeface="Consolas" panose="020B0609020204030204" pitchFamily="49" charset="0"/>
+                <a:cs typeface="Consolas" panose="020B0609020204030204" pitchFamily="49" charset="0"/>
+              </a:rPr>
+              <a:t>5</a:t>
+            </a:r>
+            <a:endParaRPr lang="en-AU" sz="2000" dirty="0">
+              <a:solidFill>
+                <a:schemeClr val="bg1"/>
+              </a:solidFill>
+              <a:latin typeface="Consolas" panose="020B0609020204030204" pitchFamily="49" charset="0"/>
+              <a:cs typeface="Consolas" panose="020B0609020204030204" pitchFamily="49" charset="0"/>
+            </a:endParaRPr>
+          </a:p>
+        </p:txBody>
+      </p:sp>
+      <p:sp>
+        <p:nvSpPr>
+          <p:cNvPr id="6" name="TextBox 5">
+            <a:extLst>
+              <a:ext uri="{FF2B5EF4-FFF2-40B4-BE49-F238E27FC236}">
+                <a16:creationId xmlns:a16="http://schemas.microsoft.com/office/drawing/2014/main" id="{ED5BCF2E-72B7-725D-3C7B-7FF15E11504E}"/>
+              </a:ext>
+            </a:extLst>
+          </p:cNvPr>
+          <p:cNvSpPr txBox="1"/>
+          <p:nvPr/>
+        </p:nvSpPr>
+        <p:spPr>
+          <a:xfrm>
+            <a:off x="2137557" y="4738823"/>
+            <a:ext cx="1629407" cy="369332"/>
+          </a:xfrm>
+          <a:prstGeom prst="rect">
+            <a:avLst/>
+          </a:prstGeom>
+          <a:solidFill>
+            <a:schemeClr val="tx1"/>
+          </a:solidFill>
+        </p:spPr>
+        <p:txBody>
+          <a:bodyPr wrap="square" rtlCol="0">
+            <a:spAutoFit/>
+          </a:bodyPr>
+          <a:lstStyle/>
+          <a:p>
+            <a:endParaRPr lang="en-AU" dirty="0"/>
+          </a:p>
+        </p:txBody>
+      </p:sp>
+      <p:sp>
+        <p:nvSpPr>
+          <p:cNvPr id="7" name="TextBox 6">
+            <a:extLst>
+              <a:ext uri="{FF2B5EF4-FFF2-40B4-BE49-F238E27FC236}">
+                <a16:creationId xmlns:a16="http://schemas.microsoft.com/office/drawing/2014/main" id="{583DB1AA-EA06-42D4-00F2-21E75C446C87}"/>
+              </a:ext>
+            </a:extLst>
+          </p:cNvPr>
+          <p:cNvSpPr txBox="1"/>
+          <p:nvPr/>
+        </p:nvSpPr>
+        <p:spPr>
+          <a:xfrm>
+            <a:off x="2204059" y="5683735"/>
+            <a:ext cx="1629407" cy="261610"/>
+          </a:xfrm>
+          <a:prstGeom prst="rect">
+            <a:avLst/>
+          </a:prstGeom>
+          <a:solidFill>
+            <a:schemeClr val="tx1"/>
+          </a:solidFill>
+        </p:spPr>
+        <p:txBody>
+          <a:bodyPr wrap="square" lIns="0" tIns="0" rIns="0" bIns="0" rtlCol="0">
+            <a:spAutoFit/>
+          </a:bodyPr>
+          <a:lstStyle/>
+          <a:p>
+            <a:r>
+              <a:rPr lang="en-US" altLang="zh-CN" sz="1700" dirty="0">
+                <a:solidFill>
+                  <a:schemeClr val="bg1"/>
+                </a:solidFill>
+                <a:latin typeface="Consolas" panose="020B0609020204030204" pitchFamily="49" charset="0"/>
+                <a:cs typeface="Consolas" panose="020B0609020204030204" pitchFamily="49" charset="0"/>
+              </a:rPr>
+              <a:t>born</a:t>
+            </a:r>
+            <a:r>
+              <a:rPr lang="zh-CN" altLang="en-US" sz="1700" dirty="0">
+                <a:solidFill>
+                  <a:schemeClr val="bg1"/>
+                </a:solidFill>
+                <a:latin typeface="Consolas" panose="020B0609020204030204" pitchFamily="49" charset="0"/>
+                <a:cs typeface="Consolas" panose="020B0609020204030204" pitchFamily="49" charset="0"/>
+              </a:rPr>
+              <a:t> </a:t>
+            </a:r>
+            <a:r>
+              <a:rPr lang="en-US" altLang="zh-CN" sz="1700" dirty="0">
+                <a:solidFill>
+                  <a:schemeClr val="bg1"/>
+                </a:solidFill>
+                <a:latin typeface="Consolas" panose="020B0609020204030204" pitchFamily="49" charset="0"/>
+                <a:cs typeface="Consolas" panose="020B0609020204030204" pitchFamily="49" charset="0"/>
+              </a:rPr>
+              <a:t>2nd</a:t>
+            </a:r>
+            <a:r>
+              <a:rPr lang="zh-CN" altLang="en-US" sz="1700" dirty="0">
+                <a:solidFill>
+                  <a:schemeClr val="bg1"/>
+                </a:solidFill>
+                <a:latin typeface="Consolas" panose="020B0609020204030204" pitchFamily="49" charset="0"/>
+                <a:cs typeface="Consolas" panose="020B0609020204030204" pitchFamily="49" charset="0"/>
+              </a:rPr>
+              <a:t> </a:t>
+            </a:r>
+            <a:r>
+              <a:rPr lang="en-US" altLang="zh-CN" sz="1700" dirty="0">
+                <a:solidFill>
+                  <a:schemeClr val="bg1"/>
+                </a:solidFill>
+                <a:latin typeface="Consolas" panose="020B0609020204030204" pitchFamily="49" charset="0"/>
+                <a:cs typeface="Consolas" panose="020B0609020204030204" pitchFamily="49" charset="0"/>
+              </a:rPr>
+              <a:t>half</a:t>
+            </a:r>
+            <a:endParaRPr lang="en-AU" sz="1700" dirty="0">
+              <a:solidFill>
+                <a:schemeClr val="bg1"/>
+              </a:solidFill>
+              <a:latin typeface="Consolas" panose="020B0609020204030204" pitchFamily="49" charset="0"/>
+              <a:cs typeface="Consolas" panose="020B0609020204030204" pitchFamily="49" charset="0"/>
+            </a:endParaRPr>
+          </a:p>
+        </p:txBody>
+      </p:sp>
+      <p:sp>
+        <p:nvSpPr>
+          <p:cNvPr id="8" name="TextBox 7">
+            <a:extLst>
+              <a:ext uri="{FF2B5EF4-FFF2-40B4-BE49-F238E27FC236}">
+                <a16:creationId xmlns:a16="http://schemas.microsoft.com/office/drawing/2014/main" id="{3724A914-B2BB-5102-B0DA-39FFE8668FF6}"/>
+              </a:ext>
+            </a:extLst>
+          </p:cNvPr>
+          <p:cNvSpPr txBox="1"/>
+          <p:nvPr/>
+        </p:nvSpPr>
+        <p:spPr>
+          <a:xfrm>
+            <a:off x="5666292" y="2293382"/>
+            <a:ext cx="2099922" cy="307777"/>
+          </a:xfrm>
+          <a:prstGeom prst="rect">
+            <a:avLst/>
+          </a:prstGeom>
+          <a:solidFill>
+            <a:schemeClr val="tx1"/>
+          </a:solidFill>
+        </p:spPr>
+        <p:txBody>
+          <a:bodyPr wrap="square" lIns="0" tIns="0" rIns="0" bIns="0" rtlCol="0">
+            <a:spAutoFit/>
+          </a:bodyPr>
+          <a:lstStyle/>
+          <a:p>
+            <a:r>
+              <a:rPr lang="en-US" altLang="zh-CN" sz="2000" dirty="0">
+                <a:solidFill>
+                  <a:schemeClr val="bg1"/>
+                </a:solidFill>
+                <a:latin typeface="Consolas" panose="020B0609020204030204" pitchFamily="49" charset="0"/>
+                <a:cs typeface="Consolas" panose="020B0609020204030204" pitchFamily="49" charset="0"/>
+              </a:rPr>
+              <a:t>cannot</a:t>
+            </a:r>
+            <a:r>
+              <a:rPr lang="zh-CN" altLang="en-US" sz="2000" dirty="0">
+                <a:solidFill>
+                  <a:schemeClr val="bg1"/>
+                </a:solidFill>
+                <a:latin typeface="Consolas" panose="020B0609020204030204" pitchFamily="49" charset="0"/>
+                <a:cs typeface="Consolas" panose="020B0609020204030204" pitchFamily="49" charset="0"/>
+              </a:rPr>
+              <a:t> </a:t>
+            </a:r>
+            <a:r>
+              <a:rPr lang="en-US" altLang="zh-CN" sz="2000" dirty="0">
+                <a:solidFill>
+                  <a:schemeClr val="bg1"/>
+                </a:solidFill>
+                <a:latin typeface="Consolas" panose="020B0609020204030204" pitchFamily="49" charset="0"/>
+                <a:cs typeface="Consolas" panose="020B0609020204030204" pitchFamily="49" charset="0"/>
+              </a:rPr>
+              <a:t>afford</a:t>
+            </a:r>
+            <a:endParaRPr lang="en-AU" sz="2000" dirty="0">
+              <a:solidFill>
+                <a:schemeClr val="bg1"/>
+              </a:solidFill>
+              <a:latin typeface="Consolas" panose="020B0609020204030204" pitchFamily="49" charset="0"/>
+              <a:cs typeface="Consolas" panose="020B0609020204030204" pitchFamily="49" charset="0"/>
+            </a:endParaRPr>
+          </a:p>
+        </p:txBody>
+      </p:sp>
+      <p:sp>
+        <p:nvSpPr>
+          <p:cNvPr id="10" name="TextBox 9">
+            <a:extLst>
+              <a:ext uri="{FF2B5EF4-FFF2-40B4-BE49-F238E27FC236}">
+                <a16:creationId xmlns:a16="http://schemas.microsoft.com/office/drawing/2014/main" id="{EC22A303-6557-16D3-20AE-E0AD98B3F3C1}"/>
+              </a:ext>
+            </a:extLst>
+          </p:cNvPr>
+          <p:cNvSpPr txBox="1"/>
+          <p:nvPr/>
+        </p:nvSpPr>
+        <p:spPr>
+          <a:xfrm>
+            <a:off x="6799755" y="3081963"/>
+            <a:ext cx="1629407" cy="369332"/>
+          </a:xfrm>
+          <a:prstGeom prst="rect">
+            <a:avLst/>
+          </a:prstGeom>
+          <a:solidFill>
+            <a:schemeClr val="tx1"/>
+          </a:solidFill>
+        </p:spPr>
+        <p:txBody>
+          <a:bodyPr wrap="square" rtlCol="0">
+            <a:spAutoFit/>
+          </a:bodyPr>
+          <a:lstStyle/>
+          <a:p>
+            <a:endParaRPr lang="en-AU" dirty="0"/>
+          </a:p>
+        </p:txBody>
+      </p:sp>
+      <p:sp>
+        <p:nvSpPr>
+          <p:cNvPr id="11" name="TextBox 10">
+            <a:extLst>
+              <a:ext uri="{FF2B5EF4-FFF2-40B4-BE49-F238E27FC236}">
+                <a16:creationId xmlns:a16="http://schemas.microsoft.com/office/drawing/2014/main" id="{7263FB64-43B9-E339-61E7-ABA2D3088862}"/>
+              </a:ext>
+            </a:extLst>
+          </p:cNvPr>
+          <p:cNvSpPr txBox="1"/>
+          <p:nvPr/>
+        </p:nvSpPr>
+        <p:spPr>
+          <a:xfrm>
+            <a:off x="6865025" y="4001954"/>
+            <a:ext cx="3960000" cy="276999"/>
+          </a:xfrm>
+          <a:prstGeom prst="rect">
+            <a:avLst/>
+          </a:prstGeom>
+          <a:solidFill>
+            <a:schemeClr val="tx1"/>
+          </a:solidFill>
+        </p:spPr>
+        <p:txBody>
+          <a:bodyPr wrap="square" lIns="0" tIns="0" rIns="0" bIns="0" rtlCol="0">
+            <a:spAutoFit/>
+          </a:bodyPr>
+          <a:lstStyle/>
+          <a:p>
+            <a:r>
+              <a:rPr lang="en-US" altLang="zh-CN" dirty="0">
+                <a:solidFill>
+                  <a:schemeClr val="bg1"/>
+                </a:solidFill>
+                <a:latin typeface="Consolas" panose="020B0609020204030204" pitchFamily="49" charset="0"/>
+                <a:cs typeface="Consolas" panose="020B0609020204030204" pitchFamily="49" charset="0"/>
+              </a:rPr>
+              <a:t>90:</a:t>
+            </a:r>
+            <a:r>
+              <a:rPr lang="zh-CN" altLang="en-US" dirty="0">
+                <a:solidFill>
+                  <a:schemeClr val="bg1"/>
+                </a:solidFill>
+                <a:latin typeface="Consolas" panose="020B0609020204030204" pitchFamily="49" charset="0"/>
+                <a:cs typeface="Consolas" panose="020B0609020204030204" pitchFamily="49" charset="0"/>
+              </a:rPr>
+              <a:t> </a:t>
+            </a:r>
+            <a:r>
+              <a:rPr lang="en-US" altLang="zh-CN" dirty="0">
+                <a:solidFill>
+                  <a:schemeClr val="bg1"/>
+                </a:solidFill>
+                <a:latin typeface="Consolas" panose="020B0609020204030204" pitchFamily="49" charset="0"/>
+                <a:cs typeface="Consolas" panose="020B0609020204030204" pitchFamily="49" charset="0"/>
+              </a:rPr>
+              <a:t>B,</a:t>
+            </a:r>
+            <a:r>
+              <a:rPr lang="zh-CN" altLang="en-US" dirty="0">
+                <a:solidFill>
+                  <a:schemeClr val="bg1"/>
+                </a:solidFill>
+                <a:latin typeface="Consolas" panose="020B0609020204030204" pitchFamily="49" charset="0"/>
+                <a:cs typeface="Consolas" panose="020B0609020204030204" pitchFamily="49" charset="0"/>
+              </a:rPr>
+              <a:t> </a:t>
+            </a:r>
+            <a:r>
+              <a:rPr lang="en-US" altLang="zh-CN" dirty="0">
+                <a:solidFill>
+                  <a:schemeClr val="bg1"/>
+                </a:solidFill>
+                <a:latin typeface="Consolas" panose="020B0609020204030204" pitchFamily="49" charset="0"/>
+                <a:cs typeface="Consolas" panose="020B0609020204030204" pitchFamily="49" charset="0"/>
+              </a:rPr>
+              <a:t>98:</a:t>
+            </a:r>
+            <a:r>
+              <a:rPr lang="zh-CN" altLang="en-US" dirty="0">
+                <a:solidFill>
+                  <a:schemeClr val="bg1"/>
+                </a:solidFill>
+                <a:latin typeface="Consolas" panose="020B0609020204030204" pitchFamily="49" charset="0"/>
+                <a:cs typeface="Consolas" panose="020B0609020204030204" pitchFamily="49" charset="0"/>
+              </a:rPr>
+              <a:t> </a:t>
+            </a:r>
+            <a:r>
+              <a:rPr lang="en-US" altLang="zh-CN" dirty="0">
+                <a:solidFill>
+                  <a:schemeClr val="bg1"/>
+                </a:solidFill>
+                <a:latin typeface="Consolas" panose="020B0609020204030204" pitchFamily="49" charset="0"/>
+                <a:cs typeface="Consolas" panose="020B0609020204030204" pitchFamily="49" charset="0"/>
+              </a:rPr>
+              <a:t>A.</a:t>
+            </a:r>
+            <a:r>
+              <a:rPr lang="zh-CN" altLang="en-US" dirty="0">
+                <a:solidFill>
+                  <a:schemeClr val="bg1"/>
+                </a:solidFill>
+                <a:latin typeface="Consolas" panose="020B0609020204030204" pitchFamily="49" charset="0"/>
+                <a:cs typeface="Consolas" panose="020B0609020204030204" pitchFamily="49" charset="0"/>
+              </a:rPr>
+              <a:t> </a:t>
+            </a:r>
+            <a:r>
+              <a:rPr lang="en-US" altLang="zh-CN" dirty="0">
+                <a:solidFill>
+                  <a:schemeClr val="bg1"/>
+                </a:solidFill>
+                <a:latin typeface="Consolas" panose="020B0609020204030204" pitchFamily="49" charset="0"/>
+                <a:cs typeface="Consolas" panose="020B0609020204030204" pitchFamily="49" charset="0"/>
+              </a:rPr>
+              <a:t>You</a:t>
+            </a:r>
+            <a:r>
+              <a:rPr lang="zh-CN" altLang="en-US" dirty="0">
+                <a:solidFill>
+                  <a:schemeClr val="bg1"/>
+                </a:solidFill>
+                <a:latin typeface="Consolas" panose="020B0609020204030204" pitchFamily="49" charset="0"/>
+                <a:cs typeface="Consolas" panose="020B0609020204030204" pitchFamily="49" charset="0"/>
+              </a:rPr>
+              <a:t> </a:t>
+            </a:r>
+            <a:r>
+              <a:rPr lang="en-US" altLang="zh-CN" dirty="0">
+                <a:solidFill>
+                  <a:schemeClr val="bg1"/>
+                </a:solidFill>
+                <a:latin typeface="Consolas" panose="020B0609020204030204" pitchFamily="49" charset="0"/>
+                <a:cs typeface="Consolas" panose="020B0609020204030204" pitchFamily="49" charset="0"/>
+              </a:rPr>
+              <a:t>only</a:t>
+            </a:r>
+            <a:r>
+              <a:rPr lang="zh-CN" altLang="en-US" dirty="0">
+                <a:solidFill>
+                  <a:schemeClr val="bg1"/>
+                </a:solidFill>
+                <a:latin typeface="Consolas" panose="020B0609020204030204" pitchFamily="49" charset="0"/>
+                <a:cs typeface="Consolas" panose="020B0609020204030204" pitchFamily="49" charset="0"/>
+              </a:rPr>
+              <a:t> </a:t>
+            </a:r>
+            <a:r>
+              <a:rPr lang="en-US" altLang="zh-CN" dirty="0">
+                <a:solidFill>
+                  <a:schemeClr val="bg1"/>
+                </a:solidFill>
+                <a:latin typeface="Consolas" panose="020B0609020204030204" pitchFamily="49" charset="0"/>
+                <a:cs typeface="Consolas" panose="020B0609020204030204" pitchFamily="49" charset="0"/>
+              </a:rPr>
+              <a:t>got</a:t>
+            </a:r>
+            <a:r>
+              <a:rPr lang="zh-CN" altLang="en-US" dirty="0">
+                <a:solidFill>
+                  <a:schemeClr val="bg1"/>
+                </a:solidFill>
+                <a:latin typeface="Consolas" panose="020B0609020204030204" pitchFamily="49" charset="0"/>
+                <a:cs typeface="Consolas" panose="020B0609020204030204" pitchFamily="49" charset="0"/>
+              </a:rPr>
+              <a:t> </a:t>
+            </a:r>
+            <a:r>
+              <a:rPr lang="en-US" altLang="zh-CN" dirty="0">
+                <a:solidFill>
+                  <a:schemeClr val="bg1"/>
+                </a:solidFill>
+                <a:latin typeface="Consolas" panose="020B0609020204030204" pitchFamily="49" charset="0"/>
+                <a:cs typeface="Consolas" panose="020B0609020204030204" pitchFamily="49" charset="0"/>
+              </a:rPr>
+              <a:t>B.</a:t>
+            </a:r>
+            <a:endParaRPr lang="en-AU" dirty="0">
+              <a:solidFill>
+                <a:schemeClr val="bg1"/>
+              </a:solidFill>
+              <a:latin typeface="Consolas" panose="020B0609020204030204" pitchFamily="49" charset="0"/>
+              <a:cs typeface="Consolas" panose="020B0609020204030204" pitchFamily="49" charset="0"/>
+            </a:endParaRPr>
+          </a:p>
+        </p:txBody>
+      </p:sp>
+      <p:sp>
+        <p:nvSpPr>
+          <p:cNvPr id="13" name="TextBox 12">
+            <a:extLst>
+              <a:ext uri="{FF2B5EF4-FFF2-40B4-BE49-F238E27FC236}">
+                <a16:creationId xmlns:a16="http://schemas.microsoft.com/office/drawing/2014/main" id="{F39B0871-E22C-DCEF-6293-C23088375EB1}"/>
+              </a:ext>
+            </a:extLst>
+          </p:cNvPr>
+          <p:cNvSpPr txBox="1"/>
+          <p:nvPr/>
+        </p:nvSpPr>
+        <p:spPr>
+          <a:xfrm>
+            <a:off x="9947601" y="2287609"/>
+            <a:ext cx="1422000" cy="276999"/>
+          </a:xfrm>
+          <a:prstGeom prst="rect">
+            <a:avLst/>
+          </a:prstGeom>
+          <a:solidFill>
+            <a:schemeClr val="tx1"/>
+          </a:solidFill>
+        </p:spPr>
+        <p:txBody>
+          <a:bodyPr wrap="square" lIns="0" tIns="0" rIns="0" bIns="0" rtlCol="0">
+            <a:spAutoFit/>
+          </a:bodyPr>
+          <a:lstStyle/>
+          <a:p>
+            <a:r>
+              <a:rPr lang="en-US" altLang="zh-CN" dirty="0">
+                <a:solidFill>
+                  <a:schemeClr val="bg1"/>
+                </a:solidFill>
+                <a:latin typeface="Consolas" panose="020B0609020204030204" pitchFamily="49" charset="0"/>
+                <a:cs typeface="Consolas" panose="020B0609020204030204" pitchFamily="49" charset="0"/>
+              </a:rPr>
+              <a:t>n</a:t>
+            </a:r>
+            <a:r>
+              <a:rPr lang="zh-CN" altLang="en-US" dirty="0">
+                <a:solidFill>
+                  <a:schemeClr val="bg1"/>
+                </a:solidFill>
+                <a:latin typeface="Consolas" panose="020B0609020204030204" pitchFamily="49" charset="0"/>
+                <a:cs typeface="Consolas" panose="020B0609020204030204" pitchFamily="49" charset="0"/>
+              </a:rPr>
+              <a:t> </a:t>
+            </a:r>
+            <a:r>
+              <a:rPr lang="en-US" altLang="zh-CN" dirty="0">
+                <a:solidFill>
+                  <a:schemeClr val="bg1"/>
+                </a:solidFill>
+                <a:latin typeface="Consolas" panose="020B0609020204030204" pitchFamily="49" charset="0"/>
+                <a:cs typeface="Consolas" panose="020B0609020204030204" pitchFamily="49" charset="0"/>
+              </a:rPr>
+              <a:t>div.</a:t>
+            </a:r>
+            <a:r>
+              <a:rPr lang="zh-CN" altLang="en-US" dirty="0">
+                <a:solidFill>
+                  <a:schemeClr val="bg1"/>
+                </a:solidFill>
+                <a:latin typeface="Consolas" panose="020B0609020204030204" pitchFamily="49" charset="0"/>
+                <a:cs typeface="Consolas" panose="020B0609020204030204" pitchFamily="49" charset="0"/>
+              </a:rPr>
+              <a:t> </a:t>
+            </a:r>
+            <a:r>
+              <a:rPr lang="en-US" altLang="zh-CN" dirty="0">
+                <a:solidFill>
+                  <a:schemeClr val="bg1"/>
+                </a:solidFill>
+                <a:latin typeface="Consolas" panose="020B0609020204030204" pitchFamily="49" charset="0"/>
+                <a:cs typeface="Consolas" panose="020B0609020204030204" pitchFamily="49" charset="0"/>
+              </a:rPr>
+              <a:t>by</a:t>
+            </a:r>
+            <a:r>
+              <a:rPr lang="zh-CN" altLang="en-US" dirty="0">
+                <a:solidFill>
+                  <a:schemeClr val="bg1"/>
+                </a:solidFill>
+                <a:latin typeface="Consolas" panose="020B0609020204030204" pitchFamily="49" charset="0"/>
+                <a:cs typeface="Consolas" panose="020B0609020204030204" pitchFamily="49" charset="0"/>
+              </a:rPr>
+              <a:t> </a:t>
+            </a:r>
+            <a:r>
+              <a:rPr lang="en-US" altLang="zh-CN" dirty="0">
+                <a:solidFill>
+                  <a:schemeClr val="bg1"/>
+                </a:solidFill>
+                <a:latin typeface="Consolas" panose="020B0609020204030204" pitchFamily="49" charset="0"/>
+                <a:cs typeface="Consolas" panose="020B0609020204030204" pitchFamily="49" charset="0"/>
+              </a:rPr>
+              <a:t>3</a:t>
+            </a:r>
+            <a:endParaRPr lang="en-AU" dirty="0">
+              <a:solidFill>
+                <a:schemeClr val="bg1"/>
+              </a:solidFill>
+              <a:latin typeface="Consolas" panose="020B0609020204030204" pitchFamily="49" charset="0"/>
+              <a:cs typeface="Consolas" panose="020B0609020204030204" pitchFamily="49" charset="0"/>
+            </a:endParaRPr>
+          </a:p>
+        </p:txBody>
+      </p:sp>
+      <p:sp>
+        <p:nvSpPr>
+          <p:cNvPr id="14" name="TextBox 13">
+            <a:extLst>
+              <a:ext uri="{FF2B5EF4-FFF2-40B4-BE49-F238E27FC236}">
+                <a16:creationId xmlns:a16="http://schemas.microsoft.com/office/drawing/2014/main" id="{48E1D848-D0E2-CEC5-79CB-65F89C676E5D}"/>
+              </a:ext>
+            </a:extLst>
+          </p:cNvPr>
+          <p:cNvSpPr txBox="1"/>
+          <p:nvPr/>
+        </p:nvSpPr>
+        <p:spPr>
+          <a:xfrm>
+            <a:off x="6673621" y="5683736"/>
+            <a:ext cx="3348000" cy="261610"/>
+          </a:xfrm>
+          <a:prstGeom prst="rect">
+            <a:avLst/>
+          </a:prstGeom>
+          <a:solidFill>
+            <a:schemeClr val="tx1"/>
+          </a:solidFill>
+        </p:spPr>
+        <p:txBody>
+          <a:bodyPr wrap="square" lIns="0" tIns="0" rIns="0" bIns="0" rtlCol="0">
+            <a:spAutoFit/>
+          </a:bodyPr>
+          <a:lstStyle/>
+          <a:p>
+            <a:r>
+              <a:rPr lang="en-US" altLang="zh-CN" sz="1700" dirty="0">
+                <a:solidFill>
+                  <a:schemeClr val="bg1"/>
+                </a:solidFill>
+                <a:latin typeface="Consolas" panose="020B0609020204030204" pitchFamily="49" charset="0"/>
+                <a:cs typeface="Consolas" panose="020B0609020204030204" pitchFamily="49" charset="0"/>
+              </a:rPr>
+              <a:t>n</a:t>
+            </a:r>
+            <a:r>
+              <a:rPr lang="zh-CN" altLang="en-US" sz="1700" dirty="0">
+                <a:solidFill>
+                  <a:schemeClr val="bg1"/>
+                </a:solidFill>
+                <a:latin typeface="Consolas" panose="020B0609020204030204" pitchFamily="49" charset="0"/>
+                <a:cs typeface="Consolas" panose="020B0609020204030204" pitchFamily="49" charset="0"/>
+              </a:rPr>
+              <a:t> </a:t>
+            </a:r>
+            <a:r>
+              <a:rPr lang="en-US" altLang="zh-CN" sz="1700" dirty="0">
+                <a:solidFill>
+                  <a:schemeClr val="bg1"/>
+                </a:solidFill>
+                <a:latin typeface="Consolas" panose="020B0609020204030204" pitchFamily="49" charset="0"/>
+                <a:cs typeface="Consolas" panose="020B0609020204030204" pitchFamily="49" charset="0"/>
+              </a:rPr>
+              <a:t>div.</a:t>
+            </a:r>
+            <a:r>
+              <a:rPr lang="zh-CN" altLang="en-US" sz="1700" dirty="0">
+                <a:solidFill>
+                  <a:schemeClr val="bg1"/>
+                </a:solidFill>
+                <a:latin typeface="Consolas" panose="020B0609020204030204" pitchFamily="49" charset="0"/>
+                <a:cs typeface="Consolas" panose="020B0609020204030204" pitchFamily="49" charset="0"/>
+              </a:rPr>
+              <a:t> </a:t>
+            </a:r>
+            <a:r>
+              <a:rPr lang="en-US" altLang="zh-CN" sz="1700" dirty="0">
+                <a:solidFill>
+                  <a:schemeClr val="bg1"/>
+                </a:solidFill>
+                <a:latin typeface="Consolas" panose="020B0609020204030204" pitchFamily="49" charset="0"/>
+                <a:cs typeface="Consolas" panose="020B0609020204030204" pitchFamily="49" charset="0"/>
+              </a:rPr>
+              <a:t>only</a:t>
+            </a:r>
+            <a:r>
+              <a:rPr lang="zh-CN" altLang="en-US" sz="1700" dirty="0">
+                <a:solidFill>
+                  <a:schemeClr val="bg1"/>
+                </a:solidFill>
+                <a:latin typeface="Consolas" panose="020B0609020204030204" pitchFamily="49" charset="0"/>
+                <a:cs typeface="Consolas" panose="020B0609020204030204" pitchFamily="49" charset="0"/>
+              </a:rPr>
+              <a:t> </a:t>
+            </a:r>
+            <a:r>
+              <a:rPr lang="en-US" altLang="zh-CN" sz="1700" dirty="0">
+                <a:solidFill>
+                  <a:schemeClr val="bg1"/>
+                </a:solidFill>
+                <a:latin typeface="Consolas" panose="020B0609020204030204" pitchFamily="49" charset="0"/>
+                <a:cs typeface="Consolas" panose="020B0609020204030204" pitchFamily="49" charset="0"/>
+              </a:rPr>
+              <a:t>by</a:t>
+            </a:r>
+            <a:r>
+              <a:rPr lang="zh-CN" altLang="en-US" sz="1700" dirty="0">
+                <a:solidFill>
+                  <a:schemeClr val="bg1"/>
+                </a:solidFill>
+                <a:latin typeface="Consolas" panose="020B0609020204030204" pitchFamily="49" charset="0"/>
+                <a:cs typeface="Consolas" panose="020B0609020204030204" pitchFamily="49" charset="0"/>
+              </a:rPr>
+              <a:t> </a:t>
+            </a:r>
+            <a:r>
+              <a:rPr lang="en-US" altLang="zh-CN" sz="1700" dirty="0">
+                <a:solidFill>
+                  <a:schemeClr val="bg1"/>
+                </a:solidFill>
+                <a:latin typeface="Consolas" panose="020B0609020204030204" pitchFamily="49" charset="0"/>
+                <a:cs typeface="Consolas" panose="020B0609020204030204" pitchFamily="49" charset="0"/>
+              </a:rPr>
+              <a:t>one</a:t>
+            </a:r>
+            <a:r>
+              <a:rPr lang="zh-CN" altLang="en-US" sz="1700" dirty="0">
+                <a:solidFill>
+                  <a:schemeClr val="bg1"/>
+                </a:solidFill>
+                <a:latin typeface="Consolas" panose="020B0609020204030204" pitchFamily="49" charset="0"/>
+                <a:cs typeface="Consolas" panose="020B0609020204030204" pitchFamily="49" charset="0"/>
+              </a:rPr>
+              <a:t> </a:t>
+            </a:r>
+            <a:r>
+              <a:rPr lang="en-US" altLang="zh-CN" sz="1700" dirty="0">
+                <a:solidFill>
+                  <a:schemeClr val="bg1"/>
+                </a:solidFill>
+                <a:latin typeface="Consolas" panose="020B0609020204030204" pitchFamily="49" charset="0"/>
+                <a:cs typeface="Consolas" panose="020B0609020204030204" pitchFamily="49" charset="0"/>
+              </a:rPr>
+              <a:t>of</a:t>
+            </a:r>
+            <a:r>
+              <a:rPr lang="zh-CN" altLang="en-US" sz="1700" dirty="0">
+                <a:solidFill>
+                  <a:schemeClr val="bg1"/>
+                </a:solidFill>
+                <a:latin typeface="Consolas" panose="020B0609020204030204" pitchFamily="49" charset="0"/>
+                <a:cs typeface="Consolas" panose="020B0609020204030204" pitchFamily="49" charset="0"/>
+              </a:rPr>
+              <a:t> </a:t>
+            </a:r>
+            <a:r>
+              <a:rPr lang="en-US" altLang="zh-CN" sz="1700" dirty="0">
+                <a:solidFill>
+                  <a:schemeClr val="bg1"/>
+                </a:solidFill>
+                <a:latin typeface="Consolas" panose="020B0609020204030204" pitchFamily="49" charset="0"/>
+                <a:cs typeface="Consolas" panose="020B0609020204030204" pitchFamily="49" charset="0"/>
+              </a:rPr>
+              <a:t>3</a:t>
+            </a:r>
+            <a:r>
+              <a:rPr lang="zh-CN" altLang="en-US" sz="1700" dirty="0">
+                <a:solidFill>
+                  <a:schemeClr val="bg1"/>
+                </a:solidFill>
+                <a:latin typeface="Consolas" panose="020B0609020204030204" pitchFamily="49" charset="0"/>
+                <a:cs typeface="Consolas" panose="020B0609020204030204" pitchFamily="49" charset="0"/>
+              </a:rPr>
+              <a:t> </a:t>
+            </a:r>
+            <a:r>
+              <a:rPr lang="en-US" altLang="zh-CN" sz="1700" dirty="0">
+                <a:solidFill>
+                  <a:schemeClr val="bg1"/>
+                </a:solidFill>
+                <a:latin typeface="Consolas" panose="020B0609020204030204" pitchFamily="49" charset="0"/>
+                <a:cs typeface="Consolas" panose="020B0609020204030204" pitchFamily="49" charset="0"/>
+              </a:rPr>
+              <a:t>or</a:t>
+            </a:r>
+            <a:r>
+              <a:rPr lang="zh-CN" altLang="en-US" sz="1400" dirty="0">
+                <a:solidFill>
+                  <a:schemeClr val="bg1"/>
+                </a:solidFill>
+                <a:latin typeface="Consolas" panose="020B0609020204030204" pitchFamily="49" charset="0"/>
+                <a:cs typeface="Consolas" panose="020B0609020204030204" pitchFamily="49" charset="0"/>
+              </a:rPr>
+              <a:t> </a:t>
+            </a:r>
+            <a:r>
+              <a:rPr lang="en-US" altLang="zh-CN" sz="1700" dirty="0">
+                <a:solidFill>
+                  <a:schemeClr val="bg1"/>
+                </a:solidFill>
+                <a:latin typeface="Consolas" panose="020B0609020204030204" pitchFamily="49" charset="0"/>
+                <a:cs typeface="Consolas" panose="020B0609020204030204" pitchFamily="49" charset="0"/>
+              </a:rPr>
+              <a:t>5</a:t>
+            </a:r>
+            <a:endParaRPr lang="en-AU" sz="1700" dirty="0">
+              <a:solidFill>
+                <a:schemeClr val="bg1"/>
+              </a:solidFill>
+              <a:latin typeface="Consolas" panose="020B0609020204030204" pitchFamily="49" charset="0"/>
+              <a:cs typeface="Consolas" panose="020B0609020204030204" pitchFamily="49" charset="0"/>
+            </a:endParaRPr>
+          </a:p>
+        </p:txBody>
+      </p:sp>
+      <p:sp>
+        <p:nvSpPr>
+          <p:cNvPr id="17" name="TextBox 16">
+            <a:extLst>
+              <a:ext uri="{FF2B5EF4-FFF2-40B4-BE49-F238E27FC236}">
+                <a16:creationId xmlns:a16="http://schemas.microsoft.com/office/drawing/2014/main" id="{1FDBBE56-66AE-D0D8-5447-C8D3ABE50AD7}"/>
+              </a:ext>
+            </a:extLst>
+          </p:cNvPr>
+          <p:cNvSpPr txBox="1"/>
+          <p:nvPr/>
+        </p:nvSpPr>
+        <p:spPr>
+          <a:xfrm>
+            <a:off x="3108807" y="3703868"/>
+            <a:ext cx="2084459" cy="369332"/>
+          </a:xfrm>
+          <a:prstGeom prst="rect">
+            <a:avLst/>
+          </a:prstGeom>
+          <a:solidFill>
+            <a:schemeClr val="tx1"/>
+          </a:solidFill>
+        </p:spPr>
+        <p:txBody>
+          <a:bodyPr wrap="square" rtlCol="0">
+            <a:spAutoFit/>
+          </a:bodyPr>
+          <a:lstStyle/>
+          <a:p>
+            <a:r>
+              <a:rPr lang="en-US" altLang="zh-CN" dirty="0">
+                <a:solidFill>
+                  <a:srgbClr val="0070C0"/>
+                </a:solidFill>
+                <a:latin typeface="Consolas" panose="020B0609020204030204" pitchFamily="49" charset="0"/>
+                <a:cs typeface="Consolas" panose="020B0609020204030204" pitchFamily="49" charset="0"/>
+              </a:rPr>
+              <a:t>//</a:t>
+            </a:r>
+            <a:r>
+              <a:rPr lang="zh-CN" altLang="en-US" dirty="0">
+                <a:solidFill>
+                  <a:srgbClr val="0070C0"/>
+                </a:solidFill>
+                <a:latin typeface="Consolas" panose="020B0609020204030204" pitchFamily="49" charset="0"/>
+                <a:cs typeface="Consolas" panose="020B0609020204030204" pitchFamily="49" charset="0"/>
+              </a:rPr>
+              <a:t> </a:t>
+            </a:r>
+            <a:r>
+              <a:rPr lang="en-US" altLang="zh-CN" dirty="0">
+                <a:solidFill>
+                  <a:srgbClr val="0070C0"/>
+                </a:solidFill>
+                <a:latin typeface="Consolas" panose="020B0609020204030204" pitchFamily="49" charset="0"/>
+                <a:cs typeface="Consolas" panose="020B0609020204030204" pitchFamily="49" charset="0"/>
+              </a:rPr>
+              <a:t>or</a:t>
+            </a:r>
+            <a:r>
+              <a:rPr lang="zh-CN" altLang="en-US" dirty="0">
+                <a:solidFill>
+                  <a:srgbClr val="0070C0"/>
+                </a:solidFill>
+                <a:latin typeface="Consolas" panose="020B0609020204030204" pitchFamily="49" charset="0"/>
+                <a:cs typeface="Consolas" panose="020B0609020204030204" pitchFamily="49" charset="0"/>
+              </a:rPr>
+              <a:t> </a:t>
+            </a:r>
+            <a:r>
+              <a:rPr lang="en-US" altLang="zh-CN" dirty="0">
+                <a:solidFill>
+                  <a:srgbClr val="0070C0"/>
+                </a:solidFill>
+                <a:latin typeface="Consolas" panose="020B0609020204030204" pitchFamily="49" charset="0"/>
+                <a:cs typeface="Consolas" panose="020B0609020204030204" pitchFamily="49" charset="0"/>
+              </a:rPr>
+              <a:t>n%15==0</a:t>
+            </a:r>
+            <a:endParaRPr lang="en-AU" dirty="0">
+              <a:solidFill>
+                <a:srgbClr val="0070C0"/>
+              </a:solidFill>
+              <a:latin typeface="Consolas" panose="020B0609020204030204" pitchFamily="49" charset="0"/>
+              <a:cs typeface="Consolas" panose="020B0609020204030204" pitchFamily="49" charset="0"/>
+            </a:endParaRPr>
+          </a:p>
+        </p:txBody>
+      </p:sp>
+    </p:spTree>
+    <p:extLst>
+      <p:ext uri="{BB962C8B-B14F-4D97-AF65-F5344CB8AC3E}">
+        <p14:creationId xmlns:p14="http://schemas.microsoft.com/office/powerpoint/2010/main" val="3205945023"/>
+      </p:ext>
+    </p:extLst>
+  </p:cSld>
+  <p:clrMapOvr>
+    <a:masterClrMapping/>
+  </p:clrMapOvr>
+</p:sld>
+</file>
+
+<file path=ppt/slides/slide12.xml><?xml version="1.0" encoding="utf-8"?>
+<p:sld xmlns:a="http://schemas.openxmlformats.org/drawingml/2006/main" xmlns:r="http://schemas.openxmlformats.org/officeDocument/2006/relationships" xmlns:p="http://schemas.openxmlformats.org/presentationml/2006/main">
+  <p:cSld>
+    <p:spTree>
+      <p:nvGrpSpPr>
+        <p:cNvPr id="1" name=""/>
+        <p:cNvGrpSpPr/>
+        <p:nvPr/>
+      </p:nvGrpSpPr>
+      <p:grpSpPr>
+        <a:xfrm>
+          <a:off x="0" y="0"/>
+          <a:ext cx="0" cy="0"/>
+          <a:chOff x="0" y="0"/>
+          <a:chExt cx="0" cy="0"/>
+        </a:xfrm>
+      </p:grpSpPr>
       <p:sp>
         <p:nvSpPr>
           <p:cNvPr id="3" name="内容占位符 2"/>
@@ -11927,7 +14860,7 @@
 </p:sld>
 </file>
 
-<file path=ppt/slides/slide11.xml><?xml version="1.0" encoding="utf-8"?>
+<file path=ppt/slides/slide13.xml><?xml version="1.0" encoding="utf-8"?>
 <p:sld xmlns:a="http://schemas.openxmlformats.org/drawingml/2006/main" xmlns:r="http://schemas.openxmlformats.org/officeDocument/2006/relationships" xmlns:p="http://schemas.openxmlformats.org/presentationml/2006/main">
   <p:cSld>
     <p:spTree>
@@ -15300,7 +18233,7 @@
             </p:custDataLst>
             <p:extLst>
               <p:ext uri="{D42A27DB-BD31-4B8C-83A1-F6EECF244321}">
-                <p14:modId xmlns:p14="http://schemas.microsoft.com/office/powerpoint/2010/main" val="1809883015"/>
+                <p14:modId xmlns:p14="http://schemas.microsoft.com/office/powerpoint/2010/main" val="2966292455"/>
               </p:ext>
             </p:extLst>
           </p:nvPr>
@@ -15557,12 +18490,12 @@
                     <a:lstStyle/>
                     <a:p>
                       <a:r>
-                        <a:rPr lang="en" altLang="zh-CN" sz="1400" dirty="0">
+                        <a:rPr lang="en" altLang="zh-CN" sz="1400">
                           <a:latin typeface="Consolas" panose="020B0609020204030204" pitchFamily="49" charset="0"/>
                           <a:ea typeface="微软雅黑" panose="020B0503020204020204" pitchFamily="34" charset="-122"/>
                           <a:cs typeface="Consolas" panose="020B0609020204030204" pitchFamily="49" charset="0"/>
                         </a:rPr>
-                        <a:t>a%cb%c</a:t>
+                        <a:t>a%c - b%c</a:t>
                       </a:r>
                       <a:endParaRPr lang="zh-CN" altLang="en-US" sz="1400" dirty="0">
                         <a:latin typeface="Consolas" panose="020B0609020204030204" pitchFamily="49" charset="0"/>
@@ -21004,6 +23937,370 @@
       </p:grpSpPr>
       <p:sp>
         <p:nvSpPr>
+          <p:cNvPr id="2" name="Title 1">
+            <a:extLst>
+              <a:ext uri="{FF2B5EF4-FFF2-40B4-BE49-F238E27FC236}">
+                <a16:creationId xmlns:a16="http://schemas.microsoft.com/office/drawing/2014/main" id="{10EA9AA3-C7FA-7AA3-64C5-AB1CB65570DB}"/>
+              </a:ext>
+            </a:extLst>
+          </p:cNvPr>
+          <p:cNvSpPr>
+            <a:spLocks noGrp="1"/>
+          </p:cNvSpPr>
+          <p:nvPr>
+            <p:ph type="title"/>
+          </p:nvPr>
+        </p:nvSpPr>
+        <p:spPr/>
+        <p:txBody>
+          <a:bodyPr/>
+          <a:lstStyle/>
+          <a:p>
+            <a:r>
+              <a:rPr lang="en-AU" dirty="0"/>
+              <a:t>Truth table</a:t>
+            </a:r>
+          </a:p>
+        </p:txBody>
+      </p:sp>
+      <p:sp>
+        <p:nvSpPr>
+          <p:cNvPr id="3" name="Content Placeholder 2">
+            <a:extLst>
+              <a:ext uri="{FF2B5EF4-FFF2-40B4-BE49-F238E27FC236}">
+                <a16:creationId xmlns:a16="http://schemas.microsoft.com/office/drawing/2014/main" id="{4209089D-919D-AD70-6588-5E106FE94478}"/>
+              </a:ext>
+            </a:extLst>
+          </p:cNvPr>
+          <p:cNvSpPr>
+            <a:spLocks noGrp="1"/>
+          </p:cNvSpPr>
+          <p:nvPr>
+            <p:ph idx="1"/>
+          </p:nvPr>
+        </p:nvSpPr>
+        <p:spPr/>
+        <p:txBody>
+          <a:bodyPr>
+            <a:normAutofit fontScale="92500" lnSpcReduction="20000"/>
+          </a:bodyPr>
+          <a:lstStyle/>
+          <a:p>
+            <a:pPr marL="0" indent="0">
+              <a:buNone/>
+            </a:pPr>
+            <a:endParaRPr lang="en-US" altLang="zh-CN" dirty="0">
+              <a:latin typeface="JetBrains Mono" panose="020B0509020102050004" pitchFamily="49" charset="77"/>
+            </a:endParaRPr>
+          </a:p>
+          <a:p>
+            <a:pPr marL="0" indent="0">
+              <a:buNone/>
+            </a:pPr>
+            <a:r>
+              <a:rPr lang="en-US" altLang="zh-CN" dirty="0">
+                <a:latin typeface="JetBrains Mono" panose="020B0509020102050004" pitchFamily="49" charset="77"/>
+              </a:rPr>
+              <a:t>&amp;&amp;</a:t>
+            </a:r>
+            <a:r>
+              <a:rPr lang="en-US" dirty="0">
+                <a:latin typeface="JetBrains Mono" panose="020B0509020102050004" pitchFamily="49" charset="77"/>
+              </a:rPr>
+              <a:t>		</a:t>
+            </a:r>
+            <a:r>
+              <a:rPr lang="en-US" altLang="zh-CN" dirty="0">
+                <a:latin typeface="JetBrains Mono" panose="020B0509020102050004" pitchFamily="49" charset="77"/>
+              </a:rPr>
+              <a:t>T		F	</a:t>
+            </a:r>
+          </a:p>
+          <a:p>
+            <a:pPr marL="0" indent="0">
+              <a:buNone/>
+            </a:pPr>
+            <a:r>
+              <a:rPr lang="en-US" altLang="zh-CN" dirty="0">
+                <a:latin typeface="JetBrains Mono" panose="020B0509020102050004" pitchFamily="49" charset="77"/>
+              </a:rPr>
+              <a:t>T		T		F</a:t>
+            </a:r>
+          </a:p>
+          <a:p>
+            <a:pPr marL="0" indent="0">
+              <a:buNone/>
+            </a:pPr>
+            <a:r>
+              <a:rPr lang="en-US" altLang="zh-CN" dirty="0">
+                <a:latin typeface="JetBrains Mono" panose="020B0509020102050004" pitchFamily="49" charset="77"/>
+              </a:rPr>
+              <a:t>F		F		F</a:t>
+            </a:r>
+          </a:p>
+          <a:p>
+            <a:pPr marL="0" indent="0">
+              <a:buNone/>
+            </a:pPr>
+            <a:endParaRPr lang="en-AU" dirty="0">
+              <a:latin typeface="JetBrains Mono" panose="020B0509020102050004" pitchFamily="49" charset="77"/>
+            </a:endParaRPr>
+          </a:p>
+          <a:p>
+            <a:pPr marL="0" indent="0">
+              <a:buNone/>
+            </a:pPr>
+            <a:r>
+              <a:rPr lang="en-US" altLang="zh-CN" dirty="0">
+                <a:latin typeface="JetBrains Mono" panose="020B0509020102050004" pitchFamily="49" charset="77"/>
+              </a:rPr>
+              <a:t>||</a:t>
+            </a:r>
+            <a:r>
+              <a:rPr lang="en-AU" altLang="zh-CN" dirty="0">
+                <a:latin typeface="JetBrains Mono" panose="020B0509020102050004" pitchFamily="49" charset="77"/>
+              </a:rPr>
+              <a:t>		</a:t>
+            </a:r>
+            <a:r>
+              <a:rPr lang="en-US" altLang="zh-CN" dirty="0">
+                <a:latin typeface="JetBrains Mono" panose="020B0509020102050004" pitchFamily="49" charset="77"/>
+              </a:rPr>
+              <a:t>T</a:t>
+            </a:r>
+            <a:r>
+              <a:rPr lang="en-AU" altLang="zh-CN" dirty="0">
+                <a:latin typeface="JetBrains Mono" panose="020B0509020102050004" pitchFamily="49" charset="77"/>
+              </a:rPr>
+              <a:t>		</a:t>
+            </a:r>
+            <a:r>
+              <a:rPr lang="en-US" altLang="zh-CN" dirty="0">
+                <a:latin typeface="JetBrains Mono" panose="020B0509020102050004" pitchFamily="49" charset="77"/>
+              </a:rPr>
+              <a:t>F</a:t>
+            </a:r>
+          </a:p>
+          <a:p>
+            <a:pPr marL="0" indent="0">
+              <a:buNone/>
+            </a:pPr>
+            <a:r>
+              <a:rPr lang="en-US" altLang="zh-CN" dirty="0">
+                <a:latin typeface="JetBrains Mono" panose="020B0509020102050004" pitchFamily="49" charset="77"/>
+              </a:rPr>
+              <a:t>T		T		T</a:t>
+            </a:r>
+          </a:p>
+          <a:p>
+            <a:pPr marL="0" indent="0">
+              <a:buNone/>
+            </a:pPr>
+            <a:r>
+              <a:rPr lang="en-US" altLang="zh-CN" dirty="0">
+                <a:latin typeface="JetBrains Mono" panose="020B0509020102050004" pitchFamily="49" charset="77"/>
+              </a:rPr>
+              <a:t>F		T		F</a:t>
+            </a:r>
+          </a:p>
+          <a:p>
+            <a:pPr marL="0" indent="0">
+              <a:buNone/>
+            </a:pPr>
+            <a:endParaRPr lang="en-US" altLang="zh-CN" dirty="0">
+              <a:latin typeface="JetBrains Mono" panose="020B0509020102050004" pitchFamily="49" charset="77"/>
+            </a:endParaRPr>
+          </a:p>
+          <a:p>
+            <a:pPr marL="0" indent="0">
+              <a:buNone/>
+            </a:pPr>
+            <a:r>
+              <a:rPr lang="en-US" altLang="zh-CN" dirty="0">
+                <a:latin typeface="JetBrains Mono" panose="020B0509020102050004" pitchFamily="49" charset="77"/>
+              </a:rPr>
+              <a:t>!		T		F</a:t>
+            </a:r>
+          </a:p>
+          <a:p>
+            <a:pPr marL="0" indent="0">
+              <a:buNone/>
+            </a:pPr>
+            <a:r>
+              <a:rPr lang="en-US" altLang="zh-CN" dirty="0">
+                <a:latin typeface="JetBrains Mono" panose="020B0509020102050004" pitchFamily="49" charset="77"/>
+              </a:rPr>
+              <a:t>		F		T</a:t>
+            </a:r>
+          </a:p>
+          <a:p>
+            <a:pPr marL="0" indent="0">
+              <a:buNone/>
+            </a:pPr>
+            <a:endParaRPr lang="en-AU" dirty="0">
+              <a:latin typeface="JetBrains Mono" panose="020B0509020102050004" pitchFamily="49" charset="77"/>
+            </a:endParaRPr>
+          </a:p>
+        </p:txBody>
+      </p:sp>
+    </p:spTree>
+    <p:extLst>
+      <p:ext uri="{BB962C8B-B14F-4D97-AF65-F5344CB8AC3E}">
+        <p14:creationId xmlns:p14="http://schemas.microsoft.com/office/powerpoint/2010/main" val="3602779307"/>
+      </p:ext>
+    </p:extLst>
+  </p:cSld>
+  <p:clrMapOvr>
+    <a:masterClrMapping/>
+  </p:clrMapOvr>
+</p:sld>
+</file>
+
+<file path=ppt/slides/slide8.xml><?xml version="1.0" encoding="utf-8"?>
+<p:sld xmlns:a="http://schemas.openxmlformats.org/drawingml/2006/main" xmlns:r="http://schemas.openxmlformats.org/officeDocument/2006/relationships" xmlns:p="http://schemas.openxmlformats.org/presentationml/2006/main">
+  <p:cSld>
+    <p:spTree>
+      <p:nvGrpSpPr>
+        <p:cNvPr id="1" name=""/>
+        <p:cNvGrpSpPr/>
+        <p:nvPr/>
+      </p:nvGrpSpPr>
+      <p:grpSpPr>
+        <a:xfrm>
+          <a:off x="0" y="0"/>
+          <a:ext cx="0" cy="0"/>
+          <a:chOff x="0" y="0"/>
+          <a:chExt cx="0" cy="0"/>
+        </a:xfrm>
+      </p:grpSpPr>
+      <p:sp>
+        <p:nvSpPr>
+          <p:cNvPr id="2" name="Title 1">
+            <a:extLst>
+              <a:ext uri="{FF2B5EF4-FFF2-40B4-BE49-F238E27FC236}">
+                <a16:creationId xmlns:a16="http://schemas.microsoft.com/office/drawing/2014/main" id="{BCE028AC-D3D9-8A40-8CA0-37928CD7089E}"/>
+              </a:ext>
+            </a:extLst>
+          </p:cNvPr>
+          <p:cNvSpPr>
+            <a:spLocks noGrp="1"/>
+          </p:cNvSpPr>
+          <p:nvPr>
+            <p:ph type="title"/>
+          </p:nvPr>
+        </p:nvSpPr>
+        <p:spPr/>
+        <p:txBody>
+          <a:bodyPr/>
+          <a:lstStyle/>
+          <a:p>
+            <a:endParaRPr lang="en-AU"/>
+          </a:p>
+        </p:txBody>
+      </p:sp>
+      <p:sp>
+        <p:nvSpPr>
+          <p:cNvPr id="3" name="Content Placeholder 2">
+            <a:extLst>
+              <a:ext uri="{FF2B5EF4-FFF2-40B4-BE49-F238E27FC236}">
+                <a16:creationId xmlns:a16="http://schemas.microsoft.com/office/drawing/2014/main" id="{EAEE1E1F-5A98-606B-FA52-98D07434C00E}"/>
+              </a:ext>
+            </a:extLst>
+          </p:cNvPr>
+          <p:cNvSpPr>
+            <a:spLocks noGrp="1"/>
+          </p:cNvSpPr>
+          <p:nvPr>
+            <p:ph idx="1"/>
+          </p:nvPr>
+        </p:nvSpPr>
+        <p:spPr/>
+        <p:txBody>
+          <a:bodyPr/>
+          <a:lstStyle/>
+          <a:p>
+            <a:pPr marL="0" indent="0">
+              <a:buNone/>
+            </a:pPr>
+            <a:r>
+              <a:rPr lang="en-AU" dirty="0"/>
+              <a:t>Logical: !, &amp;&amp;, ||</a:t>
+            </a:r>
+          </a:p>
+          <a:p>
+            <a:pPr marL="0" indent="0">
+              <a:buNone/>
+            </a:pPr>
+            <a:r>
+              <a:rPr lang="en-AU" dirty="0"/>
+              <a:t>Relational: &gt;, &lt;, &gt;=, &lt;=, ==, !=</a:t>
+            </a:r>
+          </a:p>
+          <a:p>
+            <a:pPr marL="0" indent="0">
+              <a:buNone/>
+            </a:pPr>
+            <a:r>
+              <a:rPr lang="en-AU" dirty="0" err="1"/>
+              <a:t>Arithmatical</a:t>
+            </a:r>
+            <a:r>
+              <a:rPr lang="en-AU" dirty="0"/>
+              <a:t>:, +, -, *, /, %</a:t>
+            </a:r>
+          </a:p>
+          <a:p>
+            <a:pPr marL="0" indent="0">
+              <a:buNone/>
+            </a:pPr>
+            <a:r>
+              <a:rPr lang="en-AU" dirty="0"/>
+              <a:t>Assignment: = </a:t>
+            </a:r>
+          </a:p>
+          <a:p>
+            <a:pPr marL="0" indent="0">
+              <a:buNone/>
+            </a:pPr>
+            <a:r>
+              <a:rPr lang="en-AU" dirty="0"/>
+              <a:t>Negative: - </a:t>
+            </a:r>
+          </a:p>
+        </p:txBody>
+      </p:sp>
+    </p:spTree>
+    <p:extLst>
+      <p:ext uri="{BB962C8B-B14F-4D97-AF65-F5344CB8AC3E}">
+        <p14:creationId xmlns:p14="http://schemas.microsoft.com/office/powerpoint/2010/main" val="2477124522"/>
+      </p:ext>
+    </p:extLst>
+  </p:cSld>
+  <p:clrMapOvr>
+    <a:masterClrMapping/>
+  </p:clrMapOvr>
+</p:sld>
+</file>
+
+<file path=ppt/slides/slide9.xml><?xml version="1.0" encoding="utf-8"?>
+<p:sld xmlns:a="http://schemas.openxmlformats.org/drawingml/2006/main" xmlns:r="http://schemas.openxmlformats.org/officeDocument/2006/relationships" xmlns:p="http://schemas.openxmlformats.org/presentationml/2006/main">
+  <p:cSld>
+    <p:spTree>
+      <p:nvGrpSpPr>
+        <p:cNvPr id="1" name=""/>
+        <p:cNvGrpSpPr/>
+        <p:nvPr/>
+      </p:nvGrpSpPr>
+      <p:grpSpPr>
+        <a:xfrm>
+          <a:off x="0" y="0"/>
+          <a:ext cx="0" cy="0"/>
+          <a:chOff x="0" y="0"/>
+          <a:chExt cx="0" cy="0"/>
+        </a:xfrm>
+      </p:grpSpPr>
+      <p:sp>
+        <p:nvSpPr>
           <p:cNvPr id="8" name="文本框 7"/>
           <p:cNvSpPr txBox="1"/>
           <p:nvPr/>
@@ -21560,2983 +24857,6 @@
       <p:bldP spid="9" grpId="0"/>
     </p:bldLst>
   </p:timing>
-</p:sld>
-</file>
-
-<file path=ppt/slides/slide8.xml><?xml version="1.0" encoding="utf-8"?>
-<p:sld xmlns:a="http://schemas.openxmlformats.org/drawingml/2006/main" xmlns:r="http://schemas.openxmlformats.org/officeDocument/2006/relationships" xmlns:p="http://schemas.openxmlformats.org/presentationml/2006/main">
-  <p:cSld>
-    <p:spTree>
-      <p:nvGrpSpPr>
-        <p:cNvPr id="1" name=""/>
-        <p:cNvGrpSpPr/>
-        <p:nvPr/>
-      </p:nvGrpSpPr>
-      <p:grpSpPr>
-        <a:xfrm>
-          <a:off x="0" y="0"/>
-          <a:ext cx="0" cy="0"/>
-          <a:chOff x="0" y="0"/>
-          <a:chExt cx="0" cy="0"/>
-        </a:xfrm>
-      </p:grpSpPr>
-      <p:pic>
-        <p:nvPicPr>
-          <p:cNvPr id="2" name="图片 1">
-            <a:extLst>
-              <a:ext uri="{FF2B5EF4-FFF2-40B4-BE49-F238E27FC236}">
-                <a16:creationId xmlns:a16="http://schemas.microsoft.com/office/drawing/2014/main" id="{DD8E51D1-FB0B-457F-AA4D-B571F34EDD6A}"/>
-              </a:ext>
-            </a:extLst>
-          </p:cNvPr>
-          <p:cNvPicPr>
-            <a:picLocks noChangeAspect="1"/>
-          </p:cNvPicPr>
-          <p:nvPr/>
-        </p:nvPicPr>
-        <p:blipFill>
-          <a:blip r:embed="rId2"/>
-          <a:stretch>
-            <a:fillRect/>
-          </a:stretch>
-        </p:blipFill>
-        <p:spPr>
-          <a:xfrm>
-            <a:off x="678609" y="1412078"/>
-            <a:ext cx="3088356" cy="1486985"/>
-          </a:xfrm>
-          <a:prstGeom prst="rect">
-            <a:avLst/>
-          </a:prstGeom>
-        </p:spPr>
-      </p:pic>
-      <p:pic>
-        <p:nvPicPr>
-          <p:cNvPr id="3" name="图片 2">
-            <a:extLst>
-              <a:ext uri="{FF2B5EF4-FFF2-40B4-BE49-F238E27FC236}">
-                <a16:creationId xmlns:a16="http://schemas.microsoft.com/office/drawing/2014/main" id="{279E12BF-51D5-4FC8-9F2F-22A3207B5C51}"/>
-              </a:ext>
-            </a:extLst>
-          </p:cNvPr>
-          <p:cNvPicPr>
-            <a:picLocks noChangeAspect="1"/>
-          </p:cNvPicPr>
-          <p:nvPr/>
-        </p:nvPicPr>
-        <p:blipFill>
-          <a:blip r:embed="rId3"/>
-          <a:stretch>
-            <a:fillRect/>
-          </a:stretch>
-        </p:blipFill>
-        <p:spPr>
-          <a:xfrm>
-            <a:off x="8221039" y="1412077"/>
-            <a:ext cx="3141516" cy="1486985"/>
-          </a:xfrm>
-          <a:prstGeom prst="rect">
-            <a:avLst/>
-          </a:prstGeom>
-        </p:spPr>
-      </p:pic>
-      <p:pic>
-        <p:nvPicPr>
-          <p:cNvPr id="4" name="图片 3">
-            <a:extLst>
-              <a:ext uri="{FF2B5EF4-FFF2-40B4-BE49-F238E27FC236}">
-                <a16:creationId xmlns:a16="http://schemas.microsoft.com/office/drawing/2014/main" id="{6913D9A4-A535-44A0-99C0-1DC4A8154664}"/>
-              </a:ext>
-            </a:extLst>
-          </p:cNvPr>
-          <p:cNvPicPr>
-            <a:picLocks noChangeAspect="1"/>
-          </p:cNvPicPr>
-          <p:nvPr/>
-        </p:nvPicPr>
-        <p:blipFill>
-          <a:blip r:embed="rId4"/>
-          <a:stretch>
-            <a:fillRect/>
-          </a:stretch>
-        </p:blipFill>
-        <p:spPr>
-          <a:xfrm>
-            <a:off x="4119339" y="1412077"/>
-            <a:ext cx="3728084" cy="1486985"/>
-          </a:xfrm>
-          <a:prstGeom prst="rect">
-            <a:avLst/>
-          </a:prstGeom>
-        </p:spPr>
-      </p:pic>
-      <p:pic>
-        <p:nvPicPr>
-          <p:cNvPr id="5" name="图片 4">
-            <a:extLst>
-              <a:ext uri="{FF2B5EF4-FFF2-40B4-BE49-F238E27FC236}">
-                <a16:creationId xmlns:a16="http://schemas.microsoft.com/office/drawing/2014/main" id="{74B82FB4-97D4-4721-A508-769C2A7E2FCE}"/>
-              </a:ext>
-            </a:extLst>
-          </p:cNvPr>
-          <p:cNvPicPr>
-            <a:picLocks noChangeAspect="1"/>
-          </p:cNvPicPr>
-          <p:nvPr/>
-        </p:nvPicPr>
-        <p:blipFill>
-          <a:blip r:embed="rId5"/>
-          <a:stretch>
-            <a:fillRect/>
-          </a:stretch>
-        </p:blipFill>
-        <p:spPr>
-          <a:xfrm>
-            <a:off x="650240" y="3266629"/>
-            <a:ext cx="4116701" cy="1425011"/>
-          </a:xfrm>
-          <a:prstGeom prst="rect">
-            <a:avLst/>
-          </a:prstGeom>
-        </p:spPr>
-      </p:pic>
-      <p:pic>
-        <p:nvPicPr>
-          <p:cNvPr id="6" name="图片 5">
-            <a:extLst>
-              <a:ext uri="{FF2B5EF4-FFF2-40B4-BE49-F238E27FC236}">
-                <a16:creationId xmlns:a16="http://schemas.microsoft.com/office/drawing/2014/main" id="{A7F00C8F-78C8-4250-88D5-5D97351F16EB}"/>
-              </a:ext>
-            </a:extLst>
-          </p:cNvPr>
-          <p:cNvPicPr>
-            <a:picLocks noChangeAspect="1"/>
-          </p:cNvPicPr>
-          <p:nvPr/>
-        </p:nvPicPr>
-        <p:blipFill>
-          <a:blip r:embed="rId6"/>
-          <a:stretch>
-            <a:fillRect/>
-          </a:stretch>
-        </p:blipFill>
-        <p:spPr>
-          <a:xfrm>
-            <a:off x="5376498" y="3172376"/>
-            <a:ext cx="5900599" cy="1425010"/>
-          </a:xfrm>
-          <a:prstGeom prst="rect">
-            <a:avLst/>
-          </a:prstGeom>
-        </p:spPr>
-      </p:pic>
-      <p:pic>
-        <p:nvPicPr>
-          <p:cNvPr id="7" name="图片 6">
-            <a:extLst>
-              <a:ext uri="{FF2B5EF4-FFF2-40B4-BE49-F238E27FC236}">
-                <a16:creationId xmlns:a16="http://schemas.microsoft.com/office/drawing/2014/main" id="{251E28F5-5166-4504-AF2D-6095D4E08D94}"/>
-              </a:ext>
-            </a:extLst>
-          </p:cNvPr>
-          <p:cNvPicPr>
-            <a:picLocks noChangeAspect="1"/>
-          </p:cNvPicPr>
-          <p:nvPr/>
-        </p:nvPicPr>
-        <p:blipFill>
-          <a:blip r:embed="rId7"/>
-          <a:stretch>
-            <a:fillRect/>
-          </a:stretch>
-        </p:blipFill>
-        <p:spPr>
-          <a:xfrm>
-            <a:off x="650240" y="5062472"/>
-            <a:ext cx="3441136" cy="1425010"/>
-          </a:xfrm>
-          <a:prstGeom prst="rect">
-            <a:avLst/>
-          </a:prstGeom>
-        </p:spPr>
-      </p:pic>
-      <p:sp>
-        <p:nvSpPr>
-          <p:cNvPr id="9" name="文本框 8">
-            <a:extLst>
-              <a:ext uri="{FF2B5EF4-FFF2-40B4-BE49-F238E27FC236}">
-                <a16:creationId xmlns:a16="http://schemas.microsoft.com/office/drawing/2014/main" id="{8F79F9D7-B619-4E66-B6E5-9174630E3410}"/>
-              </a:ext>
-            </a:extLst>
-          </p:cNvPr>
-          <p:cNvSpPr txBox="1"/>
-          <p:nvPr/>
-        </p:nvSpPr>
-        <p:spPr>
-          <a:xfrm>
-            <a:off x="678609" y="301567"/>
-            <a:ext cx="10634659" cy="707886"/>
-          </a:xfrm>
-          <a:prstGeom prst="rect">
-            <a:avLst/>
-          </a:prstGeom>
-          <a:noFill/>
-        </p:spPr>
-        <p:txBody>
-          <a:bodyPr wrap="square" rtlCol="0">
-            <a:spAutoFit/>
-          </a:bodyPr>
-          <a:lstStyle/>
-          <a:p>
-            <a:r>
-              <a:rPr lang="en" altLang="en-US" sz="4000" dirty="0">
-                <a:solidFill>
-                  <a:schemeClr val="bg1"/>
-                </a:solidFill>
-                <a:latin typeface="Aptos Display" panose="020B0004020202020204" pitchFamily="34" charset="0"/>
-                <a:ea typeface="微软雅黑" panose="020B0503020204020204" pitchFamily="34" charset="-122"/>
-                <a:cs typeface="Consolas" panose="020B0609020204030204" pitchFamily="49" charset="0"/>
-              </a:rPr>
-              <a:t>Cloze test</a:t>
-            </a:r>
-          </a:p>
-        </p:txBody>
-      </p:sp>
-      <p:pic>
-        <p:nvPicPr>
-          <p:cNvPr id="12" name="图片 11">
-            <a:extLst>
-              <a:ext uri="{FF2B5EF4-FFF2-40B4-BE49-F238E27FC236}">
-                <a16:creationId xmlns:a16="http://schemas.microsoft.com/office/drawing/2014/main" id="{BD1067E5-148F-F29F-6A48-A2D8F5BF1158}"/>
-              </a:ext>
-            </a:extLst>
-          </p:cNvPr>
-          <p:cNvPicPr>
-            <a:picLocks noChangeAspect="1"/>
-          </p:cNvPicPr>
-          <p:nvPr/>
-        </p:nvPicPr>
-        <p:blipFill>
-          <a:blip r:embed="rId8"/>
-          <a:stretch>
-            <a:fillRect/>
-          </a:stretch>
-        </p:blipFill>
-        <p:spPr>
-          <a:xfrm>
-            <a:off x="5090381" y="5061985"/>
-            <a:ext cx="4880940" cy="1425010"/>
-          </a:xfrm>
-          <a:prstGeom prst="rect">
-            <a:avLst/>
-          </a:prstGeom>
-        </p:spPr>
-      </p:pic>
-      <p:sp>
-        <p:nvSpPr>
-          <p:cNvPr id="8" name="TextBox 7">
-            <a:extLst>
-              <a:ext uri="{FF2B5EF4-FFF2-40B4-BE49-F238E27FC236}">
-                <a16:creationId xmlns:a16="http://schemas.microsoft.com/office/drawing/2014/main" id="{6A298620-4E2E-8218-A298-10581EB62954}"/>
-              </a:ext>
-            </a:extLst>
-          </p:cNvPr>
-          <p:cNvSpPr txBox="1"/>
-          <p:nvPr/>
-        </p:nvSpPr>
-        <p:spPr>
-          <a:xfrm>
-            <a:off x="2137558" y="1412077"/>
-            <a:ext cx="1629407" cy="369332"/>
-          </a:xfrm>
-          <a:prstGeom prst="rect">
-            <a:avLst/>
-          </a:prstGeom>
-          <a:solidFill>
-            <a:schemeClr val="tx1"/>
-          </a:solidFill>
-        </p:spPr>
-        <p:txBody>
-          <a:bodyPr wrap="square" rtlCol="0">
-            <a:spAutoFit/>
-          </a:bodyPr>
-          <a:lstStyle/>
-          <a:p>
-            <a:endParaRPr lang="en-AU" dirty="0"/>
-          </a:p>
-        </p:txBody>
-      </p:sp>
-      <p:sp>
-        <p:nvSpPr>
-          <p:cNvPr id="10" name="TextBox 9">
-            <a:extLst>
-              <a:ext uri="{FF2B5EF4-FFF2-40B4-BE49-F238E27FC236}">
-                <a16:creationId xmlns:a16="http://schemas.microsoft.com/office/drawing/2014/main" id="{B066445C-FA5C-C733-BC91-1A66B4C8AF75}"/>
-              </a:ext>
-            </a:extLst>
-          </p:cNvPr>
-          <p:cNvSpPr txBox="1"/>
-          <p:nvPr/>
-        </p:nvSpPr>
-        <p:spPr>
-          <a:xfrm>
-            <a:off x="2204058" y="2293382"/>
-            <a:ext cx="821775" cy="307777"/>
-          </a:xfrm>
-          <a:prstGeom prst="rect">
-            <a:avLst/>
-          </a:prstGeom>
-          <a:solidFill>
-            <a:schemeClr val="tx1"/>
-          </a:solidFill>
-        </p:spPr>
-        <p:txBody>
-          <a:bodyPr wrap="square" lIns="0" tIns="0" rIns="0" bIns="0" rtlCol="0">
-            <a:spAutoFit/>
-          </a:bodyPr>
-          <a:lstStyle/>
-          <a:p>
-            <a:r>
-              <a:rPr lang="en-US" altLang="zh-CN" sz="2000" dirty="0">
-                <a:solidFill>
-                  <a:schemeClr val="bg1"/>
-                </a:solidFill>
-                <a:latin typeface="Consolas" panose="020B0609020204030204" pitchFamily="49" charset="0"/>
-                <a:cs typeface="Consolas" panose="020B0609020204030204" pitchFamily="49" charset="0"/>
-              </a:rPr>
-              <a:t>pass</a:t>
-            </a:r>
-            <a:endParaRPr lang="en-AU" sz="2000" dirty="0">
-              <a:solidFill>
-                <a:schemeClr val="bg1"/>
-              </a:solidFill>
-              <a:latin typeface="Consolas" panose="020B0609020204030204" pitchFamily="49" charset="0"/>
-              <a:cs typeface="Consolas" panose="020B0609020204030204" pitchFamily="49" charset="0"/>
-            </a:endParaRPr>
-          </a:p>
-        </p:txBody>
-      </p:sp>
-      <p:sp>
-        <p:nvSpPr>
-          <p:cNvPr id="11" name="TextBox 10">
-            <a:extLst>
-              <a:ext uri="{FF2B5EF4-FFF2-40B4-BE49-F238E27FC236}">
-                <a16:creationId xmlns:a16="http://schemas.microsoft.com/office/drawing/2014/main" id="{4EA2476C-D772-81B0-8EB3-59758EAF332B}"/>
-              </a:ext>
-            </a:extLst>
-          </p:cNvPr>
-          <p:cNvSpPr txBox="1"/>
-          <p:nvPr/>
-        </p:nvSpPr>
-        <p:spPr>
-          <a:xfrm>
-            <a:off x="2187433" y="4096052"/>
-            <a:ext cx="2351316" cy="307777"/>
-          </a:xfrm>
-          <a:prstGeom prst="rect">
-            <a:avLst/>
-          </a:prstGeom>
-          <a:solidFill>
-            <a:schemeClr val="tx1"/>
-          </a:solidFill>
-        </p:spPr>
-        <p:txBody>
-          <a:bodyPr wrap="square" lIns="0" tIns="0" rIns="0" bIns="0" rtlCol="0">
-            <a:spAutoFit/>
-          </a:bodyPr>
-          <a:lstStyle/>
-          <a:p>
-            <a:r>
-              <a:rPr lang="en-US" altLang="zh-CN" sz="2000" dirty="0">
-                <a:solidFill>
-                  <a:schemeClr val="bg1"/>
-                </a:solidFill>
-                <a:latin typeface="Consolas" panose="020B0609020204030204" pitchFamily="49" charset="0"/>
-                <a:cs typeface="Consolas" panose="020B0609020204030204" pitchFamily="49" charset="0"/>
-              </a:rPr>
-              <a:t>n</a:t>
-            </a:r>
-            <a:r>
-              <a:rPr lang="zh-CN" altLang="en-US" sz="2000" dirty="0">
-                <a:solidFill>
-                  <a:schemeClr val="bg1"/>
-                </a:solidFill>
-                <a:latin typeface="Consolas" panose="020B0609020204030204" pitchFamily="49" charset="0"/>
-                <a:cs typeface="Consolas" panose="020B0609020204030204" pitchFamily="49" charset="0"/>
-              </a:rPr>
-              <a:t> </a:t>
-            </a:r>
-            <a:r>
-              <a:rPr lang="en-US" altLang="zh-CN" sz="2000" dirty="0">
-                <a:solidFill>
-                  <a:schemeClr val="bg1"/>
-                </a:solidFill>
-                <a:latin typeface="Consolas" panose="020B0609020204030204" pitchFamily="49" charset="0"/>
-                <a:cs typeface="Consolas" panose="020B0609020204030204" pitchFamily="49" charset="0"/>
-              </a:rPr>
-              <a:t>div.</a:t>
-            </a:r>
-            <a:r>
-              <a:rPr lang="zh-CN" altLang="en-US" sz="2000" dirty="0">
-                <a:solidFill>
-                  <a:schemeClr val="bg1"/>
-                </a:solidFill>
-                <a:latin typeface="Consolas" panose="020B0609020204030204" pitchFamily="49" charset="0"/>
-                <a:cs typeface="Consolas" panose="020B0609020204030204" pitchFamily="49" charset="0"/>
-              </a:rPr>
-              <a:t> </a:t>
-            </a:r>
-            <a:r>
-              <a:rPr lang="en-US" altLang="zh-CN" sz="2000" dirty="0">
-                <a:solidFill>
-                  <a:schemeClr val="bg1"/>
-                </a:solidFill>
-                <a:latin typeface="Consolas" panose="020B0609020204030204" pitchFamily="49" charset="0"/>
-                <a:cs typeface="Consolas" panose="020B0609020204030204" pitchFamily="49" charset="0"/>
-              </a:rPr>
-              <a:t>by</a:t>
-            </a:r>
-            <a:r>
-              <a:rPr lang="zh-CN" altLang="en-US" sz="2000" dirty="0">
-                <a:solidFill>
-                  <a:schemeClr val="bg1"/>
-                </a:solidFill>
-                <a:latin typeface="Consolas" panose="020B0609020204030204" pitchFamily="49" charset="0"/>
-                <a:cs typeface="Consolas" panose="020B0609020204030204" pitchFamily="49" charset="0"/>
-              </a:rPr>
-              <a:t> </a:t>
-            </a:r>
-            <a:r>
-              <a:rPr lang="en-US" altLang="zh-CN" sz="2000" dirty="0">
-                <a:solidFill>
-                  <a:schemeClr val="bg1"/>
-                </a:solidFill>
-                <a:latin typeface="Consolas" panose="020B0609020204030204" pitchFamily="49" charset="0"/>
-                <a:cs typeface="Consolas" panose="020B0609020204030204" pitchFamily="49" charset="0"/>
-              </a:rPr>
-              <a:t>3</a:t>
-            </a:r>
-            <a:r>
-              <a:rPr lang="zh-CN" altLang="en-US" sz="2000" dirty="0">
-                <a:solidFill>
-                  <a:schemeClr val="bg1"/>
-                </a:solidFill>
-                <a:latin typeface="Consolas" panose="020B0609020204030204" pitchFamily="49" charset="0"/>
-                <a:cs typeface="Consolas" panose="020B0609020204030204" pitchFamily="49" charset="0"/>
-              </a:rPr>
-              <a:t> </a:t>
-            </a:r>
-            <a:r>
-              <a:rPr lang="en-US" altLang="zh-CN" sz="2000" dirty="0">
-                <a:solidFill>
-                  <a:schemeClr val="bg1"/>
-                </a:solidFill>
-                <a:latin typeface="Consolas" panose="020B0609020204030204" pitchFamily="49" charset="0"/>
-                <a:cs typeface="Consolas" panose="020B0609020204030204" pitchFamily="49" charset="0"/>
-              </a:rPr>
-              <a:t>&amp;</a:t>
-            </a:r>
-            <a:r>
-              <a:rPr lang="zh-CN" altLang="en-US" sz="2000" dirty="0">
-                <a:solidFill>
-                  <a:schemeClr val="bg1"/>
-                </a:solidFill>
-                <a:latin typeface="Consolas" panose="020B0609020204030204" pitchFamily="49" charset="0"/>
-                <a:cs typeface="Consolas" panose="020B0609020204030204" pitchFamily="49" charset="0"/>
-              </a:rPr>
-              <a:t> </a:t>
-            </a:r>
-            <a:r>
-              <a:rPr lang="en-US" altLang="zh-CN" sz="2000" dirty="0">
-                <a:solidFill>
-                  <a:schemeClr val="bg1"/>
-                </a:solidFill>
-                <a:latin typeface="Consolas" panose="020B0609020204030204" pitchFamily="49" charset="0"/>
-                <a:cs typeface="Consolas" panose="020B0609020204030204" pitchFamily="49" charset="0"/>
-              </a:rPr>
-              <a:t>5</a:t>
-            </a:r>
-            <a:endParaRPr lang="en-AU" sz="2000" dirty="0">
-              <a:solidFill>
-                <a:schemeClr val="bg1"/>
-              </a:solidFill>
-              <a:latin typeface="Consolas" panose="020B0609020204030204" pitchFamily="49" charset="0"/>
-              <a:cs typeface="Consolas" panose="020B0609020204030204" pitchFamily="49" charset="0"/>
-            </a:endParaRPr>
-          </a:p>
-        </p:txBody>
-      </p:sp>
-      <p:sp>
-        <p:nvSpPr>
-          <p:cNvPr id="13" name="TextBox 12">
-            <a:extLst>
-              <a:ext uri="{FF2B5EF4-FFF2-40B4-BE49-F238E27FC236}">
-                <a16:creationId xmlns:a16="http://schemas.microsoft.com/office/drawing/2014/main" id="{5255860A-B87C-BAD1-8827-E8DBD81D1C68}"/>
-              </a:ext>
-            </a:extLst>
-          </p:cNvPr>
-          <p:cNvSpPr txBox="1"/>
-          <p:nvPr/>
-        </p:nvSpPr>
-        <p:spPr>
-          <a:xfrm>
-            <a:off x="2137557" y="4971573"/>
-            <a:ext cx="1629407" cy="369332"/>
-          </a:xfrm>
-          <a:prstGeom prst="rect">
-            <a:avLst/>
-          </a:prstGeom>
-          <a:solidFill>
-            <a:schemeClr val="tx1"/>
-          </a:solidFill>
-        </p:spPr>
-        <p:txBody>
-          <a:bodyPr wrap="square" rtlCol="0">
-            <a:spAutoFit/>
-          </a:bodyPr>
-          <a:lstStyle/>
-          <a:p>
-            <a:endParaRPr lang="en-AU" dirty="0"/>
-          </a:p>
-        </p:txBody>
-      </p:sp>
-      <p:sp>
-        <p:nvSpPr>
-          <p:cNvPr id="14" name="TextBox 13">
-            <a:extLst>
-              <a:ext uri="{FF2B5EF4-FFF2-40B4-BE49-F238E27FC236}">
-                <a16:creationId xmlns:a16="http://schemas.microsoft.com/office/drawing/2014/main" id="{34656719-9FAA-DFBF-EDF5-3061740434A4}"/>
-              </a:ext>
-            </a:extLst>
-          </p:cNvPr>
-          <p:cNvSpPr txBox="1"/>
-          <p:nvPr/>
-        </p:nvSpPr>
-        <p:spPr>
-          <a:xfrm>
-            <a:off x="2204059" y="5916485"/>
-            <a:ext cx="1629407" cy="261610"/>
-          </a:xfrm>
-          <a:prstGeom prst="rect">
-            <a:avLst/>
-          </a:prstGeom>
-          <a:solidFill>
-            <a:schemeClr val="tx1"/>
-          </a:solidFill>
-        </p:spPr>
-        <p:txBody>
-          <a:bodyPr wrap="square" lIns="0" tIns="0" rIns="0" bIns="0" rtlCol="0">
-            <a:spAutoFit/>
-          </a:bodyPr>
-          <a:lstStyle/>
-          <a:p>
-            <a:r>
-              <a:rPr lang="en-US" altLang="zh-CN" sz="1700" dirty="0">
-                <a:solidFill>
-                  <a:schemeClr val="bg1"/>
-                </a:solidFill>
-                <a:latin typeface="Consolas" panose="020B0609020204030204" pitchFamily="49" charset="0"/>
-                <a:cs typeface="Consolas" panose="020B0609020204030204" pitchFamily="49" charset="0"/>
-              </a:rPr>
-              <a:t>born</a:t>
-            </a:r>
-            <a:r>
-              <a:rPr lang="zh-CN" altLang="en-US" sz="1700" dirty="0">
-                <a:solidFill>
-                  <a:schemeClr val="bg1"/>
-                </a:solidFill>
-                <a:latin typeface="Consolas" panose="020B0609020204030204" pitchFamily="49" charset="0"/>
-                <a:cs typeface="Consolas" panose="020B0609020204030204" pitchFamily="49" charset="0"/>
-              </a:rPr>
-              <a:t> </a:t>
-            </a:r>
-            <a:r>
-              <a:rPr lang="en-US" altLang="zh-CN" sz="1700" dirty="0">
-                <a:solidFill>
-                  <a:schemeClr val="bg1"/>
-                </a:solidFill>
-                <a:latin typeface="Consolas" panose="020B0609020204030204" pitchFamily="49" charset="0"/>
-                <a:cs typeface="Consolas" panose="020B0609020204030204" pitchFamily="49" charset="0"/>
-              </a:rPr>
-              <a:t>2nd</a:t>
-            </a:r>
-            <a:r>
-              <a:rPr lang="zh-CN" altLang="en-US" sz="1700" dirty="0">
-                <a:solidFill>
-                  <a:schemeClr val="bg1"/>
-                </a:solidFill>
-                <a:latin typeface="Consolas" panose="020B0609020204030204" pitchFamily="49" charset="0"/>
-                <a:cs typeface="Consolas" panose="020B0609020204030204" pitchFamily="49" charset="0"/>
-              </a:rPr>
-              <a:t> </a:t>
-            </a:r>
-            <a:r>
-              <a:rPr lang="en-US" altLang="zh-CN" sz="1700" dirty="0">
-                <a:solidFill>
-                  <a:schemeClr val="bg1"/>
-                </a:solidFill>
-                <a:latin typeface="Consolas" panose="020B0609020204030204" pitchFamily="49" charset="0"/>
-                <a:cs typeface="Consolas" panose="020B0609020204030204" pitchFamily="49" charset="0"/>
-              </a:rPr>
-              <a:t>half</a:t>
-            </a:r>
-            <a:endParaRPr lang="en-AU" sz="1700" dirty="0">
-              <a:solidFill>
-                <a:schemeClr val="bg1"/>
-              </a:solidFill>
-              <a:latin typeface="Consolas" panose="020B0609020204030204" pitchFamily="49" charset="0"/>
-              <a:cs typeface="Consolas" panose="020B0609020204030204" pitchFamily="49" charset="0"/>
-            </a:endParaRPr>
-          </a:p>
-        </p:txBody>
-      </p:sp>
-      <p:sp>
-        <p:nvSpPr>
-          <p:cNvPr id="15" name="TextBox 14">
-            <a:extLst>
-              <a:ext uri="{FF2B5EF4-FFF2-40B4-BE49-F238E27FC236}">
-                <a16:creationId xmlns:a16="http://schemas.microsoft.com/office/drawing/2014/main" id="{A4CA3674-B42E-C9F3-FBCC-DBE9C0193F64}"/>
-              </a:ext>
-            </a:extLst>
-          </p:cNvPr>
-          <p:cNvSpPr txBox="1"/>
-          <p:nvPr/>
-        </p:nvSpPr>
-        <p:spPr>
-          <a:xfrm>
-            <a:off x="5666292" y="2293382"/>
-            <a:ext cx="1914915" cy="307777"/>
-          </a:xfrm>
-          <a:prstGeom prst="rect">
-            <a:avLst/>
-          </a:prstGeom>
-          <a:solidFill>
-            <a:schemeClr val="tx1"/>
-          </a:solidFill>
-        </p:spPr>
-        <p:txBody>
-          <a:bodyPr wrap="square" lIns="0" tIns="0" rIns="0" bIns="0" rtlCol="0">
-            <a:spAutoFit/>
-          </a:bodyPr>
-          <a:lstStyle/>
-          <a:p>
-            <a:r>
-              <a:rPr lang="en-US" altLang="zh-CN" sz="2000" dirty="0">
-                <a:solidFill>
-                  <a:schemeClr val="bg1"/>
-                </a:solidFill>
-                <a:latin typeface="Consolas" panose="020B0609020204030204" pitchFamily="49" charset="0"/>
-                <a:cs typeface="Consolas" panose="020B0609020204030204" pitchFamily="49" charset="0"/>
-              </a:rPr>
-              <a:t>cannot</a:t>
-            </a:r>
-            <a:r>
-              <a:rPr lang="zh-CN" altLang="en-US" sz="2000" dirty="0">
-                <a:solidFill>
-                  <a:schemeClr val="bg1"/>
-                </a:solidFill>
-                <a:latin typeface="Consolas" panose="020B0609020204030204" pitchFamily="49" charset="0"/>
-                <a:cs typeface="Consolas" panose="020B0609020204030204" pitchFamily="49" charset="0"/>
-              </a:rPr>
-              <a:t> </a:t>
-            </a:r>
-            <a:r>
-              <a:rPr lang="en-US" altLang="zh-CN" sz="2000" dirty="0">
-                <a:solidFill>
-                  <a:schemeClr val="bg1"/>
-                </a:solidFill>
-                <a:latin typeface="Consolas" panose="020B0609020204030204" pitchFamily="49" charset="0"/>
-                <a:cs typeface="Consolas" panose="020B0609020204030204" pitchFamily="49" charset="0"/>
-              </a:rPr>
-              <a:t>afford</a:t>
-            </a:r>
-            <a:endParaRPr lang="en-AU" sz="2000" dirty="0">
-              <a:solidFill>
-                <a:schemeClr val="bg1"/>
-              </a:solidFill>
-              <a:latin typeface="Consolas" panose="020B0609020204030204" pitchFamily="49" charset="0"/>
-              <a:cs typeface="Consolas" panose="020B0609020204030204" pitchFamily="49" charset="0"/>
-            </a:endParaRPr>
-          </a:p>
-        </p:txBody>
-      </p:sp>
-      <p:sp>
-        <p:nvSpPr>
-          <p:cNvPr id="16" name="TextBox 15">
-            <a:extLst>
-              <a:ext uri="{FF2B5EF4-FFF2-40B4-BE49-F238E27FC236}">
-                <a16:creationId xmlns:a16="http://schemas.microsoft.com/office/drawing/2014/main" id="{1A09784D-7600-96B1-F4A1-881C7F6FD7C4}"/>
-              </a:ext>
-            </a:extLst>
-          </p:cNvPr>
-          <p:cNvSpPr txBox="1"/>
-          <p:nvPr/>
-        </p:nvSpPr>
-        <p:spPr>
-          <a:xfrm>
-            <a:off x="6799755" y="3081963"/>
-            <a:ext cx="1629407" cy="369332"/>
-          </a:xfrm>
-          <a:prstGeom prst="rect">
-            <a:avLst/>
-          </a:prstGeom>
-          <a:solidFill>
-            <a:schemeClr val="tx1"/>
-          </a:solidFill>
-        </p:spPr>
-        <p:txBody>
-          <a:bodyPr wrap="square" rtlCol="0">
-            <a:spAutoFit/>
-          </a:bodyPr>
-          <a:lstStyle/>
-          <a:p>
-            <a:endParaRPr lang="en-AU" dirty="0"/>
-          </a:p>
-        </p:txBody>
-      </p:sp>
-      <p:sp>
-        <p:nvSpPr>
-          <p:cNvPr id="17" name="TextBox 16">
-            <a:extLst>
-              <a:ext uri="{FF2B5EF4-FFF2-40B4-BE49-F238E27FC236}">
-                <a16:creationId xmlns:a16="http://schemas.microsoft.com/office/drawing/2014/main" id="{4E573BAF-EE8A-3381-15BC-B0316416D25A}"/>
-              </a:ext>
-            </a:extLst>
-          </p:cNvPr>
-          <p:cNvSpPr txBox="1"/>
-          <p:nvPr/>
-        </p:nvSpPr>
-        <p:spPr>
-          <a:xfrm>
-            <a:off x="6898276" y="4018578"/>
-            <a:ext cx="4141025" cy="276999"/>
-          </a:xfrm>
-          <a:prstGeom prst="rect">
-            <a:avLst/>
-          </a:prstGeom>
-          <a:solidFill>
-            <a:schemeClr val="tx1"/>
-          </a:solidFill>
-        </p:spPr>
-        <p:txBody>
-          <a:bodyPr wrap="square" lIns="0" tIns="0" rIns="0" bIns="0" rtlCol="0">
-            <a:spAutoFit/>
-          </a:bodyPr>
-          <a:lstStyle/>
-          <a:p>
-            <a:r>
-              <a:rPr lang="en-US" altLang="zh-CN" dirty="0">
-                <a:solidFill>
-                  <a:schemeClr val="bg1"/>
-                </a:solidFill>
-                <a:latin typeface="Consolas" panose="020B0609020204030204" pitchFamily="49" charset="0"/>
-                <a:cs typeface="Consolas" panose="020B0609020204030204" pitchFamily="49" charset="0"/>
-              </a:rPr>
-              <a:t>90:</a:t>
-            </a:r>
-            <a:r>
-              <a:rPr lang="zh-CN" altLang="en-US" dirty="0">
-                <a:solidFill>
-                  <a:schemeClr val="bg1"/>
-                </a:solidFill>
-                <a:latin typeface="Consolas" panose="020B0609020204030204" pitchFamily="49" charset="0"/>
-                <a:cs typeface="Consolas" panose="020B0609020204030204" pitchFamily="49" charset="0"/>
-              </a:rPr>
-              <a:t> </a:t>
-            </a:r>
-            <a:r>
-              <a:rPr lang="en-US" altLang="zh-CN" dirty="0">
-                <a:solidFill>
-                  <a:schemeClr val="bg1"/>
-                </a:solidFill>
-                <a:latin typeface="Consolas" panose="020B0609020204030204" pitchFamily="49" charset="0"/>
-                <a:cs typeface="Consolas" panose="020B0609020204030204" pitchFamily="49" charset="0"/>
-              </a:rPr>
-              <a:t>B,</a:t>
-            </a:r>
-            <a:r>
-              <a:rPr lang="zh-CN" altLang="en-US" dirty="0">
-                <a:solidFill>
-                  <a:schemeClr val="bg1"/>
-                </a:solidFill>
-                <a:latin typeface="Consolas" panose="020B0609020204030204" pitchFamily="49" charset="0"/>
-                <a:cs typeface="Consolas" panose="020B0609020204030204" pitchFamily="49" charset="0"/>
-              </a:rPr>
-              <a:t> </a:t>
-            </a:r>
-            <a:r>
-              <a:rPr lang="en-US" altLang="zh-CN" dirty="0">
-                <a:solidFill>
-                  <a:schemeClr val="bg1"/>
-                </a:solidFill>
-                <a:latin typeface="Consolas" panose="020B0609020204030204" pitchFamily="49" charset="0"/>
-                <a:cs typeface="Consolas" panose="020B0609020204030204" pitchFamily="49" charset="0"/>
-              </a:rPr>
-              <a:t>98:</a:t>
-            </a:r>
-            <a:r>
-              <a:rPr lang="zh-CN" altLang="en-US" dirty="0">
-                <a:solidFill>
-                  <a:schemeClr val="bg1"/>
-                </a:solidFill>
-                <a:latin typeface="Consolas" panose="020B0609020204030204" pitchFamily="49" charset="0"/>
-                <a:cs typeface="Consolas" panose="020B0609020204030204" pitchFamily="49" charset="0"/>
-              </a:rPr>
-              <a:t> </a:t>
-            </a:r>
-            <a:r>
-              <a:rPr lang="en-US" altLang="zh-CN" dirty="0">
-                <a:solidFill>
-                  <a:schemeClr val="bg1"/>
-                </a:solidFill>
-                <a:latin typeface="Consolas" panose="020B0609020204030204" pitchFamily="49" charset="0"/>
-                <a:cs typeface="Consolas" panose="020B0609020204030204" pitchFamily="49" charset="0"/>
-              </a:rPr>
-              <a:t>A.</a:t>
-            </a:r>
-            <a:r>
-              <a:rPr lang="zh-CN" altLang="en-US" dirty="0">
-                <a:solidFill>
-                  <a:schemeClr val="bg1"/>
-                </a:solidFill>
-                <a:latin typeface="Consolas" panose="020B0609020204030204" pitchFamily="49" charset="0"/>
-                <a:cs typeface="Consolas" panose="020B0609020204030204" pitchFamily="49" charset="0"/>
-              </a:rPr>
-              <a:t> </a:t>
-            </a:r>
-            <a:r>
-              <a:rPr lang="en-US" altLang="zh-CN" dirty="0">
-                <a:solidFill>
-                  <a:schemeClr val="bg1"/>
-                </a:solidFill>
-                <a:latin typeface="Consolas" panose="020B0609020204030204" pitchFamily="49" charset="0"/>
-                <a:cs typeface="Consolas" panose="020B0609020204030204" pitchFamily="49" charset="0"/>
-              </a:rPr>
-              <a:t>You</a:t>
-            </a:r>
-            <a:r>
-              <a:rPr lang="zh-CN" altLang="en-US" dirty="0">
-                <a:solidFill>
-                  <a:schemeClr val="bg1"/>
-                </a:solidFill>
-                <a:latin typeface="Consolas" panose="020B0609020204030204" pitchFamily="49" charset="0"/>
-                <a:cs typeface="Consolas" panose="020B0609020204030204" pitchFamily="49" charset="0"/>
-              </a:rPr>
-              <a:t> </a:t>
-            </a:r>
-            <a:r>
-              <a:rPr lang="en-US" altLang="zh-CN" dirty="0">
-                <a:solidFill>
-                  <a:schemeClr val="bg1"/>
-                </a:solidFill>
-                <a:latin typeface="Consolas" panose="020B0609020204030204" pitchFamily="49" charset="0"/>
-                <a:cs typeface="Consolas" panose="020B0609020204030204" pitchFamily="49" charset="0"/>
-              </a:rPr>
-              <a:t>only</a:t>
-            </a:r>
-            <a:r>
-              <a:rPr lang="zh-CN" altLang="en-US" dirty="0">
-                <a:solidFill>
-                  <a:schemeClr val="bg1"/>
-                </a:solidFill>
-                <a:latin typeface="Consolas" panose="020B0609020204030204" pitchFamily="49" charset="0"/>
-                <a:cs typeface="Consolas" panose="020B0609020204030204" pitchFamily="49" charset="0"/>
-              </a:rPr>
-              <a:t> </a:t>
-            </a:r>
-            <a:r>
-              <a:rPr lang="en-US" altLang="zh-CN" dirty="0">
-                <a:solidFill>
-                  <a:schemeClr val="bg1"/>
-                </a:solidFill>
-                <a:latin typeface="Consolas" panose="020B0609020204030204" pitchFamily="49" charset="0"/>
-                <a:cs typeface="Consolas" panose="020B0609020204030204" pitchFamily="49" charset="0"/>
-              </a:rPr>
-              <a:t>got</a:t>
-            </a:r>
-            <a:r>
-              <a:rPr lang="zh-CN" altLang="en-US" dirty="0">
-                <a:solidFill>
-                  <a:schemeClr val="bg1"/>
-                </a:solidFill>
-                <a:latin typeface="Consolas" panose="020B0609020204030204" pitchFamily="49" charset="0"/>
-                <a:cs typeface="Consolas" panose="020B0609020204030204" pitchFamily="49" charset="0"/>
-              </a:rPr>
-              <a:t> </a:t>
-            </a:r>
-            <a:r>
-              <a:rPr lang="en-US" altLang="zh-CN" dirty="0">
-                <a:solidFill>
-                  <a:schemeClr val="bg1"/>
-                </a:solidFill>
-                <a:latin typeface="Consolas" panose="020B0609020204030204" pitchFamily="49" charset="0"/>
-                <a:cs typeface="Consolas" panose="020B0609020204030204" pitchFamily="49" charset="0"/>
-              </a:rPr>
-              <a:t>B.</a:t>
-            </a:r>
-            <a:endParaRPr lang="en-AU" dirty="0">
-              <a:solidFill>
-                <a:schemeClr val="bg1"/>
-              </a:solidFill>
-              <a:latin typeface="Consolas" panose="020B0609020204030204" pitchFamily="49" charset="0"/>
-              <a:cs typeface="Consolas" panose="020B0609020204030204" pitchFamily="49" charset="0"/>
-            </a:endParaRPr>
-          </a:p>
-        </p:txBody>
-      </p:sp>
-      <p:sp>
-        <p:nvSpPr>
-          <p:cNvPr id="18" name="TextBox 17">
-            <a:extLst>
-              <a:ext uri="{FF2B5EF4-FFF2-40B4-BE49-F238E27FC236}">
-                <a16:creationId xmlns:a16="http://schemas.microsoft.com/office/drawing/2014/main" id="{84B30268-5DC5-499A-CA73-2ADD1C8A22E7}"/>
-              </a:ext>
-            </a:extLst>
-          </p:cNvPr>
-          <p:cNvSpPr txBox="1"/>
-          <p:nvPr/>
-        </p:nvSpPr>
-        <p:spPr>
-          <a:xfrm>
-            <a:off x="9731476" y="2287610"/>
-            <a:ext cx="1386000" cy="261610"/>
-          </a:xfrm>
-          <a:prstGeom prst="rect">
-            <a:avLst/>
-          </a:prstGeom>
-          <a:solidFill>
-            <a:schemeClr val="tx1"/>
-          </a:solidFill>
-        </p:spPr>
-        <p:txBody>
-          <a:bodyPr wrap="square" lIns="0" tIns="0" rIns="0" bIns="0" rtlCol="0">
-            <a:spAutoFit/>
-          </a:bodyPr>
-          <a:lstStyle/>
-          <a:p>
-            <a:r>
-              <a:rPr lang="en-US" altLang="zh-CN" sz="1700" dirty="0">
-                <a:solidFill>
-                  <a:schemeClr val="bg1"/>
-                </a:solidFill>
-                <a:latin typeface="Consolas" panose="020B0609020204030204" pitchFamily="49" charset="0"/>
-                <a:cs typeface="Consolas" panose="020B0609020204030204" pitchFamily="49" charset="0"/>
-              </a:rPr>
-              <a:t>n</a:t>
-            </a:r>
-            <a:r>
-              <a:rPr lang="zh-CN" altLang="en-US" sz="1700" dirty="0">
-                <a:solidFill>
-                  <a:schemeClr val="bg1"/>
-                </a:solidFill>
-                <a:latin typeface="Consolas" panose="020B0609020204030204" pitchFamily="49" charset="0"/>
-                <a:cs typeface="Consolas" panose="020B0609020204030204" pitchFamily="49" charset="0"/>
-              </a:rPr>
-              <a:t> </a:t>
-            </a:r>
-            <a:r>
-              <a:rPr lang="en-US" altLang="zh-CN" sz="1700" dirty="0">
-                <a:solidFill>
-                  <a:schemeClr val="bg1"/>
-                </a:solidFill>
-                <a:latin typeface="Consolas" panose="020B0609020204030204" pitchFamily="49" charset="0"/>
-                <a:cs typeface="Consolas" panose="020B0609020204030204" pitchFamily="49" charset="0"/>
-              </a:rPr>
-              <a:t>div.</a:t>
-            </a:r>
-            <a:r>
-              <a:rPr lang="zh-CN" altLang="en-US" sz="1700" dirty="0">
-                <a:solidFill>
-                  <a:schemeClr val="bg1"/>
-                </a:solidFill>
-                <a:latin typeface="Consolas" panose="020B0609020204030204" pitchFamily="49" charset="0"/>
-                <a:cs typeface="Consolas" panose="020B0609020204030204" pitchFamily="49" charset="0"/>
-              </a:rPr>
-              <a:t> </a:t>
-            </a:r>
-            <a:r>
-              <a:rPr lang="en-US" altLang="zh-CN" sz="1700" dirty="0">
-                <a:solidFill>
-                  <a:schemeClr val="bg1"/>
-                </a:solidFill>
-                <a:latin typeface="Consolas" panose="020B0609020204030204" pitchFamily="49" charset="0"/>
-                <a:cs typeface="Consolas" panose="020B0609020204030204" pitchFamily="49" charset="0"/>
-              </a:rPr>
-              <a:t>by</a:t>
-            </a:r>
-            <a:r>
-              <a:rPr lang="zh-CN" altLang="en-US" sz="1700" dirty="0">
-                <a:solidFill>
-                  <a:schemeClr val="bg1"/>
-                </a:solidFill>
-                <a:latin typeface="Consolas" panose="020B0609020204030204" pitchFamily="49" charset="0"/>
-                <a:cs typeface="Consolas" panose="020B0609020204030204" pitchFamily="49" charset="0"/>
-              </a:rPr>
-              <a:t> </a:t>
-            </a:r>
-            <a:r>
-              <a:rPr lang="en-US" altLang="zh-CN" sz="1700" dirty="0">
-                <a:solidFill>
-                  <a:schemeClr val="bg1"/>
-                </a:solidFill>
-                <a:latin typeface="Consolas" panose="020B0609020204030204" pitchFamily="49" charset="0"/>
-                <a:cs typeface="Consolas" panose="020B0609020204030204" pitchFamily="49" charset="0"/>
-              </a:rPr>
-              <a:t>3</a:t>
-            </a:r>
-            <a:endParaRPr lang="en-AU" sz="1700" dirty="0">
-              <a:solidFill>
-                <a:schemeClr val="bg1"/>
-              </a:solidFill>
-              <a:latin typeface="Consolas" panose="020B0609020204030204" pitchFamily="49" charset="0"/>
-              <a:cs typeface="Consolas" panose="020B0609020204030204" pitchFamily="49" charset="0"/>
-            </a:endParaRPr>
-          </a:p>
-        </p:txBody>
-      </p:sp>
-      <p:sp>
-        <p:nvSpPr>
-          <p:cNvPr id="19" name="TextBox 18">
-            <a:extLst>
-              <a:ext uri="{FF2B5EF4-FFF2-40B4-BE49-F238E27FC236}">
-                <a16:creationId xmlns:a16="http://schemas.microsoft.com/office/drawing/2014/main" id="{D9411841-FCE8-F794-4D29-BC05185EB288}"/>
-              </a:ext>
-            </a:extLst>
-          </p:cNvPr>
-          <p:cNvSpPr txBox="1"/>
-          <p:nvPr/>
-        </p:nvSpPr>
-        <p:spPr>
-          <a:xfrm>
-            <a:off x="6573874" y="5916486"/>
-            <a:ext cx="3150000" cy="246221"/>
-          </a:xfrm>
-          <a:prstGeom prst="rect">
-            <a:avLst/>
-          </a:prstGeom>
-          <a:solidFill>
-            <a:schemeClr val="tx1"/>
-          </a:solidFill>
-        </p:spPr>
-        <p:txBody>
-          <a:bodyPr wrap="square" lIns="0" tIns="0" rIns="0" bIns="0" rtlCol="0">
-            <a:spAutoFit/>
-          </a:bodyPr>
-          <a:lstStyle/>
-          <a:p>
-            <a:r>
-              <a:rPr lang="en-US" altLang="zh-CN" sz="1600" dirty="0">
-                <a:solidFill>
-                  <a:schemeClr val="bg1"/>
-                </a:solidFill>
-                <a:latin typeface="Consolas" panose="020B0609020204030204" pitchFamily="49" charset="0"/>
-                <a:cs typeface="Consolas" panose="020B0609020204030204" pitchFamily="49" charset="0"/>
-              </a:rPr>
-              <a:t>n</a:t>
-            </a:r>
-            <a:r>
-              <a:rPr lang="zh-CN" altLang="en-US" sz="1600" dirty="0">
-                <a:solidFill>
-                  <a:schemeClr val="bg1"/>
-                </a:solidFill>
-                <a:latin typeface="Consolas" panose="020B0609020204030204" pitchFamily="49" charset="0"/>
-                <a:cs typeface="Consolas" panose="020B0609020204030204" pitchFamily="49" charset="0"/>
-              </a:rPr>
-              <a:t> </a:t>
-            </a:r>
-            <a:r>
-              <a:rPr lang="en-US" altLang="zh-CN" sz="1600" dirty="0">
-                <a:solidFill>
-                  <a:schemeClr val="bg1"/>
-                </a:solidFill>
-                <a:latin typeface="Consolas" panose="020B0609020204030204" pitchFamily="49" charset="0"/>
-                <a:cs typeface="Consolas" panose="020B0609020204030204" pitchFamily="49" charset="0"/>
-              </a:rPr>
-              <a:t>div.</a:t>
-            </a:r>
-            <a:r>
-              <a:rPr lang="zh-CN" altLang="en-US" sz="1600" dirty="0">
-                <a:solidFill>
-                  <a:schemeClr val="bg1"/>
-                </a:solidFill>
-                <a:latin typeface="Consolas" panose="020B0609020204030204" pitchFamily="49" charset="0"/>
-                <a:cs typeface="Consolas" panose="020B0609020204030204" pitchFamily="49" charset="0"/>
-              </a:rPr>
-              <a:t> </a:t>
-            </a:r>
-            <a:r>
-              <a:rPr lang="en-US" altLang="zh-CN" sz="1600" dirty="0">
-                <a:solidFill>
-                  <a:schemeClr val="bg1"/>
-                </a:solidFill>
-                <a:latin typeface="Consolas" panose="020B0609020204030204" pitchFamily="49" charset="0"/>
-                <a:cs typeface="Consolas" panose="020B0609020204030204" pitchFamily="49" charset="0"/>
-              </a:rPr>
-              <a:t>only</a:t>
-            </a:r>
-            <a:r>
-              <a:rPr lang="zh-CN" altLang="en-US" sz="1600" dirty="0">
-                <a:solidFill>
-                  <a:schemeClr val="bg1"/>
-                </a:solidFill>
-                <a:latin typeface="Consolas" panose="020B0609020204030204" pitchFamily="49" charset="0"/>
-                <a:cs typeface="Consolas" panose="020B0609020204030204" pitchFamily="49" charset="0"/>
-              </a:rPr>
-              <a:t> </a:t>
-            </a:r>
-            <a:r>
-              <a:rPr lang="en-US" altLang="zh-CN" sz="1600" dirty="0">
-                <a:solidFill>
-                  <a:schemeClr val="bg1"/>
-                </a:solidFill>
-                <a:latin typeface="Consolas" panose="020B0609020204030204" pitchFamily="49" charset="0"/>
-                <a:cs typeface="Consolas" panose="020B0609020204030204" pitchFamily="49" charset="0"/>
-              </a:rPr>
-              <a:t>by</a:t>
-            </a:r>
-            <a:r>
-              <a:rPr lang="zh-CN" altLang="en-US" sz="1600" dirty="0">
-                <a:solidFill>
-                  <a:schemeClr val="bg1"/>
-                </a:solidFill>
-                <a:latin typeface="Consolas" panose="020B0609020204030204" pitchFamily="49" charset="0"/>
-                <a:cs typeface="Consolas" panose="020B0609020204030204" pitchFamily="49" charset="0"/>
-              </a:rPr>
-              <a:t> </a:t>
-            </a:r>
-            <a:r>
-              <a:rPr lang="en-US" altLang="zh-CN" sz="1600" dirty="0">
-                <a:solidFill>
-                  <a:schemeClr val="bg1"/>
-                </a:solidFill>
-                <a:latin typeface="Consolas" panose="020B0609020204030204" pitchFamily="49" charset="0"/>
-                <a:cs typeface="Consolas" panose="020B0609020204030204" pitchFamily="49" charset="0"/>
-              </a:rPr>
-              <a:t>one</a:t>
-            </a:r>
-            <a:r>
-              <a:rPr lang="zh-CN" altLang="en-US" sz="1600" dirty="0">
-                <a:solidFill>
-                  <a:schemeClr val="bg1"/>
-                </a:solidFill>
-                <a:latin typeface="Consolas" panose="020B0609020204030204" pitchFamily="49" charset="0"/>
-                <a:cs typeface="Consolas" panose="020B0609020204030204" pitchFamily="49" charset="0"/>
-              </a:rPr>
-              <a:t> </a:t>
-            </a:r>
-            <a:r>
-              <a:rPr lang="en-US" altLang="zh-CN" sz="1600" dirty="0">
-                <a:solidFill>
-                  <a:schemeClr val="bg1"/>
-                </a:solidFill>
-                <a:latin typeface="Consolas" panose="020B0609020204030204" pitchFamily="49" charset="0"/>
-                <a:cs typeface="Consolas" panose="020B0609020204030204" pitchFamily="49" charset="0"/>
-              </a:rPr>
-              <a:t>of</a:t>
-            </a:r>
-            <a:r>
-              <a:rPr lang="zh-CN" altLang="en-US" sz="1600" dirty="0">
-                <a:solidFill>
-                  <a:schemeClr val="bg1"/>
-                </a:solidFill>
-                <a:latin typeface="Consolas" panose="020B0609020204030204" pitchFamily="49" charset="0"/>
-                <a:cs typeface="Consolas" panose="020B0609020204030204" pitchFamily="49" charset="0"/>
-              </a:rPr>
-              <a:t> </a:t>
-            </a:r>
-            <a:r>
-              <a:rPr lang="en-US" altLang="zh-CN" sz="1600" dirty="0">
-                <a:solidFill>
-                  <a:schemeClr val="bg1"/>
-                </a:solidFill>
-                <a:latin typeface="Consolas" panose="020B0609020204030204" pitchFamily="49" charset="0"/>
-                <a:cs typeface="Consolas" panose="020B0609020204030204" pitchFamily="49" charset="0"/>
-              </a:rPr>
-              <a:t>3</a:t>
-            </a:r>
-            <a:r>
-              <a:rPr lang="zh-CN" altLang="en-US" sz="1600" dirty="0">
-                <a:solidFill>
-                  <a:schemeClr val="bg1"/>
-                </a:solidFill>
-                <a:latin typeface="Consolas" panose="020B0609020204030204" pitchFamily="49" charset="0"/>
-                <a:cs typeface="Consolas" panose="020B0609020204030204" pitchFamily="49" charset="0"/>
-              </a:rPr>
-              <a:t> </a:t>
-            </a:r>
-            <a:r>
-              <a:rPr lang="en-US" altLang="zh-CN" sz="1600" dirty="0">
-                <a:solidFill>
-                  <a:schemeClr val="bg1"/>
-                </a:solidFill>
-                <a:latin typeface="Consolas" panose="020B0609020204030204" pitchFamily="49" charset="0"/>
-                <a:cs typeface="Consolas" panose="020B0609020204030204" pitchFamily="49" charset="0"/>
-              </a:rPr>
-              <a:t>or</a:t>
-            </a:r>
-            <a:r>
-              <a:rPr lang="zh-CN" altLang="en-US" sz="1600" dirty="0">
-                <a:solidFill>
-                  <a:schemeClr val="bg1"/>
-                </a:solidFill>
-                <a:latin typeface="Consolas" panose="020B0609020204030204" pitchFamily="49" charset="0"/>
-                <a:cs typeface="Consolas" panose="020B0609020204030204" pitchFamily="49" charset="0"/>
-              </a:rPr>
-              <a:t> </a:t>
-            </a:r>
-            <a:r>
-              <a:rPr lang="en-US" altLang="zh-CN" sz="1600" dirty="0">
-                <a:solidFill>
-                  <a:schemeClr val="bg1"/>
-                </a:solidFill>
-                <a:latin typeface="Consolas" panose="020B0609020204030204" pitchFamily="49" charset="0"/>
-                <a:cs typeface="Consolas" panose="020B0609020204030204" pitchFamily="49" charset="0"/>
-              </a:rPr>
-              <a:t>5</a:t>
-            </a:r>
-            <a:endParaRPr lang="en-AU" sz="1600" dirty="0">
-              <a:solidFill>
-                <a:schemeClr val="bg1"/>
-              </a:solidFill>
-              <a:latin typeface="Consolas" panose="020B0609020204030204" pitchFamily="49" charset="0"/>
-              <a:cs typeface="Consolas" panose="020B0609020204030204" pitchFamily="49" charset="0"/>
-            </a:endParaRPr>
-          </a:p>
-        </p:txBody>
-      </p:sp>
-    </p:spTree>
-    <p:extLst>
-      <p:ext uri="{BB962C8B-B14F-4D97-AF65-F5344CB8AC3E}">
-        <p14:creationId xmlns:p14="http://schemas.microsoft.com/office/powerpoint/2010/main" val="3967702150"/>
-      </p:ext>
-    </p:extLst>
-  </p:cSld>
-  <p:clrMapOvr>
-    <a:masterClrMapping/>
-  </p:clrMapOvr>
-  <p:timing>
-    <p:tnLst>
-      <p:par>
-        <p:cTn id="1" dur="indefinite" restart="never" nodeType="tmRoot">
-          <p:childTnLst>
-            <p:seq concurrent="1" nextAc="seek">
-              <p:cTn id="2" dur="indefinite" nodeType="mainSeq">
-                <p:childTnLst>
-                  <p:par>
-                    <p:cTn id="3" fill="hold">
-                      <p:stCondLst>
-                        <p:cond delay="indefinite"/>
-                      </p:stCondLst>
-                      <p:childTnLst>
-                        <p:par>
-                          <p:cTn id="4" fill="hold">
-                            <p:stCondLst>
-                              <p:cond delay="0"/>
-                            </p:stCondLst>
-                            <p:childTnLst>
-                              <p:par>
-                                <p:cTn id="5" presetID="1" presetClass="entr" presetSubtype="0" fill="hold" nodeType="clickEffect">
-                                  <p:stCondLst>
-                                    <p:cond delay="0"/>
-                                  </p:stCondLst>
-                                  <p:childTnLst>
-                                    <p:set>
-                                      <p:cBhvr>
-                                        <p:cTn id="6" dur="1" fill="hold">
-                                          <p:stCondLst>
-                                            <p:cond delay="0"/>
-                                          </p:stCondLst>
-                                        </p:cTn>
-                                        <p:tgtEl>
-                                          <p:spTgt spid="2"/>
-                                        </p:tgtEl>
-                                        <p:attrNameLst>
-                                          <p:attrName>style.visibility</p:attrName>
-                                        </p:attrNameLst>
-                                      </p:cBhvr>
-                                      <p:to>
-                                        <p:strVal val="visible"/>
-                                      </p:to>
-                                    </p:set>
-                                  </p:childTnLst>
-                                </p:cTn>
-                              </p:par>
-                            </p:childTnLst>
-                          </p:cTn>
-                        </p:par>
-                      </p:childTnLst>
-                    </p:cTn>
-                  </p:par>
-                  <p:par>
-                    <p:cTn id="7" fill="hold">
-                      <p:stCondLst>
-                        <p:cond delay="indefinite"/>
-                      </p:stCondLst>
-                      <p:childTnLst>
-                        <p:par>
-                          <p:cTn id="8" fill="hold">
-                            <p:stCondLst>
-                              <p:cond delay="0"/>
-                            </p:stCondLst>
-                            <p:childTnLst>
-                              <p:par>
-                                <p:cTn id="9" presetID="1" presetClass="entr" presetSubtype="0" fill="hold" nodeType="clickEffect">
-                                  <p:stCondLst>
-                                    <p:cond delay="0"/>
-                                  </p:stCondLst>
-                                  <p:childTnLst>
-                                    <p:set>
-                                      <p:cBhvr>
-                                        <p:cTn id="10" dur="1" fill="hold">
-                                          <p:stCondLst>
-                                            <p:cond delay="0"/>
-                                          </p:stCondLst>
-                                        </p:cTn>
-                                        <p:tgtEl>
-                                          <p:spTgt spid="4"/>
-                                        </p:tgtEl>
-                                        <p:attrNameLst>
-                                          <p:attrName>style.visibility</p:attrName>
-                                        </p:attrNameLst>
-                                      </p:cBhvr>
-                                      <p:to>
-                                        <p:strVal val="visible"/>
-                                      </p:to>
-                                    </p:set>
-                                  </p:childTnLst>
-                                </p:cTn>
-                              </p:par>
-                            </p:childTnLst>
-                          </p:cTn>
-                        </p:par>
-                      </p:childTnLst>
-                    </p:cTn>
-                  </p:par>
-                  <p:par>
-                    <p:cTn id="11" fill="hold">
-                      <p:stCondLst>
-                        <p:cond delay="indefinite"/>
-                      </p:stCondLst>
-                      <p:childTnLst>
-                        <p:par>
-                          <p:cTn id="12" fill="hold">
-                            <p:stCondLst>
-                              <p:cond delay="0"/>
-                            </p:stCondLst>
-                            <p:childTnLst>
-                              <p:par>
-                                <p:cTn id="13" presetID="1" presetClass="entr" presetSubtype="0" fill="hold" nodeType="clickEffect">
-                                  <p:stCondLst>
-                                    <p:cond delay="0"/>
-                                  </p:stCondLst>
-                                  <p:childTnLst>
-                                    <p:set>
-                                      <p:cBhvr>
-                                        <p:cTn id="14" dur="1" fill="hold">
-                                          <p:stCondLst>
-                                            <p:cond delay="0"/>
-                                          </p:stCondLst>
-                                        </p:cTn>
-                                        <p:tgtEl>
-                                          <p:spTgt spid="3"/>
-                                        </p:tgtEl>
-                                        <p:attrNameLst>
-                                          <p:attrName>style.visibility</p:attrName>
-                                        </p:attrNameLst>
-                                      </p:cBhvr>
-                                      <p:to>
-                                        <p:strVal val="visible"/>
-                                      </p:to>
-                                    </p:set>
-                                  </p:childTnLst>
-                                </p:cTn>
-                              </p:par>
-                            </p:childTnLst>
-                          </p:cTn>
-                        </p:par>
-                      </p:childTnLst>
-                    </p:cTn>
-                  </p:par>
-                  <p:par>
-                    <p:cTn id="15" fill="hold">
-                      <p:stCondLst>
-                        <p:cond delay="indefinite"/>
-                      </p:stCondLst>
-                      <p:childTnLst>
-                        <p:par>
-                          <p:cTn id="16" fill="hold">
-                            <p:stCondLst>
-                              <p:cond delay="0"/>
-                            </p:stCondLst>
-                            <p:childTnLst>
-                              <p:par>
-                                <p:cTn id="17" presetID="1" presetClass="entr" presetSubtype="0" fill="hold" nodeType="clickEffect">
-                                  <p:stCondLst>
-                                    <p:cond delay="0"/>
-                                  </p:stCondLst>
-                                  <p:childTnLst>
-                                    <p:set>
-                                      <p:cBhvr>
-                                        <p:cTn id="18" dur="1" fill="hold">
-                                          <p:stCondLst>
-                                            <p:cond delay="0"/>
-                                          </p:stCondLst>
-                                        </p:cTn>
-                                        <p:tgtEl>
-                                          <p:spTgt spid="5"/>
-                                        </p:tgtEl>
-                                        <p:attrNameLst>
-                                          <p:attrName>style.visibility</p:attrName>
-                                        </p:attrNameLst>
-                                      </p:cBhvr>
-                                      <p:to>
-                                        <p:strVal val="visible"/>
-                                      </p:to>
-                                    </p:set>
-                                  </p:childTnLst>
-                                </p:cTn>
-                              </p:par>
-                            </p:childTnLst>
-                          </p:cTn>
-                        </p:par>
-                      </p:childTnLst>
-                    </p:cTn>
-                  </p:par>
-                  <p:par>
-                    <p:cTn id="19" fill="hold">
-                      <p:stCondLst>
-                        <p:cond delay="indefinite"/>
-                      </p:stCondLst>
-                      <p:childTnLst>
-                        <p:par>
-                          <p:cTn id="20" fill="hold">
-                            <p:stCondLst>
-                              <p:cond delay="0"/>
-                            </p:stCondLst>
-                            <p:childTnLst>
-                              <p:par>
-                                <p:cTn id="21" presetID="1" presetClass="entr" presetSubtype="0" fill="hold" nodeType="clickEffect">
-                                  <p:stCondLst>
-                                    <p:cond delay="0"/>
-                                  </p:stCondLst>
-                                  <p:childTnLst>
-                                    <p:set>
-                                      <p:cBhvr>
-                                        <p:cTn id="22" dur="1" fill="hold">
-                                          <p:stCondLst>
-                                            <p:cond delay="0"/>
-                                          </p:stCondLst>
-                                        </p:cTn>
-                                        <p:tgtEl>
-                                          <p:spTgt spid="6"/>
-                                        </p:tgtEl>
-                                        <p:attrNameLst>
-                                          <p:attrName>style.visibility</p:attrName>
-                                        </p:attrNameLst>
-                                      </p:cBhvr>
-                                      <p:to>
-                                        <p:strVal val="visible"/>
-                                      </p:to>
-                                    </p:set>
-                                  </p:childTnLst>
-                                </p:cTn>
-                              </p:par>
-                            </p:childTnLst>
-                          </p:cTn>
-                        </p:par>
-                      </p:childTnLst>
-                    </p:cTn>
-                  </p:par>
-                  <p:par>
-                    <p:cTn id="23" fill="hold">
-                      <p:stCondLst>
-                        <p:cond delay="indefinite"/>
-                      </p:stCondLst>
-                      <p:childTnLst>
-                        <p:par>
-                          <p:cTn id="24" fill="hold">
-                            <p:stCondLst>
-                              <p:cond delay="0"/>
-                            </p:stCondLst>
-                            <p:childTnLst>
-                              <p:par>
-                                <p:cTn id="25" presetID="1" presetClass="entr" presetSubtype="0" fill="hold" nodeType="clickEffect">
-                                  <p:stCondLst>
-                                    <p:cond delay="0"/>
-                                  </p:stCondLst>
-                                  <p:childTnLst>
-                                    <p:set>
-                                      <p:cBhvr>
-                                        <p:cTn id="26" dur="1" fill="hold">
-                                          <p:stCondLst>
-                                            <p:cond delay="0"/>
-                                          </p:stCondLst>
-                                        </p:cTn>
-                                        <p:tgtEl>
-                                          <p:spTgt spid="7"/>
-                                        </p:tgtEl>
-                                        <p:attrNameLst>
-                                          <p:attrName>style.visibility</p:attrName>
-                                        </p:attrNameLst>
-                                      </p:cBhvr>
-                                      <p:to>
-                                        <p:strVal val="visible"/>
-                                      </p:to>
-                                    </p:set>
-                                  </p:childTnLst>
-                                </p:cTn>
-                              </p:par>
-                            </p:childTnLst>
-                          </p:cTn>
-                        </p:par>
-                      </p:childTnLst>
-                    </p:cTn>
-                  </p:par>
-                  <p:par>
-                    <p:cTn id="27" fill="hold">
-                      <p:stCondLst>
-                        <p:cond delay="indefinite"/>
-                      </p:stCondLst>
-                      <p:childTnLst>
-                        <p:par>
-                          <p:cTn id="28" fill="hold">
-                            <p:stCondLst>
-                              <p:cond delay="0"/>
-                            </p:stCondLst>
-                            <p:childTnLst>
-                              <p:par>
-                                <p:cTn id="29" presetID="1" presetClass="entr" presetSubtype="0" fill="hold" nodeType="clickEffect">
-                                  <p:stCondLst>
-                                    <p:cond delay="0"/>
-                                  </p:stCondLst>
-                                  <p:childTnLst>
-                                    <p:set>
-                                      <p:cBhvr>
-                                        <p:cTn id="30" dur="1" fill="hold">
-                                          <p:stCondLst>
-                                            <p:cond delay="0"/>
-                                          </p:stCondLst>
-                                        </p:cTn>
-                                        <p:tgtEl>
-                                          <p:spTgt spid="12"/>
-                                        </p:tgtEl>
-                                        <p:attrNameLst>
-                                          <p:attrName>style.visibility</p:attrName>
-                                        </p:attrNameLst>
-                                      </p:cBhvr>
-                                      <p:to>
-                                        <p:strVal val="visible"/>
-                                      </p:to>
-                                    </p:set>
-                                  </p:childTnLst>
-                                </p:cTn>
-                              </p:par>
-                            </p:childTnLst>
-                          </p:cTn>
-                        </p:par>
-                      </p:childTnLst>
-                    </p:cTn>
-                  </p:par>
-                </p:childTnLst>
-              </p:cTn>
-              <p:prevCondLst>
-                <p:cond evt="onPrev" delay="0">
-                  <p:tgtEl>
-                    <p:sldTgt/>
-                  </p:tgtEl>
-                </p:cond>
-              </p:prevCondLst>
-              <p:nextCondLst>
-                <p:cond evt="onNext" delay="0">
-                  <p:tgtEl>
-                    <p:sldTgt/>
-                  </p:tgtEl>
-                </p:cond>
-              </p:nextCondLst>
-            </p:seq>
-          </p:childTnLst>
-        </p:cTn>
-      </p:par>
-    </p:tnLst>
-  </p:timing>
-</p:sld>
-</file>
-
-<file path=ppt/slides/slide9.xml><?xml version="1.0" encoding="utf-8"?>
-<p:sld xmlns:a="http://schemas.openxmlformats.org/drawingml/2006/main" xmlns:r="http://schemas.openxmlformats.org/officeDocument/2006/relationships" xmlns:p="http://schemas.openxmlformats.org/presentationml/2006/main">
-  <p:cSld>
-    <p:spTree>
-      <p:nvGrpSpPr>
-        <p:cNvPr id="1" name=""/>
-        <p:cNvGrpSpPr/>
-        <p:nvPr/>
-      </p:nvGrpSpPr>
-      <p:grpSpPr>
-        <a:xfrm>
-          <a:off x="0" y="0"/>
-          <a:ext cx="0" cy="0"/>
-          <a:chOff x="0" y="0"/>
-          <a:chExt cx="0" cy="0"/>
-        </a:xfrm>
-      </p:grpSpPr>
-      <p:sp>
-        <p:nvSpPr>
-          <p:cNvPr id="9" name="文本框 8">
-            <a:extLst>
-              <a:ext uri="{FF2B5EF4-FFF2-40B4-BE49-F238E27FC236}">
-                <a16:creationId xmlns:a16="http://schemas.microsoft.com/office/drawing/2014/main" id="{8F79F9D7-B619-4E66-B6E5-9174630E3410}"/>
-              </a:ext>
-            </a:extLst>
-          </p:cNvPr>
-          <p:cNvSpPr txBox="1"/>
-          <p:nvPr/>
-        </p:nvSpPr>
-        <p:spPr>
-          <a:xfrm>
-            <a:off x="678609" y="301567"/>
-            <a:ext cx="10634659" cy="707886"/>
-          </a:xfrm>
-          <a:prstGeom prst="rect">
-            <a:avLst/>
-          </a:prstGeom>
-          <a:noFill/>
-        </p:spPr>
-        <p:txBody>
-          <a:bodyPr wrap="square" rtlCol="0">
-            <a:spAutoFit/>
-          </a:bodyPr>
-          <a:lstStyle/>
-          <a:p>
-            <a:r>
-              <a:rPr lang="en" altLang="en-US" sz="4000" dirty="0">
-                <a:solidFill>
-                  <a:schemeClr val="bg1"/>
-                </a:solidFill>
-                <a:latin typeface="Aptos Display" panose="020B0004020202020204" pitchFamily="34" charset="0"/>
-                <a:ea typeface="微软雅黑" panose="020B0503020204020204" pitchFamily="34" charset="-122"/>
-                <a:cs typeface="Consolas" panose="020B0609020204030204" pitchFamily="49" charset="0"/>
-              </a:rPr>
-              <a:t>Cloze test answers</a:t>
-            </a:r>
-          </a:p>
-        </p:txBody>
-      </p:sp>
-      <p:pic>
-        <p:nvPicPr>
-          <p:cNvPr id="12" name="图片 11">
-            <a:extLst>
-              <a:ext uri="{FF2B5EF4-FFF2-40B4-BE49-F238E27FC236}">
-                <a16:creationId xmlns:a16="http://schemas.microsoft.com/office/drawing/2014/main" id="{6E92E840-BE91-4BA9-A814-CDF5829DD7C7}"/>
-              </a:ext>
-            </a:extLst>
-          </p:cNvPr>
-          <p:cNvPicPr>
-            <a:picLocks noChangeAspect="1"/>
-          </p:cNvPicPr>
-          <p:nvPr/>
-        </p:nvPicPr>
-        <p:blipFill>
-          <a:blip r:embed="rId2"/>
-          <a:stretch>
-            <a:fillRect/>
-          </a:stretch>
-        </p:blipFill>
-        <p:spPr>
-          <a:xfrm>
-            <a:off x="678609" y="1412077"/>
-            <a:ext cx="3068179" cy="1438871"/>
-          </a:xfrm>
-          <a:prstGeom prst="rect">
-            <a:avLst/>
-          </a:prstGeom>
-        </p:spPr>
-      </p:pic>
-      <p:pic>
-        <p:nvPicPr>
-          <p:cNvPr id="15" name="图片 14">
-            <a:extLst>
-              <a:ext uri="{FF2B5EF4-FFF2-40B4-BE49-F238E27FC236}">
-                <a16:creationId xmlns:a16="http://schemas.microsoft.com/office/drawing/2014/main" id="{ECF5ED95-3966-4B2C-97FB-2EE59ED227BF}"/>
-              </a:ext>
-            </a:extLst>
-          </p:cNvPr>
-          <p:cNvPicPr>
-            <a:picLocks noChangeAspect="1"/>
-          </p:cNvPicPr>
-          <p:nvPr/>
-        </p:nvPicPr>
-        <p:blipFill>
-          <a:blip r:embed="rId3"/>
-          <a:stretch>
-            <a:fillRect/>
-          </a:stretch>
-        </p:blipFill>
-        <p:spPr>
-          <a:xfrm>
-            <a:off x="4024882" y="1406990"/>
-            <a:ext cx="4022898" cy="1497158"/>
-          </a:xfrm>
-          <a:prstGeom prst="rect">
-            <a:avLst/>
-          </a:prstGeom>
-        </p:spPr>
-      </p:pic>
-      <p:pic>
-        <p:nvPicPr>
-          <p:cNvPr id="18" name="图片 17">
-            <a:extLst>
-              <a:ext uri="{FF2B5EF4-FFF2-40B4-BE49-F238E27FC236}">
-                <a16:creationId xmlns:a16="http://schemas.microsoft.com/office/drawing/2014/main" id="{7CEB77ED-8BB2-4EB0-B904-9A78F27F0E46}"/>
-              </a:ext>
-            </a:extLst>
-          </p:cNvPr>
-          <p:cNvPicPr>
-            <a:picLocks noChangeAspect="1"/>
-          </p:cNvPicPr>
-          <p:nvPr/>
-        </p:nvPicPr>
-        <p:blipFill>
-          <a:blip r:embed="rId4"/>
-          <a:stretch>
-            <a:fillRect/>
-          </a:stretch>
-        </p:blipFill>
-        <p:spPr>
-          <a:xfrm>
-            <a:off x="8325875" y="1412077"/>
-            <a:ext cx="3351262" cy="1486984"/>
-          </a:xfrm>
-          <a:prstGeom prst="rect">
-            <a:avLst/>
-          </a:prstGeom>
-        </p:spPr>
-      </p:pic>
-      <p:pic>
-        <p:nvPicPr>
-          <p:cNvPr id="20" name="图片 19">
-            <a:extLst>
-              <a:ext uri="{FF2B5EF4-FFF2-40B4-BE49-F238E27FC236}">
-                <a16:creationId xmlns:a16="http://schemas.microsoft.com/office/drawing/2014/main" id="{3FF3D262-1497-4108-A85B-A773F8133663}"/>
-              </a:ext>
-            </a:extLst>
-          </p:cNvPr>
-          <p:cNvPicPr>
-            <a:picLocks noChangeAspect="1"/>
-          </p:cNvPicPr>
-          <p:nvPr/>
-        </p:nvPicPr>
-        <p:blipFill>
-          <a:blip r:embed="rId5"/>
-          <a:stretch>
-            <a:fillRect/>
-          </a:stretch>
-        </p:blipFill>
-        <p:spPr>
-          <a:xfrm>
-            <a:off x="650240" y="3266628"/>
-            <a:ext cx="4543026" cy="1296635"/>
-          </a:xfrm>
-          <a:prstGeom prst="rect">
-            <a:avLst/>
-          </a:prstGeom>
-        </p:spPr>
-      </p:pic>
-      <p:pic>
-        <p:nvPicPr>
-          <p:cNvPr id="22" name="图片 21">
-            <a:extLst>
-              <a:ext uri="{FF2B5EF4-FFF2-40B4-BE49-F238E27FC236}">
-                <a16:creationId xmlns:a16="http://schemas.microsoft.com/office/drawing/2014/main" id="{935FE407-CFD8-448D-BA4B-578D45B2FF7E}"/>
-              </a:ext>
-            </a:extLst>
-          </p:cNvPr>
-          <p:cNvPicPr>
-            <a:picLocks noChangeAspect="1"/>
-          </p:cNvPicPr>
-          <p:nvPr/>
-        </p:nvPicPr>
-        <p:blipFill>
-          <a:blip r:embed="rId6"/>
-          <a:stretch>
-            <a:fillRect/>
-          </a:stretch>
-        </p:blipFill>
-        <p:spPr>
-          <a:xfrm>
-            <a:off x="5376498" y="3177463"/>
-            <a:ext cx="5686577" cy="1381027"/>
-          </a:xfrm>
-          <a:prstGeom prst="rect">
-            <a:avLst/>
-          </a:prstGeom>
-        </p:spPr>
-      </p:pic>
-      <p:pic>
-        <p:nvPicPr>
-          <p:cNvPr id="25" name="图片 24">
-            <a:extLst>
-              <a:ext uri="{FF2B5EF4-FFF2-40B4-BE49-F238E27FC236}">
-                <a16:creationId xmlns:a16="http://schemas.microsoft.com/office/drawing/2014/main" id="{E06DB031-D327-477B-82EE-F5951B9D47EF}"/>
-              </a:ext>
-            </a:extLst>
-          </p:cNvPr>
-          <p:cNvPicPr>
-            <a:picLocks noChangeAspect="1"/>
-          </p:cNvPicPr>
-          <p:nvPr/>
-        </p:nvPicPr>
-        <p:blipFill>
-          <a:blip r:embed="rId7"/>
-          <a:stretch>
-            <a:fillRect/>
-          </a:stretch>
-        </p:blipFill>
-        <p:spPr>
-          <a:xfrm>
-            <a:off x="655349" y="4831996"/>
-            <a:ext cx="3446184" cy="1422736"/>
-          </a:xfrm>
-          <a:prstGeom prst="rect">
-            <a:avLst/>
-          </a:prstGeom>
-        </p:spPr>
-      </p:pic>
-      <p:pic>
-        <p:nvPicPr>
-          <p:cNvPr id="16" name="图片 15">
-            <a:extLst>
-              <a:ext uri="{FF2B5EF4-FFF2-40B4-BE49-F238E27FC236}">
-                <a16:creationId xmlns:a16="http://schemas.microsoft.com/office/drawing/2014/main" id="{01B78BE7-DA5B-823C-B5E9-6C5D08A33E03}"/>
-              </a:ext>
-            </a:extLst>
-          </p:cNvPr>
-          <p:cNvPicPr>
-            <a:picLocks noChangeAspect="1"/>
-          </p:cNvPicPr>
-          <p:nvPr/>
-        </p:nvPicPr>
-        <p:blipFill>
-          <a:blip r:embed="rId8"/>
-          <a:stretch>
-            <a:fillRect/>
-          </a:stretch>
-        </p:blipFill>
-        <p:spPr>
-          <a:xfrm>
-            <a:off x="5067292" y="4822450"/>
-            <a:ext cx="5199541" cy="1432282"/>
-          </a:xfrm>
-          <a:prstGeom prst="rect">
-            <a:avLst/>
-          </a:prstGeom>
-        </p:spPr>
-      </p:pic>
-      <p:sp>
-        <p:nvSpPr>
-          <p:cNvPr id="2" name="TextBox 1">
-            <a:extLst>
-              <a:ext uri="{FF2B5EF4-FFF2-40B4-BE49-F238E27FC236}">
-                <a16:creationId xmlns:a16="http://schemas.microsoft.com/office/drawing/2014/main" id="{0FA3A31C-4959-2448-4014-CE5760236548}"/>
-              </a:ext>
-            </a:extLst>
-          </p:cNvPr>
-          <p:cNvSpPr txBox="1"/>
-          <p:nvPr/>
-        </p:nvSpPr>
-        <p:spPr>
-          <a:xfrm>
-            <a:off x="2137558" y="1412077"/>
-            <a:ext cx="1629407" cy="369332"/>
-          </a:xfrm>
-          <a:prstGeom prst="rect">
-            <a:avLst/>
-          </a:prstGeom>
-          <a:solidFill>
-            <a:schemeClr val="tx1"/>
-          </a:solidFill>
-        </p:spPr>
-        <p:txBody>
-          <a:bodyPr wrap="square" rtlCol="0">
-            <a:spAutoFit/>
-          </a:bodyPr>
-          <a:lstStyle/>
-          <a:p>
-            <a:endParaRPr lang="en-AU" dirty="0"/>
-          </a:p>
-        </p:txBody>
-      </p:sp>
-      <p:sp>
-        <p:nvSpPr>
-          <p:cNvPr id="3" name="TextBox 2">
-            <a:extLst>
-              <a:ext uri="{FF2B5EF4-FFF2-40B4-BE49-F238E27FC236}">
-                <a16:creationId xmlns:a16="http://schemas.microsoft.com/office/drawing/2014/main" id="{02004F16-1A6B-7243-8465-1140F6E0B208}"/>
-              </a:ext>
-            </a:extLst>
-          </p:cNvPr>
-          <p:cNvSpPr txBox="1"/>
-          <p:nvPr/>
-        </p:nvSpPr>
-        <p:spPr>
-          <a:xfrm>
-            <a:off x="2137558" y="1412077"/>
-            <a:ext cx="1629407" cy="369332"/>
-          </a:xfrm>
-          <a:prstGeom prst="rect">
-            <a:avLst/>
-          </a:prstGeom>
-          <a:solidFill>
-            <a:schemeClr val="tx1"/>
-          </a:solidFill>
-        </p:spPr>
-        <p:txBody>
-          <a:bodyPr wrap="square" rtlCol="0">
-            <a:spAutoFit/>
-          </a:bodyPr>
-          <a:lstStyle/>
-          <a:p>
-            <a:endParaRPr lang="en-AU" dirty="0"/>
-          </a:p>
-        </p:txBody>
-      </p:sp>
-      <p:sp>
-        <p:nvSpPr>
-          <p:cNvPr id="4" name="TextBox 3">
-            <a:extLst>
-              <a:ext uri="{FF2B5EF4-FFF2-40B4-BE49-F238E27FC236}">
-                <a16:creationId xmlns:a16="http://schemas.microsoft.com/office/drawing/2014/main" id="{0E3ECB60-CBBC-C32F-C763-EEA899050628}"/>
-              </a:ext>
-            </a:extLst>
-          </p:cNvPr>
-          <p:cNvSpPr txBox="1"/>
-          <p:nvPr/>
-        </p:nvSpPr>
-        <p:spPr>
-          <a:xfrm>
-            <a:off x="2204058" y="2260132"/>
-            <a:ext cx="821775" cy="307777"/>
-          </a:xfrm>
-          <a:prstGeom prst="rect">
-            <a:avLst/>
-          </a:prstGeom>
-          <a:solidFill>
-            <a:schemeClr val="tx1"/>
-          </a:solidFill>
-        </p:spPr>
-        <p:txBody>
-          <a:bodyPr wrap="square" lIns="0" tIns="0" rIns="0" bIns="0" rtlCol="0">
-            <a:spAutoFit/>
-          </a:bodyPr>
-          <a:lstStyle/>
-          <a:p>
-            <a:r>
-              <a:rPr lang="en-US" altLang="zh-CN" sz="2000" dirty="0">
-                <a:solidFill>
-                  <a:schemeClr val="bg1"/>
-                </a:solidFill>
-                <a:latin typeface="Consolas" panose="020B0609020204030204" pitchFamily="49" charset="0"/>
-                <a:cs typeface="Consolas" panose="020B0609020204030204" pitchFamily="49" charset="0"/>
-              </a:rPr>
-              <a:t>pass</a:t>
-            </a:r>
-            <a:endParaRPr lang="en-AU" sz="2000" dirty="0">
-              <a:solidFill>
-                <a:schemeClr val="bg1"/>
-              </a:solidFill>
-              <a:latin typeface="Consolas" panose="020B0609020204030204" pitchFamily="49" charset="0"/>
-              <a:cs typeface="Consolas" panose="020B0609020204030204" pitchFamily="49" charset="0"/>
-            </a:endParaRPr>
-          </a:p>
-        </p:txBody>
-      </p:sp>
-      <p:sp>
-        <p:nvSpPr>
-          <p:cNvPr id="5" name="TextBox 4">
-            <a:extLst>
-              <a:ext uri="{FF2B5EF4-FFF2-40B4-BE49-F238E27FC236}">
-                <a16:creationId xmlns:a16="http://schemas.microsoft.com/office/drawing/2014/main" id="{71EBEC92-97D8-D03E-E325-9C8E8F236161}"/>
-              </a:ext>
-            </a:extLst>
-          </p:cNvPr>
-          <p:cNvSpPr txBox="1"/>
-          <p:nvPr/>
-        </p:nvSpPr>
-        <p:spPr>
-          <a:xfrm>
-            <a:off x="2037807" y="3996302"/>
-            <a:ext cx="2142000" cy="307777"/>
-          </a:xfrm>
-          <a:prstGeom prst="rect">
-            <a:avLst/>
-          </a:prstGeom>
-          <a:solidFill>
-            <a:schemeClr val="tx1"/>
-          </a:solidFill>
-        </p:spPr>
-        <p:txBody>
-          <a:bodyPr wrap="square" lIns="0" tIns="0" rIns="0" bIns="0" rtlCol="0">
-            <a:spAutoFit/>
-          </a:bodyPr>
-          <a:lstStyle/>
-          <a:p>
-            <a:r>
-              <a:rPr lang="en-US" altLang="zh-CN" sz="2000" dirty="0">
-                <a:solidFill>
-                  <a:schemeClr val="bg1"/>
-                </a:solidFill>
-                <a:latin typeface="Consolas" panose="020B0609020204030204" pitchFamily="49" charset="0"/>
-                <a:cs typeface="Consolas" panose="020B0609020204030204" pitchFamily="49" charset="0"/>
-              </a:rPr>
-              <a:t>n</a:t>
-            </a:r>
-            <a:r>
-              <a:rPr lang="zh-CN" altLang="en-US" sz="2000" dirty="0">
-                <a:solidFill>
-                  <a:schemeClr val="bg1"/>
-                </a:solidFill>
-                <a:latin typeface="Consolas" panose="020B0609020204030204" pitchFamily="49" charset="0"/>
-                <a:cs typeface="Consolas" panose="020B0609020204030204" pitchFamily="49" charset="0"/>
-              </a:rPr>
-              <a:t> </a:t>
-            </a:r>
-            <a:r>
-              <a:rPr lang="en-US" altLang="zh-CN" sz="2000" dirty="0">
-                <a:solidFill>
-                  <a:schemeClr val="bg1"/>
-                </a:solidFill>
-                <a:latin typeface="Consolas" panose="020B0609020204030204" pitchFamily="49" charset="0"/>
-                <a:cs typeface="Consolas" panose="020B0609020204030204" pitchFamily="49" charset="0"/>
-              </a:rPr>
-              <a:t>div.</a:t>
-            </a:r>
-            <a:r>
-              <a:rPr lang="zh-CN" altLang="en-US" sz="2000" dirty="0">
-                <a:solidFill>
-                  <a:schemeClr val="bg1"/>
-                </a:solidFill>
-                <a:latin typeface="Consolas" panose="020B0609020204030204" pitchFamily="49" charset="0"/>
-                <a:cs typeface="Consolas" panose="020B0609020204030204" pitchFamily="49" charset="0"/>
-              </a:rPr>
-              <a:t> </a:t>
-            </a:r>
-            <a:r>
-              <a:rPr lang="en-US" altLang="zh-CN" sz="2000" dirty="0">
-                <a:solidFill>
-                  <a:schemeClr val="bg1"/>
-                </a:solidFill>
-                <a:latin typeface="Consolas" panose="020B0609020204030204" pitchFamily="49" charset="0"/>
-                <a:cs typeface="Consolas" panose="020B0609020204030204" pitchFamily="49" charset="0"/>
-              </a:rPr>
-              <a:t>by</a:t>
-            </a:r>
-            <a:r>
-              <a:rPr lang="zh-CN" altLang="en-US" sz="2000" dirty="0">
-                <a:solidFill>
-                  <a:schemeClr val="bg1"/>
-                </a:solidFill>
-                <a:latin typeface="Consolas" panose="020B0609020204030204" pitchFamily="49" charset="0"/>
-                <a:cs typeface="Consolas" panose="020B0609020204030204" pitchFamily="49" charset="0"/>
-              </a:rPr>
-              <a:t> </a:t>
-            </a:r>
-            <a:r>
-              <a:rPr lang="en-US" altLang="zh-CN" sz="2000" dirty="0">
-                <a:solidFill>
-                  <a:schemeClr val="bg1"/>
-                </a:solidFill>
-                <a:latin typeface="Consolas" panose="020B0609020204030204" pitchFamily="49" charset="0"/>
-                <a:cs typeface="Consolas" panose="020B0609020204030204" pitchFamily="49" charset="0"/>
-              </a:rPr>
-              <a:t>3</a:t>
-            </a:r>
-            <a:r>
-              <a:rPr lang="zh-CN" altLang="en-US" sz="2000" dirty="0">
-                <a:solidFill>
-                  <a:schemeClr val="bg1"/>
-                </a:solidFill>
-                <a:latin typeface="Consolas" panose="020B0609020204030204" pitchFamily="49" charset="0"/>
-                <a:cs typeface="Consolas" panose="020B0609020204030204" pitchFamily="49" charset="0"/>
-              </a:rPr>
-              <a:t> </a:t>
-            </a:r>
-            <a:r>
-              <a:rPr lang="en-US" altLang="zh-CN" sz="2000" dirty="0">
-                <a:solidFill>
-                  <a:schemeClr val="bg1"/>
-                </a:solidFill>
-                <a:latin typeface="Consolas" panose="020B0609020204030204" pitchFamily="49" charset="0"/>
-                <a:cs typeface="Consolas" panose="020B0609020204030204" pitchFamily="49" charset="0"/>
-              </a:rPr>
-              <a:t>&amp;</a:t>
-            </a:r>
-            <a:r>
-              <a:rPr lang="zh-CN" altLang="en-US" sz="2000" dirty="0">
-                <a:solidFill>
-                  <a:schemeClr val="bg1"/>
-                </a:solidFill>
-                <a:latin typeface="Consolas" panose="020B0609020204030204" pitchFamily="49" charset="0"/>
-                <a:cs typeface="Consolas" panose="020B0609020204030204" pitchFamily="49" charset="0"/>
-              </a:rPr>
-              <a:t> </a:t>
-            </a:r>
-            <a:r>
-              <a:rPr lang="en-US" altLang="zh-CN" sz="2000" dirty="0">
-                <a:solidFill>
-                  <a:schemeClr val="bg1"/>
-                </a:solidFill>
-                <a:latin typeface="Consolas" panose="020B0609020204030204" pitchFamily="49" charset="0"/>
-                <a:cs typeface="Consolas" panose="020B0609020204030204" pitchFamily="49" charset="0"/>
-              </a:rPr>
-              <a:t>5</a:t>
-            </a:r>
-            <a:endParaRPr lang="en-AU" sz="2000" dirty="0">
-              <a:solidFill>
-                <a:schemeClr val="bg1"/>
-              </a:solidFill>
-              <a:latin typeface="Consolas" panose="020B0609020204030204" pitchFamily="49" charset="0"/>
-              <a:cs typeface="Consolas" panose="020B0609020204030204" pitchFamily="49" charset="0"/>
-            </a:endParaRPr>
-          </a:p>
-        </p:txBody>
-      </p:sp>
-      <p:sp>
-        <p:nvSpPr>
-          <p:cNvPr id="6" name="TextBox 5">
-            <a:extLst>
-              <a:ext uri="{FF2B5EF4-FFF2-40B4-BE49-F238E27FC236}">
-                <a16:creationId xmlns:a16="http://schemas.microsoft.com/office/drawing/2014/main" id="{ED5BCF2E-72B7-725D-3C7B-7FF15E11504E}"/>
-              </a:ext>
-            </a:extLst>
-          </p:cNvPr>
-          <p:cNvSpPr txBox="1"/>
-          <p:nvPr/>
-        </p:nvSpPr>
-        <p:spPr>
-          <a:xfrm>
-            <a:off x="2137557" y="4738823"/>
-            <a:ext cx="1629407" cy="369332"/>
-          </a:xfrm>
-          <a:prstGeom prst="rect">
-            <a:avLst/>
-          </a:prstGeom>
-          <a:solidFill>
-            <a:schemeClr val="tx1"/>
-          </a:solidFill>
-        </p:spPr>
-        <p:txBody>
-          <a:bodyPr wrap="square" rtlCol="0">
-            <a:spAutoFit/>
-          </a:bodyPr>
-          <a:lstStyle/>
-          <a:p>
-            <a:endParaRPr lang="en-AU" dirty="0"/>
-          </a:p>
-        </p:txBody>
-      </p:sp>
-      <p:sp>
-        <p:nvSpPr>
-          <p:cNvPr id="7" name="TextBox 6">
-            <a:extLst>
-              <a:ext uri="{FF2B5EF4-FFF2-40B4-BE49-F238E27FC236}">
-                <a16:creationId xmlns:a16="http://schemas.microsoft.com/office/drawing/2014/main" id="{583DB1AA-EA06-42D4-00F2-21E75C446C87}"/>
-              </a:ext>
-            </a:extLst>
-          </p:cNvPr>
-          <p:cNvSpPr txBox="1"/>
-          <p:nvPr/>
-        </p:nvSpPr>
-        <p:spPr>
-          <a:xfrm>
-            <a:off x="2204059" y="5683735"/>
-            <a:ext cx="1629407" cy="261610"/>
-          </a:xfrm>
-          <a:prstGeom prst="rect">
-            <a:avLst/>
-          </a:prstGeom>
-          <a:solidFill>
-            <a:schemeClr val="tx1"/>
-          </a:solidFill>
-        </p:spPr>
-        <p:txBody>
-          <a:bodyPr wrap="square" lIns="0" tIns="0" rIns="0" bIns="0" rtlCol="0">
-            <a:spAutoFit/>
-          </a:bodyPr>
-          <a:lstStyle/>
-          <a:p>
-            <a:r>
-              <a:rPr lang="en-US" altLang="zh-CN" sz="1700" dirty="0">
-                <a:solidFill>
-                  <a:schemeClr val="bg1"/>
-                </a:solidFill>
-                <a:latin typeface="Consolas" panose="020B0609020204030204" pitchFamily="49" charset="0"/>
-                <a:cs typeface="Consolas" panose="020B0609020204030204" pitchFamily="49" charset="0"/>
-              </a:rPr>
-              <a:t>born</a:t>
-            </a:r>
-            <a:r>
-              <a:rPr lang="zh-CN" altLang="en-US" sz="1700" dirty="0">
-                <a:solidFill>
-                  <a:schemeClr val="bg1"/>
-                </a:solidFill>
-                <a:latin typeface="Consolas" panose="020B0609020204030204" pitchFamily="49" charset="0"/>
-                <a:cs typeface="Consolas" panose="020B0609020204030204" pitchFamily="49" charset="0"/>
-              </a:rPr>
-              <a:t> </a:t>
-            </a:r>
-            <a:r>
-              <a:rPr lang="en-US" altLang="zh-CN" sz="1700" dirty="0">
-                <a:solidFill>
-                  <a:schemeClr val="bg1"/>
-                </a:solidFill>
-                <a:latin typeface="Consolas" panose="020B0609020204030204" pitchFamily="49" charset="0"/>
-                <a:cs typeface="Consolas" panose="020B0609020204030204" pitchFamily="49" charset="0"/>
-              </a:rPr>
-              <a:t>2nd</a:t>
-            </a:r>
-            <a:r>
-              <a:rPr lang="zh-CN" altLang="en-US" sz="1700" dirty="0">
-                <a:solidFill>
-                  <a:schemeClr val="bg1"/>
-                </a:solidFill>
-                <a:latin typeface="Consolas" panose="020B0609020204030204" pitchFamily="49" charset="0"/>
-                <a:cs typeface="Consolas" panose="020B0609020204030204" pitchFamily="49" charset="0"/>
-              </a:rPr>
-              <a:t> </a:t>
-            </a:r>
-            <a:r>
-              <a:rPr lang="en-US" altLang="zh-CN" sz="1700" dirty="0">
-                <a:solidFill>
-                  <a:schemeClr val="bg1"/>
-                </a:solidFill>
-                <a:latin typeface="Consolas" panose="020B0609020204030204" pitchFamily="49" charset="0"/>
-                <a:cs typeface="Consolas" panose="020B0609020204030204" pitchFamily="49" charset="0"/>
-              </a:rPr>
-              <a:t>half</a:t>
-            </a:r>
-            <a:endParaRPr lang="en-AU" sz="1700" dirty="0">
-              <a:solidFill>
-                <a:schemeClr val="bg1"/>
-              </a:solidFill>
-              <a:latin typeface="Consolas" panose="020B0609020204030204" pitchFamily="49" charset="0"/>
-              <a:cs typeface="Consolas" panose="020B0609020204030204" pitchFamily="49" charset="0"/>
-            </a:endParaRPr>
-          </a:p>
-        </p:txBody>
-      </p:sp>
-      <p:sp>
-        <p:nvSpPr>
-          <p:cNvPr id="8" name="TextBox 7">
-            <a:extLst>
-              <a:ext uri="{FF2B5EF4-FFF2-40B4-BE49-F238E27FC236}">
-                <a16:creationId xmlns:a16="http://schemas.microsoft.com/office/drawing/2014/main" id="{3724A914-B2BB-5102-B0DA-39FFE8668FF6}"/>
-              </a:ext>
-            </a:extLst>
-          </p:cNvPr>
-          <p:cNvSpPr txBox="1"/>
-          <p:nvPr/>
-        </p:nvSpPr>
-        <p:spPr>
-          <a:xfrm>
-            <a:off x="5666292" y="2293382"/>
-            <a:ext cx="2099922" cy="307777"/>
-          </a:xfrm>
-          <a:prstGeom prst="rect">
-            <a:avLst/>
-          </a:prstGeom>
-          <a:solidFill>
-            <a:schemeClr val="tx1"/>
-          </a:solidFill>
-        </p:spPr>
-        <p:txBody>
-          <a:bodyPr wrap="square" lIns="0" tIns="0" rIns="0" bIns="0" rtlCol="0">
-            <a:spAutoFit/>
-          </a:bodyPr>
-          <a:lstStyle/>
-          <a:p>
-            <a:r>
-              <a:rPr lang="en-US" altLang="zh-CN" sz="2000" dirty="0">
-                <a:solidFill>
-                  <a:schemeClr val="bg1"/>
-                </a:solidFill>
-                <a:latin typeface="Consolas" panose="020B0609020204030204" pitchFamily="49" charset="0"/>
-                <a:cs typeface="Consolas" panose="020B0609020204030204" pitchFamily="49" charset="0"/>
-              </a:rPr>
-              <a:t>cannot</a:t>
-            </a:r>
-            <a:r>
-              <a:rPr lang="zh-CN" altLang="en-US" sz="2000" dirty="0">
-                <a:solidFill>
-                  <a:schemeClr val="bg1"/>
-                </a:solidFill>
-                <a:latin typeface="Consolas" panose="020B0609020204030204" pitchFamily="49" charset="0"/>
-                <a:cs typeface="Consolas" panose="020B0609020204030204" pitchFamily="49" charset="0"/>
-              </a:rPr>
-              <a:t> </a:t>
-            </a:r>
-            <a:r>
-              <a:rPr lang="en-US" altLang="zh-CN" sz="2000" dirty="0">
-                <a:solidFill>
-                  <a:schemeClr val="bg1"/>
-                </a:solidFill>
-                <a:latin typeface="Consolas" panose="020B0609020204030204" pitchFamily="49" charset="0"/>
-                <a:cs typeface="Consolas" panose="020B0609020204030204" pitchFamily="49" charset="0"/>
-              </a:rPr>
-              <a:t>afford</a:t>
-            </a:r>
-            <a:endParaRPr lang="en-AU" sz="2000" dirty="0">
-              <a:solidFill>
-                <a:schemeClr val="bg1"/>
-              </a:solidFill>
-              <a:latin typeface="Consolas" panose="020B0609020204030204" pitchFamily="49" charset="0"/>
-              <a:cs typeface="Consolas" panose="020B0609020204030204" pitchFamily="49" charset="0"/>
-            </a:endParaRPr>
-          </a:p>
-        </p:txBody>
-      </p:sp>
-      <p:sp>
-        <p:nvSpPr>
-          <p:cNvPr id="10" name="TextBox 9">
-            <a:extLst>
-              <a:ext uri="{FF2B5EF4-FFF2-40B4-BE49-F238E27FC236}">
-                <a16:creationId xmlns:a16="http://schemas.microsoft.com/office/drawing/2014/main" id="{EC22A303-6557-16D3-20AE-E0AD98B3F3C1}"/>
-              </a:ext>
-            </a:extLst>
-          </p:cNvPr>
-          <p:cNvSpPr txBox="1"/>
-          <p:nvPr/>
-        </p:nvSpPr>
-        <p:spPr>
-          <a:xfrm>
-            <a:off x="6799755" y="3081963"/>
-            <a:ext cx="1629407" cy="369332"/>
-          </a:xfrm>
-          <a:prstGeom prst="rect">
-            <a:avLst/>
-          </a:prstGeom>
-          <a:solidFill>
-            <a:schemeClr val="tx1"/>
-          </a:solidFill>
-        </p:spPr>
-        <p:txBody>
-          <a:bodyPr wrap="square" rtlCol="0">
-            <a:spAutoFit/>
-          </a:bodyPr>
-          <a:lstStyle/>
-          <a:p>
-            <a:endParaRPr lang="en-AU" dirty="0"/>
-          </a:p>
-        </p:txBody>
-      </p:sp>
-      <p:sp>
-        <p:nvSpPr>
-          <p:cNvPr id="11" name="TextBox 10">
-            <a:extLst>
-              <a:ext uri="{FF2B5EF4-FFF2-40B4-BE49-F238E27FC236}">
-                <a16:creationId xmlns:a16="http://schemas.microsoft.com/office/drawing/2014/main" id="{7263FB64-43B9-E339-61E7-ABA2D3088862}"/>
-              </a:ext>
-            </a:extLst>
-          </p:cNvPr>
-          <p:cNvSpPr txBox="1"/>
-          <p:nvPr/>
-        </p:nvSpPr>
-        <p:spPr>
-          <a:xfrm>
-            <a:off x="6865025" y="4001954"/>
-            <a:ext cx="3960000" cy="276999"/>
-          </a:xfrm>
-          <a:prstGeom prst="rect">
-            <a:avLst/>
-          </a:prstGeom>
-          <a:solidFill>
-            <a:schemeClr val="tx1"/>
-          </a:solidFill>
-        </p:spPr>
-        <p:txBody>
-          <a:bodyPr wrap="square" lIns="0" tIns="0" rIns="0" bIns="0" rtlCol="0">
-            <a:spAutoFit/>
-          </a:bodyPr>
-          <a:lstStyle/>
-          <a:p>
-            <a:r>
-              <a:rPr lang="en-US" altLang="zh-CN" dirty="0">
-                <a:solidFill>
-                  <a:schemeClr val="bg1"/>
-                </a:solidFill>
-                <a:latin typeface="Consolas" panose="020B0609020204030204" pitchFamily="49" charset="0"/>
-                <a:cs typeface="Consolas" panose="020B0609020204030204" pitchFamily="49" charset="0"/>
-              </a:rPr>
-              <a:t>90:</a:t>
-            </a:r>
-            <a:r>
-              <a:rPr lang="zh-CN" altLang="en-US" dirty="0">
-                <a:solidFill>
-                  <a:schemeClr val="bg1"/>
-                </a:solidFill>
-                <a:latin typeface="Consolas" panose="020B0609020204030204" pitchFamily="49" charset="0"/>
-                <a:cs typeface="Consolas" panose="020B0609020204030204" pitchFamily="49" charset="0"/>
-              </a:rPr>
-              <a:t> </a:t>
-            </a:r>
-            <a:r>
-              <a:rPr lang="en-US" altLang="zh-CN" dirty="0">
-                <a:solidFill>
-                  <a:schemeClr val="bg1"/>
-                </a:solidFill>
-                <a:latin typeface="Consolas" panose="020B0609020204030204" pitchFamily="49" charset="0"/>
-                <a:cs typeface="Consolas" panose="020B0609020204030204" pitchFamily="49" charset="0"/>
-              </a:rPr>
-              <a:t>B,</a:t>
-            </a:r>
-            <a:r>
-              <a:rPr lang="zh-CN" altLang="en-US" dirty="0">
-                <a:solidFill>
-                  <a:schemeClr val="bg1"/>
-                </a:solidFill>
-                <a:latin typeface="Consolas" panose="020B0609020204030204" pitchFamily="49" charset="0"/>
-                <a:cs typeface="Consolas" panose="020B0609020204030204" pitchFamily="49" charset="0"/>
-              </a:rPr>
-              <a:t> </a:t>
-            </a:r>
-            <a:r>
-              <a:rPr lang="en-US" altLang="zh-CN" dirty="0">
-                <a:solidFill>
-                  <a:schemeClr val="bg1"/>
-                </a:solidFill>
-                <a:latin typeface="Consolas" panose="020B0609020204030204" pitchFamily="49" charset="0"/>
-                <a:cs typeface="Consolas" panose="020B0609020204030204" pitchFamily="49" charset="0"/>
-              </a:rPr>
-              <a:t>98:</a:t>
-            </a:r>
-            <a:r>
-              <a:rPr lang="zh-CN" altLang="en-US" dirty="0">
-                <a:solidFill>
-                  <a:schemeClr val="bg1"/>
-                </a:solidFill>
-                <a:latin typeface="Consolas" panose="020B0609020204030204" pitchFamily="49" charset="0"/>
-                <a:cs typeface="Consolas" panose="020B0609020204030204" pitchFamily="49" charset="0"/>
-              </a:rPr>
-              <a:t> </a:t>
-            </a:r>
-            <a:r>
-              <a:rPr lang="en-US" altLang="zh-CN" dirty="0">
-                <a:solidFill>
-                  <a:schemeClr val="bg1"/>
-                </a:solidFill>
-                <a:latin typeface="Consolas" panose="020B0609020204030204" pitchFamily="49" charset="0"/>
-                <a:cs typeface="Consolas" panose="020B0609020204030204" pitchFamily="49" charset="0"/>
-              </a:rPr>
-              <a:t>A.</a:t>
-            </a:r>
-            <a:r>
-              <a:rPr lang="zh-CN" altLang="en-US" dirty="0">
-                <a:solidFill>
-                  <a:schemeClr val="bg1"/>
-                </a:solidFill>
-                <a:latin typeface="Consolas" panose="020B0609020204030204" pitchFamily="49" charset="0"/>
-                <a:cs typeface="Consolas" panose="020B0609020204030204" pitchFamily="49" charset="0"/>
-              </a:rPr>
-              <a:t> </a:t>
-            </a:r>
-            <a:r>
-              <a:rPr lang="en-US" altLang="zh-CN" dirty="0">
-                <a:solidFill>
-                  <a:schemeClr val="bg1"/>
-                </a:solidFill>
-                <a:latin typeface="Consolas" panose="020B0609020204030204" pitchFamily="49" charset="0"/>
-                <a:cs typeface="Consolas" panose="020B0609020204030204" pitchFamily="49" charset="0"/>
-              </a:rPr>
-              <a:t>You</a:t>
-            </a:r>
-            <a:r>
-              <a:rPr lang="zh-CN" altLang="en-US" dirty="0">
-                <a:solidFill>
-                  <a:schemeClr val="bg1"/>
-                </a:solidFill>
-                <a:latin typeface="Consolas" panose="020B0609020204030204" pitchFamily="49" charset="0"/>
-                <a:cs typeface="Consolas" panose="020B0609020204030204" pitchFamily="49" charset="0"/>
-              </a:rPr>
-              <a:t> </a:t>
-            </a:r>
-            <a:r>
-              <a:rPr lang="en-US" altLang="zh-CN" dirty="0">
-                <a:solidFill>
-                  <a:schemeClr val="bg1"/>
-                </a:solidFill>
-                <a:latin typeface="Consolas" panose="020B0609020204030204" pitchFamily="49" charset="0"/>
-                <a:cs typeface="Consolas" panose="020B0609020204030204" pitchFamily="49" charset="0"/>
-              </a:rPr>
-              <a:t>only</a:t>
-            </a:r>
-            <a:r>
-              <a:rPr lang="zh-CN" altLang="en-US" dirty="0">
-                <a:solidFill>
-                  <a:schemeClr val="bg1"/>
-                </a:solidFill>
-                <a:latin typeface="Consolas" panose="020B0609020204030204" pitchFamily="49" charset="0"/>
-                <a:cs typeface="Consolas" panose="020B0609020204030204" pitchFamily="49" charset="0"/>
-              </a:rPr>
-              <a:t> </a:t>
-            </a:r>
-            <a:r>
-              <a:rPr lang="en-US" altLang="zh-CN" dirty="0">
-                <a:solidFill>
-                  <a:schemeClr val="bg1"/>
-                </a:solidFill>
-                <a:latin typeface="Consolas" panose="020B0609020204030204" pitchFamily="49" charset="0"/>
-                <a:cs typeface="Consolas" panose="020B0609020204030204" pitchFamily="49" charset="0"/>
-              </a:rPr>
-              <a:t>got</a:t>
-            </a:r>
-            <a:r>
-              <a:rPr lang="zh-CN" altLang="en-US" dirty="0">
-                <a:solidFill>
-                  <a:schemeClr val="bg1"/>
-                </a:solidFill>
-                <a:latin typeface="Consolas" panose="020B0609020204030204" pitchFamily="49" charset="0"/>
-                <a:cs typeface="Consolas" panose="020B0609020204030204" pitchFamily="49" charset="0"/>
-              </a:rPr>
-              <a:t> </a:t>
-            </a:r>
-            <a:r>
-              <a:rPr lang="en-US" altLang="zh-CN" dirty="0">
-                <a:solidFill>
-                  <a:schemeClr val="bg1"/>
-                </a:solidFill>
-                <a:latin typeface="Consolas" panose="020B0609020204030204" pitchFamily="49" charset="0"/>
-                <a:cs typeface="Consolas" panose="020B0609020204030204" pitchFamily="49" charset="0"/>
-              </a:rPr>
-              <a:t>B.</a:t>
-            </a:r>
-            <a:endParaRPr lang="en-AU" dirty="0">
-              <a:solidFill>
-                <a:schemeClr val="bg1"/>
-              </a:solidFill>
-              <a:latin typeface="Consolas" panose="020B0609020204030204" pitchFamily="49" charset="0"/>
-              <a:cs typeface="Consolas" panose="020B0609020204030204" pitchFamily="49" charset="0"/>
-            </a:endParaRPr>
-          </a:p>
-        </p:txBody>
-      </p:sp>
-      <p:sp>
-        <p:nvSpPr>
-          <p:cNvPr id="13" name="TextBox 12">
-            <a:extLst>
-              <a:ext uri="{FF2B5EF4-FFF2-40B4-BE49-F238E27FC236}">
-                <a16:creationId xmlns:a16="http://schemas.microsoft.com/office/drawing/2014/main" id="{F39B0871-E22C-DCEF-6293-C23088375EB1}"/>
-              </a:ext>
-            </a:extLst>
-          </p:cNvPr>
-          <p:cNvSpPr txBox="1"/>
-          <p:nvPr/>
-        </p:nvSpPr>
-        <p:spPr>
-          <a:xfrm>
-            <a:off x="9947601" y="2287609"/>
-            <a:ext cx="1422000" cy="276999"/>
-          </a:xfrm>
-          <a:prstGeom prst="rect">
-            <a:avLst/>
-          </a:prstGeom>
-          <a:solidFill>
-            <a:schemeClr val="tx1"/>
-          </a:solidFill>
-        </p:spPr>
-        <p:txBody>
-          <a:bodyPr wrap="square" lIns="0" tIns="0" rIns="0" bIns="0" rtlCol="0">
-            <a:spAutoFit/>
-          </a:bodyPr>
-          <a:lstStyle/>
-          <a:p>
-            <a:r>
-              <a:rPr lang="en-US" altLang="zh-CN" dirty="0">
-                <a:solidFill>
-                  <a:schemeClr val="bg1"/>
-                </a:solidFill>
-                <a:latin typeface="Consolas" panose="020B0609020204030204" pitchFamily="49" charset="0"/>
-                <a:cs typeface="Consolas" panose="020B0609020204030204" pitchFamily="49" charset="0"/>
-              </a:rPr>
-              <a:t>n</a:t>
-            </a:r>
-            <a:r>
-              <a:rPr lang="zh-CN" altLang="en-US" dirty="0">
-                <a:solidFill>
-                  <a:schemeClr val="bg1"/>
-                </a:solidFill>
-                <a:latin typeface="Consolas" panose="020B0609020204030204" pitchFamily="49" charset="0"/>
-                <a:cs typeface="Consolas" panose="020B0609020204030204" pitchFamily="49" charset="0"/>
-              </a:rPr>
-              <a:t> </a:t>
-            </a:r>
-            <a:r>
-              <a:rPr lang="en-US" altLang="zh-CN" dirty="0">
-                <a:solidFill>
-                  <a:schemeClr val="bg1"/>
-                </a:solidFill>
-                <a:latin typeface="Consolas" panose="020B0609020204030204" pitchFamily="49" charset="0"/>
-                <a:cs typeface="Consolas" panose="020B0609020204030204" pitchFamily="49" charset="0"/>
-              </a:rPr>
-              <a:t>div.</a:t>
-            </a:r>
-            <a:r>
-              <a:rPr lang="zh-CN" altLang="en-US" dirty="0">
-                <a:solidFill>
-                  <a:schemeClr val="bg1"/>
-                </a:solidFill>
-                <a:latin typeface="Consolas" panose="020B0609020204030204" pitchFamily="49" charset="0"/>
-                <a:cs typeface="Consolas" panose="020B0609020204030204" pitchFamily="49" charset="0"/>
-              </a:rPr>
-              <a:t> </a:t>
-            </a:r>
-            <a:r>
-              <a:rPr lang="en-US" altLang="zh-CN" dirty="0">
-                <a:solidFill>
-                  <a:schemeClr val="bg1"/>
-                </a:solidFill>
-                <a:latin typeface="Consolas" panose="020B0609020204030204" pitchFamily="49" charset="0"/>
-                <a:cs typeface="Consolas" panose="020B0609020204030204" pitchFamily="49" charset="0"/>
-              </a:rPr>
-              <a:t>by</a:t>
-            </a:r>
-            <a:r>
-              <a:rPr lang="zh-CN" altLang="en-US" dirty="0">
-                <a:solidFill>
-                  <a:schemeClr val="bg1"/>
-                </a:solidFill>
-                <a:latin typeface="Consolas" panose="020B0609020204030204" pitchFamily="49" charset="0"/>
-                <a:cs typeface="Consolas" panose="020B0609020204030204" pitchFamily="49" charset="0"/>
-              </a:rPr>
-              <a:t> </a:t>
-            </a:r>
-            <a:r>
-              <a:rPr lang="en-US" altLang="zh-CN" dirty="0">
-                <a:solidFill>
-                  <a:schemeClr val="bg1"/>
-                </a:solidFill>
-                <a:latin typeface="Consolas" panose="020B0609020204030204" pitchFamily="49" charset="0"/>
-                <a:cs typeface="Consolas" panose="020B0609020204030204" pitchFamily="49" charset="0"/>
-              </a:rPr>
-              <a:t>3</a:t>
-            </a:r>
-            <a:endParaRPr lang="en-AU" dirty="0">
-              <a:solidFill>
-                <a:schemeClr val="bg1"/>
-              </a:solidFill>
-              <a:latin typeface="Consolas" panose="020B0609020204030204" pitchFamily="49" charset="0"/>
-              <a:cs typeface="Consolas" panose="020B0609020204030204" pitchFamily="49" charset="0"/>
-            </a:endParaRPr>
-          </a:p>
-        </p:txBody>
-      </p:sp>
-      <p:sp>
-        <p:nvSpPr>
-          <p:cNvPr id="14" name="TextBox 13">
-            <a:extLst>
-              <a:ext uri="{FF2B5EF4-FFF2-40B4-BE49-F238E27FC236}">
-                <a16:creationId xmlns:a16="http://schemas.microsoft.com/office/drawing/2014/main" id="{48E1D848-D0E2-CEC5-79CB-65F89C676E5D}"/>
-              </a:ext>
-            </a:extLst>
-          </p:cNvPr>
-          <p:cNvSpPr txBox="1"/>
-          <p:nvPr/>
-        </p:nvSpPr>
-        <p:spPr>
-          <a:xfrm>
-            <a:off x="6673621" y="5683736"/>
-            <a:ext cx="3348000" cy="261610"/>
-          </a:xfrm>
-          <a:prstGeom prst="rect">
-            <a:avLst/>
-          </a:prstGeom>
-          <a:solidFill>
-            <a:schemeClr val="tx1"/>
-          </a:solidFill>
-        </p:spPr>
-        <p:txBody>
-          <a:bodyPr wrap="square" lIns="0" tIns="0" rIns="0" bIns="0" rtlCol="0">
-            <a:spAutoFit/>
-          </a:bodyPr>
-          <a:lstStyle/>
-          <a:p>
-            <a:r>
-              <a:rPr lang="en-US" altLang="zh-CN" sz="1700" dirty="0">
-                <a:solidFill>
-                  <a:schemeClr val="bg1"/>
-                </a:solidFill>
-                <a:latin typeface="Consolas" panose="020B0609020204030204" pitchFamily="49" charset="0"/>
-                <a:cs typeface="Consolas" panose="020B0609020204030204" pitchFamily="49" charset="0"/>
-              </a:rPr>
-              <a:t>n</a:t>
-            </a:r>
-            <a:r>
-              <a:rPr lang="zh-CN" altLang="en-US" sz="1700" dirty="0">
-                <a:solidFill>
-                  <a:schemeClr val="bg1"/>
-                </a:solidFill>
-                <a:latin typeface="Consolas" panose="020B0609020204030204" pitchFamily="49" charset="0"/>
-                <a:cs typeface="Consolas" panose="020B0609020204030204" pitchFamily="49" charset="0"/>
-              </a:rPr>
-              <a:t> </a:t>
-            </a:r>
-            <a:r>
-              <a:rPr lang="en-US" altLang="zh-CN" sz="1700" dirty="0">
-                <a:solidFill>
-                  <a:schemeClr val="bg1"/>
-                </a:solidFill>
-                <a:latin typeface="Consolas" panose="020B0609020204030204" pitchFamily="49" charset="0"/>
-                <a:cs typeface="Consolas" panose="020B0609020204030204" pitchFamily="49" charset="0"/>
-              </a:rPr>
-              <a:t>div.</a:t>
-            </a:r>
-            <a:r>
-              <a:rPr lang="zh-CN" altLang="en-US" sz="1700" dirty="0">
-                <a:solidFill>
-                  <a:schemeClr val="bg1"/>
-                </a:solidFill>
-                <a:latin typeface="Consolas" panose="020B0609020204030204" pitchFamily="49" charset="0"/>
-                <a:cs typeface="Consolas" panose="020B0609020204030204" pitchFamily="49" charset="0"/>
-              </a:rPr>
-              <a:t> </a:t>
-            </a:r>
-            <a:r>
-              <a:rPr lang="en-US" altLang="zh-CN" sz="1700" dirty="0">
-                <a:solidFill>
-                  <a:schemeClr val="bg1"/>
-                </a:solidFill>
-                <a:latin typeface="Consolas" panose="020B0609020204030204" pitchFamily="49" charset="0"/>
-                <a:cs typeface="Consolas" panose="020B0609020204030204" pitchFamily="49" charset="0"/>
-              </a:rPr>
-              <a:t>only</a:t>
-            </a:r>
-            <a:r>
-              <a:rPr lang="zh-CN" altLang="en-US" sz="1700" dirty="0">
-                <a:solidFill>
-                  <a:schemeClr val="bg1"/>
-                </a:solidFill>
-                <a:latin typeface="Consolas" panose="020B0609020204030204" pitchFamily="49" charset="0"/>
-                <a:cs typeface="Consolas" panose="020B0609020204030204" pitchFamily="49" charset="0"/>
-              </a:rPr>
-              <a:t> </a:t>
-            </a:r>
-            <a:r>
-              <a:rPr lang="en-US" altLang="zh-CN" sz="1700" dirty="0">
-                <a:solidFill>
-                  <a:schemeClr val="bg1"/>
-                </a:solidFill>
-                <a:latin typeface="Consolas" panose="020B0609020204030204" pitchFamily="49" charset="0"/>
-                <a:cs typeface="Consolas" panose="020B0609020204030204" pitchFamily="49" charset="0"/>
-              </a:rPr>
-              <a:t>by</a:t>
-            </a:r>
-            <a:r>
-              <a:rPr lang="zh-CN" altLang="en-US" sz="1700" dirty="0">
-                <a:solidFill>
-                  <a:schemeClr val="bg1"/>
-                </a:solidFill>
-                <a:latin typeface="Consolas" panose="020B0609020204030204" pitchFamily="49" charset="0"/>
-                <a:cs typeface="Consolas" panose="020B0609020204030204" pitchFamily="49" charset="0"/>
-              </a:rPr>
-              <a:t> </a:t>
-            </a:r>
-            <a:r>
-              <a:rPr lang="en-US" altLang="zh-CN" sz="1700" dirty="0">
-                <a:solidFill>
-                  <a:schemeClr val="bg1"/>
-                </a:solidFill>
-                <a:latin typeface="Consolas" panose="020B0609020204030204" pitchFamily="49" charset="0"/>
-                <a:cs typeface="Consolas" panose="020B0609020204030204" pitchFamily="49" charset="0"/>
-              </a:rPr>
-              <a:t>one</a:t>
-            </a:r>
-            <a:r>
-              <a:rPr lang="zh-CN" altLang="en-US" sz="1700" dirty="0">
-                <a:solidFill>
-                  <a:schemeClr val="bg1"/>
-                </a:solidFill>
-                <a:latin typeface="Consolas" panose="020B0609020204030204" pitchFamily="49" charset="0"/>
-                <a:cs typeface="Consolas" panose="020B0609020204030204" pitchFamily="49" charset="0"/>
-              </a:rPr>
-              <a:t> </a:t>
-            </a:r>
-            <a:r>
-              <a:rPr lang="en-US" altLang="zh-CN" sz="1700" dirty="0">
-                <a:solidFill>
-                  <a:schemeClr val="bg1"/>
-                </a:solidFill>
-                <a:latin typeface="Consolas" panose="020B0609020204030204" pitchFamily="49" charset="0"/>
-                <a:cs typeface="Consolas" panose="020B0609020204030204" pitchFamily="49" charset="0"/>
-              </a:rPr>
-              <a:t>of</a:t>
-            </a:r>
-            <a:r>
-              <a:rPr lang="zh-CN" altLang="en-US" sz="1700" dirty="0">
-                <a:solidFill>
-                  <a:schemeClr val="bg1"/>
-                </a:solidFill>
-                <a:latin typeface="Consolas" panose="020B0609020204030204" pitchFamily="49" charset="0"/>
-                <a:cs typeface="Consolas" panose="020B0609020204030204" pitchFamily="49" charset="0"/>
-              </a:rPr>
-              <a:t> </a:t>
-            </a:r>
-            <a:r>
-              <a:rPr lang="en-US" altLang="zh-CN" sz="1700" dirty="0">
-                <a:solidFill>
-                  <a:schemeClr val="bg1"/>
-                </a:solidFill>
-                <a:latin typeface="Consolas" panose="020B0609020204030204" pitchFamily="49" charset="0"/>
-                <a:cs typeface="Consolas" panose="020B0609020204030204" pitchFamily="49" charset="0"/>
-              </a:rPr>
-              <a:t>3</a:t>
-            </a:r>
-            <a:r>
-              <a:rPr lang="zh-CN" altLang="en-US" sz="1700" dirty="0">
-                <a:solidFill>
-                  <a:schemeClr val="bg1"/>
-                </a:solidFill>
-                <a:latin typeface="Consolas" panose="020B0609020204030204" pitchFamily="49" charset="0"/>
-                <a:cs typeface="Consolas" panose="020B0609020204030204" pitchFamily="49" charset="0"/>
-              </a:rPr>
-              <a:t> </a:t>
-            </a:r>
-            <a:r>
-              <a:rPr lang="en-US" altLang="zh-CN" sz="1700" dirty="0">
-                <a:solidFill>
-                  <a:schemeClr val="bg1"/>
-                </a:solidFill>
-                <a:latin typeface="Consolas" panose="020B0609020204030204" pitchFamily="49" charset="0"/>
-                <a:cs typeface="Consolas" panose="020B0609020204030204" pitchFamily="49" charset="0"/>
-              </a:rPr>
-              <a:t>or</a:t>
-            </a:r>
-            <a:r>
-              <a:rPr lang="zh-CN" altLang="en-US" sz="1400" dirty="0">
-                <a:solidFill>
-                  <a:schemeClr val="bg1"/>
-                </a:solidFill>
-                <a:latin typeface="Consolas" panose="020B0609020204030204" pitchFamily="49" charset="0"/>
-                <a:cs typeface="Consolas" panose="020B0609020204030204" pitchFamily="49" charset="0"/>
-              </a:rPr>
-              <a:t> </a:t>
-            </a:r>
-            <a:r>
-              <a:rPr lang="en-US" altLang="zh-CN" sz="1700" dirty="0">
-                <a:solidFill>
-                  <a:schemeClr val="bg1"/>
-                </a:solidFill>
-                <a:latin typeface="Consolas" panose="020B0609020204030204" pitchFamily="49" charset="0"/>
-                <a:cs typeface="Consolas" panose="020B0609020204030204" pitchFamily="49" charset="0"/>
-              </a:rPr>
-              <a:t>5</a:t>
-            </a:r>
-            <a:endParaRPr lang="en-AU" sz="1700" dirty="0">
-              <a:solidFill>
-                <a:schemeClr val="bg1"/>
-              </a:solidFill>
-              <a:latin typeface="Consolas" panose="020B0609020204030204" pitchFamily="49" charset="0"/>
-              <a:cs typeface="Consolas" panose="020B0609020204030204" pitchFamily="49" charset="0"/>
-            </a:endParaRPr>
-          </a:p>
-        </p:txBody>
-      </p:sp>
-      <p:sp>
-        <p:nvSpPr>
-          <p:cNvPr id="17" name="TextBox 16">
-            <a:extLst>
-              <a:ext uri="{FF2B5EF4-FFF2-40B4-BE49-F238E27FC236}">
-                <a16:creationId xmlns:a16="http://schemas.microsoft.com/office/drawing/2014/main" id="{1FDBBE56-66AE-D0D8-5447-C8D3ABE50AD7}"/>
-              </a:ext>
-            </a:extLst>
-          </p:cNvPr>
-          <p:cNvSpPr txBox="1"/>
-          <p:nvPr/>
-        </p:nvSpPr>
-        <p:spPr>
-          <a:xfrm>
-            <a:off x="3108807" y="3703868"/>
-            <a:ext cx="2084459" cy="369332"/>
-          </a:xfrm>
-          <a:prstGeom prst="rect">
-            <a:avLst/>
-          </a:prstGeom>
-          <a:solidFill>
-            <a:schemeClr val="tx1"/>
-          </a:solidFill>
-        </p:spPr>
-        <p:txBody>
-          <a:bodyPr wrap="square" rtlCol="0">
-            <a:spAutoFit/>
-          </a:bodyPr>
-          <a:lstStyle/>
-          <a:p>
-            <a:r>
-              <a:rPr lang="en-US" altLang="zh-CN" dirty="0">
-                <a:solidFill>
-                  <a:srgbClr val="0070C0"/>
-                </a:solidFill>
-                <a:latin typeface="Consolas" panose="020B0609020204030204" pitchFamily="49" charset="0"/>
-                <a:cs typeface="Consolas" panose="020B0609020204030204" pitchFamily="49" charset="0"/>
-              </a:rPr>
-              <a:t>//</a:t>
-            </a:r>
-            <a:r>
-              <a:rPr lang="zh-CN" altLang="en-US" dirty="0">
-                <a:solidFill>
-                  <a:srgbClr val="0070C0"/>
-                </a:solidFill>
-                <a:latin typeface="Consolas" panose="020B0609020204030204" pitchFamily="49" charset="0"/>
-                <a:cs typeface="Consolas" panose="020B0609020204030204" pitchFamily="49" charset="0"/>
-              </a:rPr>
-              <a:t> </a:t>
-            </a:r>
-            <a:r>
-              <a:rPr lang="en-US" altLang="zh-CN" dirty="0">
-                <a:solidFill>
-                  <a:srgbClr val="0070C0"/>
-                </a:solidFill>
-                <a:latin typeface="Consolas" panose="020B0609020204030204" pitchFamily="49" charset="0"/>
-                <a:cs typeface="Consolas" panose="020B0609020204030204" pitchFamily="49" charset="0"/>
-              </a:rPr>
-              <a:t>or</a:t>
-            </a:r>
-            <a:r>
-              <a:rPr lang="zh-CN" altLang="en-US" dirty="0">
-                <a:solidFill>
-                  <a:srgbClr val="0070C0"/>
-                </a:solidFill>
-                <a:latin typeface="Consolas" panose="020B0609020204030204" pitchFamily="49" charset="0"/>
-                <a:cs typeface="Consolas" panose="020B0609020204030204" pitchFamily="49" charset="0"/>
-              </a:rPr>
-              <a:t> </a:t>
-            </a:r>
-            <a:r>
-              <a:rPr lang="en-US" altLang="zh-CN" dirty="0">
-                <a:solidFill>
-                  <a:srgbClr val="0070C0"/>
-                </a:solidFill>
-                <a:latin typeface="Consolas" panose="020B0609020204030204" pitchFamily="49" charset="0"/>
-                <a:cs typeface="Consolas" panose="020B0609020204030204" pitchFamily="49" charset="0"/>
-              </a:rPr>
-              <a:t>n%15==0</a:t>
-            </a:r>
-            <a:endParaRPr lang="en-AU" dirty="0">
-              <a:solidFill>
-                <a:srgbClr val="0070C0"/>
-              </a:solidFill>
-              <a:latin typeface="Consolas" panose="020B0609020204030204" pitchFamily="49" charset="0"/>
-              <a:cs typeface="Consolas" panose="020B0609020204030204" pitchFamily="49" charset="0"/>
-            </a:endParaRPr>
-          </a:p>
-        </p:txBody>
-      </p:sp>
-    </p:spTree>
-    <p:extLst>
-      <p:ext uri="{BB962C8B-B14F-4D97-AF65-F5344CB8AC3E}">
-        <p14:creationId xmlns:p14="http://schemas.microsoft.com/office/powerpoint/2010/main" val="3205945023"/>
-      </p:ext>
-    </p:extLst>
-  </p:cSld>
-  <p:clrMapOvr>
-    <a:masterClrMapping/>
-  </p:clrMapOvr>
 </p:sld>
 </file>
 
